--- a/docs/PRESENTATION.pptx
+++ b/docs/PRESENTATION.pptx
@@ -17,6 +17,11 @@
     <p:sldId id="265" r:id="rId16"/>
     <p:sldId id="266" r:id="rId17"/>
     <p:sldId id="267" r:id="rId18"/>
+    <p:sldId id="268" r:id="rId19"/>
+    <p:sldId id="269" r:id="rId20"/>
+    <p:sldId id="270" r:id="rId21"/>
+    <p:sldId id="271" r:id="rId22"/>
+    <p:sldId id="272" r:id="rId23"/>
   </p:sldIdLst>
   <p:sldSz cx="12191695" cy="6858000" type="screen4x3"/>
   <p:notesSz cx="6858000" cy="9144000"/>
@@ -3159,7 +3164,7 @@
         </p:nvSpPr>
         <p:spPr>
           <a:xfrm>
-            <a:off x="822960" y="1920240"/>
+            <a:off x="822960" y="1828800"/>
             <a:ext cx="10515600" cy="1188720"/>
           </a:xfrm>
           <a:prstGeom prst="rect">
@@ -3198,7 +3203,7 @@
         </p:nvSpPr>
         <p:spPr>
           <a:xfrm>
-            <a:off x="822960" y="3200400"/>
+            <a:off x="822960" y="3108960"/>
             <a:ext cx="10515600" cy="640080"/>
           </a:xfrm>
           <a:prstGeom prst="rect">
@@ -3237,7 +3242,7 @@
         </p:nvSpPr>
         <p:spPr>
           <a:xfrm>
-            <a:off x="822960" y="4114800"/>
+            <a:off x="822960" y="4023360"/>
             <a:ext cx="10515600" cy="548640"/>
           </a:xfrm>
           <a:prstGeom prst="rect">
@@ -3263,7 +3268,7 @@
                 </a:solidFill>
                 <a:latin typeface="Segoe UI"/>
               </a:rPr>
-              <a:t>Sri Lankan Students Innovation Challenge 2026  |  Final</a:t>
+              <a:t>Team Three Hacks  |  Startup Innovation Competition 2026</a:t>
             </a:r>
           </a:p>
         </p:txBody>
@@ -3635,7 +3640,7 @@
                 </a:solidFill>
                 <a:latin typeface="Segoe UI"/>
               </a:rPr>
-              <a:t>km/h verified</a:t>
+              <a:t>km/h speed verified</a:t>
             </a:r>
           </a:p>
         </p:txBody>
@@ -3744,7 +3749,7 @@
                 </a:solidFill>
                 <a:latin typeface="Segoe UI"/>
               </a:rPr>
-              <a:t>PRACTICAL AND MODULAR</a:t>
+              <a:t>THE REAL DIFFERENTIATOR</a:t>
             </a:r>
           </a:p>
         </p:txBody>
@@ -3783,7 +3788,7 @@
                 </a:solidFill>
                 <a:latin typeface="Segoe UI"/>
               </a:rPr>
-              <a:t>Deployment</a:t>
+              <a:t>Why it can be trusted</a:t>
             </a:r>
           </a:p>
         </p:txBody>
@@ -3797,7 +3802,7 @@
         <p:spPr>
           <a:xfrm>
             <a:off x="731520" y="1874519"/>
-            <a:ext cx="10607040" cy="3108960"/>
+            <a:ext cx="10607040" cy="3657600"/>
           </a:xfrm>
           <a:prstGeom prst="rect">
             <a:avLst/>
@@ -3812,153 +3817,498 @@
           <a:p>
             <a:pPr algn="l">
               <a:spcAft>
-                <a:spcPts val="1400"/>
-              </a:spcAft>
-            </a:pPr>
-            <a:r>
-              <a:rPr sz="1800" b="0">
-                <a:solidFill>
-                  <a:srgbClr val="F2F6FF"/>
-                </a:solidFill>
-                <a:latin typeface="Segoe UI"/>
-              </a:rPr>
-              <a:t>Works with </a:t>
-            </a:r>
-            <a:r>
-              <a:rPr sz="1800" b="1">
-                <a:solidFill>
-                  <a:srgbClr val="F2F6FF"/>
-                </a:solidFill>
-                <a:latin typeface="Segoe UI"/>
-              </a:rPr>
-              <a:t>existing CCTV</a:t>
-            </a:r>
-            <a:r>
-              <a:rPr sz="1800" b="0">
-                <a:solidFill>
-                  <a:srgbClr val="F2F6FF"/>
-                </a:solidFill>
-                <a:latin typeface="Segoe UI"/>
-              </a:rPr>
-              <a:t>, a phone stream, or a drone via OBS - no new hardware.</a:t>
-            </a:r>
-          </a:p>
-          <a:p>
-            <a:pPr algn="l">
-              <a:spcAft>
-                <a:spcPts val="1400"/>
-              </a:spcAft>
-            </a:pPr>
-            <a:r>
-              <a:rPr sz="1800" b="0">
-                <a:solidFill>
-                  <a:srgbClr val="F2F6FF"/>
-                </a:solidFill>
-                <a:latin typeface="Segoe UI"/>
-              </a:rPr>
-              <a:t>A pilot site runs on a </a:t>
-            </a:r>
-            <a:r>
-              <a:rPr sz="1800" b="1">
-                <a:solidFill>
-                  <a:srgbClr val="F2F6FF"/>
-                </a:solidFill>
-                <a:latin typeface="Segoe UI"/>
-              </a:rPr>
-              <a:t>single laptop</a:t>
-            </a:r>
-            <a:r>
-              <a:rPr sz="1800" b="0">
-                <a:solidFill>
-                  <a:srgbClr val="F2F6FF"/>
-                </a:solidFill>
-                <a:latin typeface="Segoe UI"/>
-              </a:rPr>
-              <a:t>; cities use GPU edge boxes.</a:t>
-            </a:r>
-          </a:p>
-          <a:p>
-            <a:pPr algn="l">
-              <a:spcAft>
-                <a:spcPts val="1400"/>
-              </a:spcAft>
-            </a:pPr>
-            <a:r>
-              <a:rPr sz="1800" b="0">
-                <a:solidFill>
-                  <a:srgbClr val="F2F6FF"/>
-                </a:solidFill>
-                <a:latin typeface="Segoe UI"/>
-              </a:rPr>
-              <a:t>Helmet, seatbelt, plate and three-wheeler models are </a:t>
-            </a:r>
-            <a:r>
-              <a:rPr sz="1800" b="1">
-                <a:solidFill>
-                  <a:srgbClr val="F2F6FF"/>
-                </a:solidFill>
-                <a:latin typeface="Segoe UI"/>
-              </a:rPr>
-              <a:t>drop-in files</a:t>
-            </a:r>
-            <a:r>
-              <a:rPr sz="1800" b="0">
-                <a:solidFill>
-                  <a:srgbClr val="F2F6FF"/>
-                </a:solidFill>
-                <a:latin typeface="Segoe UI"/>
-              </a:rPr>
-              <a:t> - no code change.</a:t>
-            </a:r>
-          </a:p>
-          <a:p>
-            <a:pPr algn="l">
-              <a:spcAft>
-                <a:spcPts val="1400"/>
-              </a:spcAft>
-            </a:pPr>
-            <a:r>
-              <a:rPr sz="1800" b="0">
-                <a:solidFill>
-                  <a:srgbClr val="F2F6FF"/>
-                </a:solidFill>
-                <a:latin typeface="Segoe UI"/>
-              </a:rPr>
-              <a:t>Python, FastAPI, YOLOv8, ByteTrack, OpenCV, EasyOCR, SQLite.</a:t>
-            </a:r>
-          </a:p>
-          <a:p>
-            <a:pPr algn="l">
-              <a:spcAft>
-                <a:spcPts val="1400"/>
-              </a:spcAft>
-            </a:pPr>
-            <a:r>
-              <a:rPr sz="1800" b="0">
-                <a:solidFill>
-                  <a:srgbClr val="F2F6FF"/>
-                </a:solidFill>
-                <a:latin typeface="Segoe UI"/>
-              </a:rPr>
-              <a:t>The dashboard is a </a:t>
-            </a:r>
-            <a:r>
-              <a:rPr sz="1800" b="1">
-                <a:solidFill>
-                  <a:srgbClr val="F2F6FF"/>
-                </a:solidFill>
-                <a:latin typeface="Segoe UI"/>
-              </a:rPr>
-              <a:t>single self-contained HTML file</a:t>
-            </a:r>
-            <a:r>
-              <a:rPr sz="1800" b="0">
-                <a:solidFill>
-                  <a:srgbClr val="F2F6FF"/>
-                </a:solidFill>
-                <a:latin typeface="Segoe UI"/>
-              </a:rPr>
-              <a:t> with no external dependencies.</a:t>
+                <a:spcPts val="1200"/>
+              </a:spcAft>
+            </a:pPr>
+            <a:r>
+              <a:rPr sz="1700" b="1">
+                <a:solidFill>
+                  <a:srgbClr val="F2F6FF"/>
+                </a:solidFill>
+                <a:latin typeface="Segoe UI"/>
+              </a:rPr>
+              <a:t>Parked vehicles are never fined</a:t>
+            </a:r>
+            <a:r>
+              <a:rPr sz="1700" b="0">
+                <a:solidFill>
+                  <a:srgbClr val="F2F6FF"/>
+                </a:solidFill>
+                <a:latin typeface="Segoe UI"/>
+              </a:rPr>
+              <a:t> - 41 vehicles, 0 violations on a parked-motorcycle clip.</a:t>
+            </a:r>
+          </a:p>
+          <a:p>
+            <a:pPr algn="l">
+              <a:spcAft>
+                <a:spcPts val="1200"/>
+              </a:spcAft>
+            </a:pPr>
+            <a:r>
+              <a:rPr sz="1700" b="1">
+                <a:solidFill>
+                  <a:srgbClr val="F2F6FF"/>
+                </a:solidFill>
+                <a:latin typeface="Segoe UI"/>
+              </a:rPr>
+              <a:t>Unreadable plates say UNREADABLE</a:t>
+            </a:r>
+            <a:r>
+              <a:rPr sz="1700" b="0">
+                <a:solidFill>
+                  <a:srgbClr val="F2F6FF"/>
+                </a:solidFill>
+                <a:latin typeface="Segoe UI"/>
+              </a:rPr>
+              <a:t> - a number is never invented.</a:t>
+            </a:r>
+          </a:p>
+          <a:p>
+            <a:pPr algn="l">
+              <a:spcAft>
+                <a:spcPts val="1200"/>
+              </a:spcAft>
+            </a:pPr>
+            <a:r>
+              <a:rPr sz="1700" b="1">
+                <a:solidFill>
+                  <a:srgbClr val="F2F6FF"/>
+                </a:solidFill>
+                <a:latin typeface="Segoe UI"/>
+              </a:rPr>
+              <a:t>No calibration means no speed shown</a:t>
+            </a:r>
+            <a:r>
+              <a:rPr sz="1700" b="0">
+                <a:solidFill>
+                  <a:srgbClr val="F2F6FF"/>
+                </a:solidFill>
+                <a:latin typeface="Segoe UI"/>
+              </a:rPr>
+              <a:t>, rather than a misleading guess.</a:t>
+            </a:r>
+          </a:p>
+          <a:p>
+            <a:pPr algn="l">
+              <a:spcAft>
+                <a:spcPts val="1200"/>
+              </a:spcAft>
+            </a:pPr>
+            <a:r>
+              <a:rPr sz="1700" b="1">
+                <a:solidFill>
+                  <a:srgbClr val="F2F6FF"/>
+                </a:solidFill>
+                <a:latin typeface="Segoe UI"/>
+              </a:rPr>
+              <a:t>A violation must persist across frames</a:t>
+            </a:r>
+            <a:r>
+              <a:rPr sz="1700" b="0">
+                <a:solidFill>
+                  <a:srgbClr val="F2F6FF"/>
+                </a:solidFill>
+                <a:latin typeface="Segoe UI"/>
+              </a:rPr>
+              <a:t> - one-frame anomalies rejected.</a:t>
+            </a:r>
+          </a:p>
+          <a:p>
+            <a:pPr algn="l">
+              <a:spcAft>
+                <a:spcPts val="1200"/>
+              </a:spcAft>
+            </a:pPr>
+            <a:r>
+              <a:rPr sz="1700" b="1">
+                <a:solidFill>
+                  <a:srgbClr val="F2F6FF"/>
+                </a:solidFill>
+                <a:latin typeface="Segoe UI"/>
+              </a:rPr>
+              <a:t>No mock data exists</a:t>
+            </a:r>
+            <a:r>
+              <a:rPr sz="1700" b="0">
+                <a:solidFill>
+                  <a:srgbClr val="F2F6FF"/>
+                </a:solidFill>
+                <a:latin typeface="Segoe UI"/>
+              </a:rPr>
+              <a:t> anywhere in the product.</a:t>
+            </a:r>
+          </a:p>
+        </p:txBody>
+      </p:sp>
+      <p:sp>
+        <p:nvSpPr>
+          <p:cNvPr id="6" name="Rectangle 5"/>
+          <p:cNvSpPr/>
+          <p:nvPr/>
+        </p:nvSpPr>
+        <p:spPr>
+          <a:xfrm>
+            <a:off x="822960" y="5074920"/>
+            <a:ext cx="3291840" cy="1234440"/>
+          </a:xfrm>
+          <a:prstGeom prst="rect">
+            <a:avLst/>
+          </a:prstGeom>
+          <a:solidFill>
+            <a:srgbClr val="111E3D"/>
+          </a:solidFill>
+          <a:ln>
+            <a:solidFill>
+              <a:srgbClr val="294A8F"/>
+            </a:solidFill>
+          </a:ln>
+          <a:effectLst/>
+        </p:spPr>
+        <p:style>
+          <a:lnRef idx="1">
+            <a:schemeClr val="accent1"/>
+          </a:lnRef>
+          <a:fillRef idx="3">
+            <a:schemeClr val="accent1"/>
+          </a:fillRef>
+          <a:effectRef idx="2">
+            <a:schemeClr val="accent1"/>
+          </a:effectRef>
+          <a:fontRef idx="minor">
+            <a:schemeClr val="lt1"/>
+          </a:fontRef>
+        </p:style>
+        <p:txBody>
+          <a:bodyPr rtlCol="0" anchor="ctr"/>
+          <a:lstStyle/>
+          <a:p>
+            <a:pPr algn="ctr"/>
+          </a:p>
+        </p:txBody>
+      </p:sp>
+      <p:sp>
+        <p:nvSpPr>
+          <p:cNvPr id="7" name="TextBox 6"/>
+          <p:cNvSpPr txBox="1"/>
+          <p:nvPr/>
+        </p:nvSpPr>
+        <p:spPr>
+          <a:xfrm>
+            <a:off x="822960" y="5202936"/>
+            <a:ext cx="3291840" cy="548640"/>
+          </a:xfrm>
+          <a:prstGeom prst="rect">
+            <a:avLst/>
+          </a:prstGeom>
+          <a:noFill/>
+        </p:spPr>
+        <p:txBody>
+          <a:bodyPr wrap="square">
+            <a:spAutoFit/>
+          </a:bodyPr>
+          <a:lstStyle/>
+          <a:p>
+            <a:pPr algn="ctr">
+              <a:spcAft>
+                <a:spcPts val="600"/>
+              </a:spcAft>
+            </a:pPr>
+            <a:r>
+              <a:rPr sz="3000" b="1">
+                <a:solidFill>
+                  <a:srgbClr val="FFC74D"/>
+                </a:solidFill>
+                <a:latin typeface="Segoe UI"/>
+              </a:rPr>
+              <a:t>6</a:t>
+            </a:r>
+          </a:p>
+        </p:txBody>
+      </p:sp>
+      <p:sp>
+        <p:nvSpPr>
+          <p:cNvPr id="8" name="TextBox 7"/>
+          <p:cNvSpPr txBox="1"/>
+          <p:nvPr/>
+        </p:nvSpPr>
+        <p:spPr>
+          <a:xfrm>
+            <a:off x="822960" y="5788152"/>
+            <a:ext cx="3291840" cy="457200"/>
+          </a:xfrm>
+          <a:prstGeom prst="rect">
+            <a:avLst/>
+          </a:prstGeom>
+          <a:noFill/>
+        </p:spPr>
+        <p:txBody>
+          <a:bodyPr wrap="square">
+            <a:spAutoFit/>
+          </a:bodyPr>
+          <a:lstStyle/>
+          <a:p>
+            <a:pPr algn="ctr">
+              <a:spcAft>
+                <a:spcPts val="600"/>
+              </a:spcAft>
+            </a:pPr>
+            <a:r>
+              <a:rPr sz="1150" b="0">
+                <a:solidFill>
+                  <a:srgbClr val="9FB3D1"/>
+                </a:solidFill>
+                <a:latin typeface="Segoe UI"/>
+              </a:rPr>
+              <a:t>false-positive defects found and fixed</a:t>
+            </a:r>
+          </a:p>
+        </p:txBody>
+      </p:sp>
+      <p:sp>
+        <p:nvSpPr>
+          <p:cNvPr id="9" name="Rectangle 8"/>
+          <p:cNvSpPr/>
+          <p:nvPr/>
+        </p:nvSpPr>
+        <p:spPr>
+          <a:xfrm>
+            <a:off x="4389120" y="5074920"/>
+            <a:ext cx="3291840" cy="1234440"/>
+          </a:xfrm>
+          <a:prstGeom prst="rect">
+            <a:avLst/>
+          </a:prstGeom>
+          <a:solidFill>
+            <a:srgbClr val="111E3D"/>
+          </a:solidFill>
+          <a:ln>
+            <a:solidFill>
+              <a:srgbClr val="294A8F"/>
+            </a:solidFill>
+          </a:ln>
+          <a:effectLst/>
+        </p:spPr>
+        <p:style>
+          <a:lnRef idx="1">
+            <a:schemeClr val="accent1"/>
+          </a:lnRef>
+          <a:fillRef idx="3">
+            <a:schemeClr val="accent1"/>
+          </a:fillRef>
+          <a:effectRef idx="2">
+            <a:schemeClr val="accent1"/>
+          </a:effectRef>
+          <a:fontRef idx="minor">
+            <a:schemeClr val="lt1"/>
+          </a:fontRef>
+        </p:style>
+        <p:txBody>
+          <a:bodyPr rtlCol="0" anchor="ctr"/>
+          <a:lstStyle/>
+          <a:p>
+            <a:pPr algn="ctr"/>
+          </a:p>
+        </p:txBody>
+      </p:sp>
+      <p:sp>
+        <p:nvSpPr>
+          <p:cNvPr id="10" name="TextBox 9"/>
+          <p:cNvSpPr txBox="1"/>
+          <p:nvPr/>
+        </p:nvSpPr>
+        <p:spPr>
+          <a:xfrm>
+            <a:off x="4389120" y="5202936"/>
+            <a:ext cx="3291840" cy="548640"/>
+          </a:xfrm>
+          <a:prstGeom prst="rect">
+            <a:avLst/>
+          </a:prstGeom>
+          <a:noFill/>
+        </p:spPr>
+        <p:txBody>
+          <a:bodyPr wrap="square">
+            <a:spAutoFit/>
+          </a:bodyPr>
+          <a:lstStyle/>
+          <a:p>
+            <a:pPr algn="ctr">
+              <a:spcAft>
+                <a:spcPts val="600"/>
+              </a:spcAft>
+            </a:pPr>
+            <a:r>
+              <a:rPr sz="3000" b="1">
+                <a:solidFill>
+                  <a:srgbClr val="4ADE80"/>
+                </a:solidFill>
+                <a:latin typeface="Segoe UI"/>
+              </a:rPr>
+              <a:t>79</a:t>
+            </a:r>
+          </a:p>
+        </p:txBody>
+      </p:sp>
+      <p:sp>
+        <p:nvSpPr>
+          <p:cNvPr id="11" name="TextBox 10"/>
+          <p:cNvSpPr txBox="1"/>
+          <p:nvPr/>
+        </p:nvSpPr>
+        <p:spPr>
+          <a:xfrm>
+            <a:off x="4389120" y="5788152"/>
+            <a:ext cx="3291840" cy="457200"/>
+          </a:xfrm>
+          <a:prstGeom prst="rect">
+            <a:avLst/>
+          </a:prstGeom>
+          <a:noFill/>
+        </p:spPr>
+        <p:txBody>
+          <a:bodyPr wrap="square">
+            <a:spAutoFit/>
+          </a:bodyPr>
+          <a:lstStyle/>
+          <a:p>
+            <a:pPr algn="ctr">
+              <a:spcAft>
+                <a:spcPts val="600"/>
+              </a:spcAft>
+            </a:pPr>
+            <a:r>
+              <a:rPr sz="1150" b="0">
+                <a:solidFill>
+                  <a:srgbClr val="9FB3D1"/>
+                </a:solidFill>
+                <a:latin typeface="Segoe UI"/>
+              </a:rPr>
+              <a:t>automated tests passing</a:t>
+            </a:r>
+          </a:p>
+        </p:txBody>
+      </p:sp>
+      <p:sp>
+        <p:nvSpPr>
+          <p:cNvPr id="12" name="Rectangle 11"/>
+          <p:cNvSpPr/>
+          <p:nvPr/>
+        </p:nvSpPr>
+        <p:spPr>
+          <a:xfrm>
+            <a:off x="7955279" y="5074920"/>
+            <a:ext cx="3291840" cy="1234440"/>
+          </a:xfrm>
+          <a:prstGeom prst="rect">
+            <a:avLst/>
+          </a:prstGeom>
+          <a:solidFill>
+            <a:srgbClr val="111E3D"/>
+          </a:solidFill>
+          <a:ln>
+            <a:solidFill>
+              <a:srgbClr val="294A8F"/>
+            </a:solidFill>
+          </a:ln>
+          <a:effectLst/>
+        </p:spPr>
+        <p:style>
+          <a:lnRef idx="1">
+            <a:schemeClr val="accent1"/>
+          </a:lnRef>
+          <a:fillRef idx="3">
+            <a:schemeClr val="accent1"/>
+          </a:fillRef>
+          <a:effectRef idx="2">
+            <a:schemeClr val="accent1"/>
+          </a:effectRef>
+          <a:fontRef idx="minor">
+            <a:schemeClr val="lt1"/>
+          </a:fontRef>
+        </p:style>
+        <p:txBody>
+          <a:bodyPr rtlCol="0" anchor="ctr"/>
+          <a:lstStyle/>
+          <a:p>
+            <a:pPr algn="ctr"/>
+          </a:p>
+        </p:txBody>
+      </p:sp>
+      <p:sp>
+        <p:nvSpPr>
+          <p:cNvPr id="13" name="TextBox 12"/>
+          <p:cNvSpPr txBox="1"/>
+          <p:nvPr/>
+        </p:nvSpPr>
+        <p:spPr>
+          <a:xfrm>
+            <a:off x="7955279" y="5202936"/>
+            <a:ext cx="3291840" cy="548640"/>
+          </a:xfrm>
+          <a:prstGeom prst="rect">
+            <a:avLst/>
+          </a:prstGeom>
+          <a:noFill/>
+        </p:spPr>
+        <p:txBody>
+          <a:bodyPr wrap="square">
+            <a:spAutoFit/>
+          </a:bodyPr>
+          <a:lstStyle/>
+          <a:p>
+            <a:pPr algn="ctr">
+              <a:spcAft>
+                <a:spcPts val="600"/>
+              </a:spcAft>
+            </a:pPr>
+            <a:r>
+              <a:rPr sz="3000" b="1">
+                <a:solidFill>
+                  <a:srgbClr val="22D3EE"/>
+                </a:solidFill>
+                <a:latin typeface="Segoe UI"/>
+              </a:rPr>
+              <a:t>0</a:t>
+            </a:r>
+          </a:p>
+        </p:txBody>
+      </p:sp>
+      <p:sp>
+        <p:nvSpPr>
+          <p:cNvPr id="14" name="TextBox 13"/>
+          <p:cNvSpPr txBox="1"/>
+          <p:nvPr/>
+        </p:nvSpPr>
+        <p:spPr>
+          <a:xfrm>
+            <a:off x="7955279" y="5788152"/>
+            <a:ext cx="3291840" cy="457200"/>
+          </a:xfrm>
+          <a:prstGeom prst="rect">
+            <a:avLst/>
+          </a:prstGeom>
+          <a:noFill/>
+        </p:spPr>
+        <p:txBody>
+          <a:bodyPr wrap="square">
+            <a:spAutoFit/>
+          </a:bodyPr>
+          <a:lstStyle/>
+          <a:p>
+            <a:pPr algn="ctr">
+              <a:spcAft>
+                <a:spcPts val="600"/>
+              </a:spcAft>
+            </a:pPr>
+            <a:r>
+              <a:rPr sz="1150" b="0">
+                <a:solidFill>
+                  <a:srgbClr val="9FB3D1"/>
+                </a:solidFill>
+                <a:latin typeface="Segoe UI"/>
+              </a:rPr>
+              <a:t>violations on parked bikes</a:t>
             </a:r>
           </a:p>
         </p:txBody>
@@ -4067,7 +4417,7 @@
                 </a:solidFill>
                 <a:latin typeface="Segoe UI"/>
               </a:rPr>
-              <a:t>WHERE THIS GOES</a:t>
+              <a:t>ENGINEERING RIGOUR</a:t>
             </a:r>
           </a:p>
         </p:txBody>
@@ -4106,7 +4456,7 @@
                 </a:solidFill>
                 <a:latin typeface="Segoe UI"/>
               </a:rPr>
-              <a:t>Impact and roadmap</a:t>
+              <a:t>Found by testing on real roads</a:t>
             </a:r>
           </a:p>
         </p:txBody>
@@ -4119,8 +4469,8 @@
         </p:nvSpPr>
         <p:spPr>
           <a:xfrm>
-            <a:off x="731520" y="1874519"/>
-            <a:ext cx="10607040" cy="2926080"/>
+            <a:off x="777240" y="1874519"/>
+            <a:ext cx="4846320" cy="731520"/>
           </a:xfrm>
           <a:prstGeom prst="rect">
             <a:avLst/>
@@ -4135,101 +4485,17 @@
           <a:p>
             <a:pPr algn="l">
               <a:spcAft>
-                <a:spcPts val="1500"/>
-              </a:spcAft>
-            </a:pPr>
-            <a:r>
-              <a:rPr sz="1850" b="1">
-                <a:solidFill>
-                  <a:srgbClr val="F2F6FF"/>
-                </a:solidFill>
-                <a:latin typeface="Segoe UI"/>
-              </a:rPr>
-              <a:t>24/7 coverage</a:t>
-            </a:r>
-            <a:r>
-              <a:rPr sz="1850" b="0">
-                <a:solidFill>
-                  <a:srgbClr val="F2F6FF"/>
-                </a:solidFill>
-                <a:latin typeface="Segoe UI"/>
-              </a:rPr>
-              <a:t> without multiplying officers.</a:t>
-            </a:r>
-          </a:p>
-          <a:p>
-            <a:pPr algn="l">
-              <a:spcAft>
-                <a:spcPts val="1500"/>
-              </a:spcAft>
-            </a:pPr>
-            <a:r>
-              <a:rPr sz="1850" b="1">
-                <a:solidFill>
-                  <a:srgbClr val="F2F6FF"/>
-                </a:solidFill>
-                <a:latin typeface="Segoe UI"/>
-              </a:rPr>
-              <a:t>Court-ready evidence</a:t>
-            </a:r>
-            <a:r>
-              <a:rPr sz="1850" b="0">
-                <a:solidFill>
-                  <a:srgbClr val="F2F6FF"/>
-                </a:solidFill>
-                <a:latin typeface="Segoe UI"/>
-              </a:rPr>
-              <a:t> means fines that hold up when challenged.</a:t>
-            </a:r>
-          </a:p>
-          <a:p>
-            <a:pPr algn="l">
-              <a:spcAft>
-                <a:spcPts val="1500"/>
-              </a:spcAft>
-            </a:pPr>
-            <a:r>
-              <a:rPr sz="1850" b="0">
-                <a:solidFill>
-                  <a:srgbClr val="F2F6FF"/>
-                </a:solidFill>
-                <a:latin typeface="Segoe UI"/>
-              </a:rPr>
-              <a:t>A searchable plate log enables </a:t>
-            </a:r>
-            <a:r>
-              <a:rPr sz="1850" b="1">
-                <a:solidFill>
-                  <a:srgbClr val="F2F6FF"/>
-                </a:solidFill>
-                <a:latin typeface="Segoe UI"/>
-              </a:rPr>
-              <a:t>repeat-offender analytics</a:t>
-            </a:r>
-            <a:r>
-              <a:rPr sz="1850" b="0">
-                <a:solidFill>
-                  <a:srgbClr val="F2F6FF"/>
-                </a:solidFill>
-                <a:latin typeface="Segoe UI"/>
-              </a:rPr>
-              <a:t>.</a:t>
-            </a:r>
-          </a:p>
-          <a:p>
-            <a:pPr algn="l">
-              <a:spcAft>
-                <a:spcPts val="1500"/>
-              </a:spcAft>
-            </a:pPr>
-            <a:r>
-              <a:rPr sz="1850" b="0">
-                <a:solidFill>
-                  <a:srgbClr val="F2F6FF"/>
-                </a:solidFill>
-                <a:latin typeface="Segoe UI"/>
-              </a:rPr>
-              <a:t>Next: night and weather models, a vision-language model for ambiguous cases, and a live junction pilot.</a:t>
+                <a:spcPts val="600"/>
+              </a:spcAft>
+            </a:pPr>
+            <a:r>
+              <a:rPr sz="1500" b="1">
+                <a:solidFill>
+                  <a:srgbClr val="F2F6FF"/>
+                </a:solidFill>
+                <a:latin typeface="Segoe UI"/>
+              </a:rPr>
+              <a:t>Moving vehicles fined for parking</a:t>
             </a:r>
           </a:p>
         </p:txBody>
@@ -4242,8 +4508,8 @@
         </p:nvSpPr>
         <p:spPr>
           <a:xfrm>
-            <a:off x="731520" y="5394960"/>
-            <a:ext cx="10607040" cy="822960"/>
+            <a:off x="5852160" y="1874519"/>
+            <a:ext cx="5669280" cy="731520"/>
           </a:xfrm>
           <a:prstGeom prst="rect">
             <a:avLst/>
@@ -4262,13 +4528,364 @@
               </a:spcAft>
             </a:pPr>
             <a:r>
-              <a:rPr sz="1700" b="1">
-                <a:solidFill>
-                  <a:srgbClr val="FFC74D"/>
-                </a:solidFill>
-                <a:latin typeface="Segoe UI"/>
-              </a:rPr>
-              <a:t>Colombo already has over a hundred road cameras. We turn each one into a traffic officer.</a:t>
+              <a:rPr sz="1350" b="0">
+                <a:solidFill>
+                  <a:srgbClr val="9FB3D1"/>
+                </a:solidFill>
+                <a:latin typeface="Segoe UI"/>
+              </a:rPr>
+              <a:t>Motion gate misjudged 89% of moving vehicles as stationary</a:t>
+            </a:r>
+          </a:p>
+        </p:txBody>
+      </p:sp>
+      <p:sp>
+        <p:nvSpPr>
+          <p:cNvPr id="7" name="TextBox 6"/>
+          <p:cNvSpPr txBox="1"/>
+          <p:nvPr/>
+        </p:nvSpPr>
+        <p:spPr>
+          <a:xfrm>
+            <a:off x="777240" y="2743200"/>
+            <a:ext cx="4846320" cy="731520"/>
+          </a:xfrm>
+          <a:prstGeom prst="rect">
+            <a:avLst/>
+          </a:prstGeom>
+          <a:noFill/>
+        </p:spPr>
+        <p:txBody>
+          <a:bodyPr wrap="square">
+            <a:spAutoFit/>
+          </a:bodyPr>
+          <a:lstStyle/>
+          <a:p>
+            <a:pPr algn="l">
+              <a:spcAft>
+                <a:spcPts val="600"/>
+              </a:spcAft>
+            </a:pPr>
+            <a:r>
+              <a:rPr sz="1500" b="1">
+                <a:solidFill>
+                  <a:srgbClr val="F2F6FF"/>
+                </a:solidFill>
+                <a:latin typeface="Segoe UI"/>
+              </a:rPr>
+              <a:t>Helmeted riders accused of no helmet</a:t>
+            </a:r>
+          </a:p>
+        </p:txBody>
+      </p:sp>
+      <p:sp>
+        <p:nvSpPr>
+          <p:cNvPr id="8" name="TextBox 7"/>
+          <p:cNvSpPr txBox="1"/>
+          <p:nvPr/>
+        </p:nvSpPr>
+        <p:spPr>
+          <a:xfrm>
+            <a:off x="5852160" y="2743200"/>
+            <a:ext cx="5669280" cy="731520"/>
+          </a:xfrm>
+          <a:prstGeom prst="rect">
+            <a:avLst/>
+          </a:prstGeom>
+          <a:noFill/>
+        </p:spPr>
+        <p:txBody>
+          <a:bodyPr wrap="square">
+            <a:spAutoFit/>
+          </a:bodyPr>
+          <a:lstStyle/>
+          <a:p>
+            <a:pPr algn="l">
+              <a:spcAft>
+                <a:spcPts val="600"/>
+              </a:spcAft>
+            </a:pPr>
+            <a:r>
+              <a:rPr sz="1350" b="0">
+                <a:solidFill>
+                  <a:srgbClr val="9FB3D1"/>
+                </a:solidFill>
+                <a:latin typeface="Segoe UI"/>
+              </a:rPr>
+              <a:t>Helmet crop was catching neighbouring riders</a:t>
+            </a:r>
+          </a:p>
+        </p:txBody>
+      </p:sp>
+      <p:sp>
+        <p:nvSpPr>
+          <p:cNvPr id="9" name="TextBox 8"/>
+          <p:cNvSpPr txBox="1"/>
+          <p:nvPr/>
+        </p:nvSpPr>
+        <p:spPr>
+          <a:xfrm>
+            <a:off x="777240" y="3611879"/>
+            <a:ext cx="4846320" cy="731520"/>
+          </a:xfrm>
+          <a:prstGeom prst="rect">
+            <a:avLst/>
+          </a:prstGeom>
+          <a:noFill/>
+        </p:spPr>
+        <p:txBody>
+          <a:bodyPr wrap="square">
+            <a:spAutoFit/>
+          </a:bodyPr>
+          <a:lstStyle/>
+          <a:p>
+            <a:pPr algn="l">
+              <a:spcAft>
+                <a:spcPts val="600"/>
+              </a:spcAft>
+            </a:pPr>
+            <a:r>
+              <a:rPr sz="1500" b="1">
+                <a:solidFill>
+                  <a:srgbClr val="F2F6FF"/>
+                </a:solidFill>
+                <a:latin typeface="Segoe UI"/>
+              </a:rPr>
+              <a:t>Bare heads marked compliant</a:t>
+            </a:r>
+          </a:p>
+        </p:txBody>
+      </p:sp>
+      <p:sp>
+        <p:nvSpPr>
+          <p:cNvPr id="10" name="TextBox 9"/>
+          <p:cNvSpPr txBox="1"/>
+          <p:nvPr/>
+        </p:nvSpPr>
+        <p:spPr>
+          <a:xfrm>
+            <a:off x="5852160" y="3611879"/>
+            <a:ext cx="5669280" cy="731520"/>
+          </a:xfrm>
+          <a:prstGeom prst="rect">
+            <a:avLst/>
+          </a:prstGeom>
+          <a:noFill/>
+        </p:spPr>
+        <p:txBody>
+          <a:bodyPr wrap="square">
+            <a:spAutoFit/>
+          </a:bodyPr>
+          <a:lstStyle/>
+          <a:p>
+            <a:pPr algn="l">
+              <a:spcAft>
+                <a:spcPts val="600"/>
+              </a:spcAft>
+            </a:pPr>
+            <a:r>
+              <a:rPr sz="1350" b="0">
+                <a:solidFill>
+                  <a:srgbClr val="9FB3D1"/>
+                </a:solidFill>
+                <a:latin typeface="Segoe UI"/>
+              </a:rPr>
+              <a:t>Compliance threshold was lower than the accusation threshold</a:t>
+            </a:r>
+          </a:p>
+        </p:txBody>
+      </p:sp>
+      <p:sp>
+        <p:nvSpPr>
+          <p:cNvPr id="11" name="TextBox 10"/>
+          <p:cNvSpPr txBox="1"/>
+          <p:nvPr/>
+        </p:nvSpPr>
+        <p:spPr>
+          <a:xfrm>
+            <a:off x="777240" y="4480559"/>
+            <a:ext cx="4846320" cy="731520"/>
+          </a:xfrm>
+          <a:prstGeom prst="rect">
+            <a:avLst/>
+          </a:prstGeom>
+          <a:noFill/>
+        </p:spPr>
+        <p:txBody>
+          <a:bodyPr wrap="square">
+            <a:spAutoFit/>
+          </a:bodyPr>
+          <a:lstStyle/>
+          <a:p>
+            <a:pPr algn="l">
+              <a:spcAft>
+                <a:spcPts val="600"/>
+              </a:spcAft>
+            </a:pPr>
+            <a:r>
+              <a:rPr sz="1500" b="1">
+                <a:solidFill>
+                  <a:srgbClr val="F2F6FF"/>
+                </a:solidFill>
+                <a:latin typeface="Segoe UI"/>
+              </a:rPr>
+              <a:t>Stopped car fined for a red light</a:t>
+            </a:r>
+          </a:p>
+        </p:txBody>
+      </p:sp>
+      <p:sp>
+        <p:nvSpPr>
+          <p:cNvPr id="12" name="TextBox 11"/>
+          <p:cNvSpPr txBox="1"/>
+          <p:nvPr/>
+        </p:nvSpPr>
+        <p:spPr>
+          <a:xfrm>
+            <a:off x="5852160" y="4480559"/>
+            <a:ext cx="5669280" cy="731520"/>
+          </a:xfrm>
+          <a:prstGeom prst="rect">
+            <a:avLst/>
+          </a:prstGeom>
+          <a:noFill/>
+        </p:spPr>
+        <p:txBody>
+          <a:bodyPr wrap="square">
+            <a:spAutoFit/>
+          </a:bodyPr>
+          <a:lstStyle/>
+          <a:p>
+            <a:pPr algn="l">
+              <a:spcAft>
+                <a:spcPts val="600"/>
+              </a:spcAft>
+            </a:pPr>
+            <a:r>
+              <a:rPr sz="1350" b="0">
+                <a:solidFill>
+                  <a:srgbClr val="9FB3D1"/>
+                </a:solidFill>
+                <a:latin typeface="Segoe UI"/>
+              </a:rPr>
+              <a:t>A signal from a different approach was applied to it</a:t>
+            </a:r>
+          </a:p>
+        </p:txBody>
+      </p:sp>
+      <p:sp>
+        <p:nvSpPr>
+          <p:cNvPr id="13" name="TextBox 12"/>
+          <p:cNvSpPr txBox="1"/>
+          <p:nvPr/>
+        </p:nvSpPr>
+        <p:spPr>
+          <a:xfrm>
+            <a:off x="777240" y="5349240"/>
+            <a:ext cx="4846320" cy="731520"/>
+          </a:xfrm>
+          <a:prstGeom prst="rect">
+            <a:avLst/>
+          </a:prstGeom>
+          <a:noFill/>
+        </p:spPr>
+        <p:txBody>
+          <a:bodyPr wrap="square">
+            <a:spAutoFit/>
+          </a:bodyPr>
+          <a:lstStyle/>
+          <a:p>
+            <a:pPr algn="l">
+              <a:spcAft>
+                <a:spcPts val="600"/>
+              </a:spcAft>
+            </a:pPr>
+            <a:r>
+              <a:rPr sz="1500" b="1">
+                <a:solidFill>
+                  <a:srgbClr val="F2F6FF"/>
+                </a:solidFill>
+                <a:latin typeface="Segoe UI"/>
+              </a:rPr>
+              <a:t>Wrong plate numbers on challans</a:t>
+            </a:r>
+          </a:p>
+        </p:txBody>
+      </p:sp>
+      <p:sp>
+        <p:nvSpPr>
+          <p:cNvPr id="14" name="TextBox 13"/>
+          <p:cNvSpPr txBox="1"/>
+          <p:nvPr/>
+        </p:nvSpPr>
+        <p:spPr>
+          <a:xfrm>
+            <a:off x="5852160" y="5349240"/>
+            <a:ext cx="5669280" cy="731520"/>
+          </a:xfrm>
+          <a:prstGeom prst="rect">
+            <a:avLst/>
+          </a:prstGeom>
+          <a:noFill/>
+        </p:spPr>
+        <p:txBody>
+          <a:bodyPr wrap="square">
+            <a:spAutoFit/>
+          </a:bodyPr>
+          <a:lstStyle/>
+          <a:p>
+            <a:pPr algn="l">
+              <a:spcAft>
+                <a:spcPts val="600"/>
+              </a:spcAft>
+            </a:pPr>
+            <a:r>
+              <a:rPr sz="1350" b="0">
+                <a:solidFill>
+                  <a:srgbClr val="9FB3D1"/>
+                </a:solidFill>
+                <a:latin typeface="Segoe UI"/>
+              </a:rPr>
+              <a:t>Two agreeing OCR reads could both be wrong</a:t>
+            </a:r>
+          </a:p>
+        </p:txBody>
+      </p:sp>
+      <p:sp>
+        <p:nvSpPr>
+          <p:cNvPr id="15" name="TextBox 14"/>
+          <p:cNvSpPr txBox="1"/>
+          <p:nvPr/>
+        </p:nvSpPr>
+        <p:spPr>
+          <a:xfrm>
+            <a:off x="777240" y="6263640"/>
+            <a:ext cx="10607040" cy="457200"/>
+          </a:xfrm>
+          <a:prstGeom prst="rect">
+            <a:avLst/>
+          </a:prstGeom>
+          <a:noFill/>
+        </p:spPr>
+        <p:txBody>
+          <a:bodyPr wrap="square">
+            <a:spAutoFit/>
+          </a:bodyPr>
+          <a:lstStyle/>
+          <a:p>
+            <a:pPr algn="l">
+              <a:spcAft>
+                <a:spcPts val="600"/>
+              </a:spcAft>
+            </a:pPr>
+            <a:r>
+              <a:rPr sz="1400" b="1">
+                <a:solidFill>
+                  <a:srgbClr val="22D3EE"/>
+                </a:solidFill>
+                <a:latin typeface="Segoe UI"/>
+              </a:rPr>
+              <a:t>We fixed cases where our own system accused the wrong person. Each is now a test.</a:t>
             </a:r>
           </a:p>
         </p:txBody>
@@ -4351,8 +4968,8 @@
         </p:nvSpPr>
         <p:spPr>
           <a:xfrm>
-            <a:off x="822960" y="2651760"/>
-            <a:ext cx="10515600" cy="1097280"/>
+            <a:off x="640080" y="384048"/>
+            <a:ext cx="10058400" cy="365760"/>
           </a:xfrm>
           <a:prstGeom prst="rect">
             <a:avLst/>
@@ -4371,13 +4988,13 @@
               </a:spcAft>
             </a:pPr>
             <a:r>
-              <a:rPr sz="4200" b="1">
-                <a:solidFill>
-                  <a:srgbClr val="F2F6FF"/>
-                </a:solidFill>
-                <a:latin typeface="Segoe UI"/>
-              </a:rPr>
-              <a:t>Safer roads, proven by evidence.</a:t>
+              <a:rPr sz="1300" b="1">
+                <a:solidFill>
+                  <a:srgbClr val="22D3EE"/>
+                </a:solidFill>
+                <a:latin typeface="Segoe UI"/>
+              </a:rPr>
+              <a:t>TARGET USERS AND MARKET</a:t>
             </a:r>
           </a:p>
         </p:txBody>
@@ -4390,8 +5007,8 @@
         </p:nvSpPr>
         <p:spPr>
           <a:xfrm>
-            <a:off x="822960" y="3840480"/>
-            <a:ext cx="10515600" cy="548640"/>
+            <a:off x="640080" y="713232"/>
+            <a:ext cx="10972800" cy="914400"/>
           </a:xfrm>
           <a:prstGeom prst="rect">
             <a:avLst/>
@@ -4410,13 +5027,1768 @@
               </a:spcAft>
             </a:pPr>
             <a:r>
-              <a:rPr sz="1900" b="0">
+              <a:rPr sz="3400" b="1">
+                <a:solidFill>
+                  <a:srgbClr val="F2F6FF"/>
+                </a:solidFill>
+                <a:latin typeface="Segoe UI"/>
+              </a:rPr>
+              <a:t>Who it is for</a:t>
+            </a:r>
+          </a:p>
+        </p:txBody>
+      </p:sp>
+      <p:sp>
+        <p:nvSpPr>
+          <p:cNvPr id="5" name="Rectangle 4"/>
+          <p:cNvSpPr/>
+          <p:nvPr/>
+        </p:nvSpPr>
+        <p:spPr>
+          <a:xfrm>
+            <a:off x="731520" y="1828800"/>
+            <a:ext cx="5212080" cy="3931920"/>
+          </a:xfrm>
+          <a:prstGeom prst="rect">
+            <a:avLst/>
+          </a:prstGeom>
+          <a:solidFill>
+            <a:srgbClr val="111E3D"/>
+          </a:solidFill>
+          <a:ln>
+            <a:solidFill>
+              <a:srgbClr val="0B1428"/>
+            </a:solidFill>
+          </a:ln>
+          <a:effectLst/>
+        </p:spPr>
+        <p:style>
+          <a:lnRef idx="1">
+            <a:schemeClr val="accent1"/>
+          </a:lnRef>
+          <a:fillRef idx="3">
+            <a:schemeClr val="accent1"/>
+          </a:fillRef>
+          <a:effectRef idx="2">
+            <a:schemeClr val="accent1"/>
+          </a:effectRef>
+          <a:fontRef idx="minor">
+            <a:schemeClr val="lt1"/>
+          </a:fontRef>
+        </p:style>
+        <p:txBody>
+          <a:bodyPr rtlCol="0" anchor="ctr"/>
+          <a:lstStyle/>
+          <a:p>
+            <a:pPr algn="ctr"/>
+          </a:p>
+        </p:txBody>
+      </p:sp>
+      <p:sp>
+        <p:nvSpPr>
+          <p:cNvPr id="6" name="TextBox 5"/>
+          <p:cNvSpPr txBox="1"/>
+          <p:nvPr/>
+        </p:nvSpPr>
+        <p:spPr>
+          <a:xfrm>
+            <a:off x="1005840" y="2029968"/>
+            <a:ext cx="4663440" cy="457200"/>
+          </a:xfrm>
+          <a:prstGeom prst="rect">
+            <a:avLst/>
+          </a:prstGeom>
+          <a:noFill/>
+        </p:spPr>
+        <p:txBody>
+          <a:bodyPr wrap="square">
+            <a:spAutoFit/>
+          </a:bodyPr>
+          <a:lstStyle/>
+          <a:p>
+            <a:pPr algn="l">
+              <a:spcAft>
+                <a:spcPts val="600"/>
+              </a:spcAft>
+            </a:pPr>
+            <a:r>
+              <a:rPr sz="1700" b="1">
                 <a:solidFill>
                   <a:srgbClr val="22D3EE"/>
                 </a:solidFill>
                 <a:latin typeface="Segoe UI"/>
               </a:rPr>
-              <a:t>AI Smart Traffic Intelligence Platform</a:t>
+              <a:t>Primary users</a:t>
+            </a:r>
+          </a:p>
+        </p:txBody>
+      </p:sp>
+      <p:sp>
+        <p:nvSpPr>
+          <p:cNvPr id="7" name="TextBox 6"/>
+          <p:cNvSpPr txBox="1"/>
+          <p:nvPr/>
+        </p:nvSpPr>
+        <p:spPr>
+          <a:xfrm>
+            <a:off x="1005840" y="2606040"/>
+            <a:ext cx="4663440" cy="2926080"/>
+          </a:xfrm>
+          <a:prstGeom prst="rect">
+            <a:avLst/>
+          </a:prstGeom>
+          <a:noFill/>
+        </p:spPr>
+        <p:txBody>
+          <a:bodyPr wrap="square">
+            <a:spAutoFit/>
+          </a:bodyPr>
+          <a:lstStyle/>
+          <a:p>
+            <a:pPr algn="l">
+              <a:spcAft>
+                <a:spcPts val="1000"/>
+              </a:spcAft>
+            </a:pPr>
+            <a:r>
+              <a:rPr sz="1350" b="1">
+                <a:solidFill>
+                  <a:srgbClr val="F2F6FF"/>
+                </a:solidFill>
+                <a:latin typeface="Segoe UI"/>
+              </a:rPr>
+              <a:t>Sri Lanka Police traffic division</a:t>
+            </a:r>
+            <a:r>
+              <a:rPr sz="1350" b="0">
+                <a:solidFill>
+                  <a:srgbClr val="F2F6FF"/>
+                </a:solidFill>
+                <a:latin typeface="Segoe UI"/>
+              </a:rPr>
+              <a:t> - automated enforcement on existing junction cameras.</a:t>
+            </a:r>
+          </a:p>
+          <a:p>
+            <a:pPr algn="l">
+              <a:spcAft>
+                <a:spcPts val="1000"/>
+              </a:spcAft>
+            </a:pPr>
+            <a:r>
+              <a:rPr sz="1350" b="1">
+                <a:solidFill>
+                  <a:srgbClr val="F2F6FF"/>
+                </a:solidFill>
+                <a:latin typeface="Segoe UI"/>
+              </a:rPr>
+              <a:t>Road Development Authority / municipal councils</a:t>
+            </a:r>
+            <a:r>
+              <a:rPr sz="1350" b="0">
+                <a:solidFill>
+                  <a:srgbClr val="F2F6FF"/>
+                </a:solidFill>
+                <a:latin typeface="Segoe UI"/>
+              </a:rPr>
+              <a:t> - highway corridors, school and hospital zones.</a:t>
+            </a:r>
+          </a:p>
+          <a:p>
+            <a:pPr algn="l">
+              <a:spcAft>
+                <a:spcPts val="1000"/>
+              </a:spcAft>
+            </a:pPr>
+            <a:r>
+              <a:rPr sz="1350" b="1">
+                <a:solidFill>
+                  <a:srgbClr val="F2F6FF"/>
+                </a:solidFill>
+                <a:latin typeface="Segoe UI"/>
+              </a:rPr>
+              <a:t>Commercial fleet operators</a:t>
+            </a:r>
+            <a:r>
+              <a:rPr sz="1350" b="0">
+                <a:solidFill>
+                  <a:srgbClr val="F2F6FF"/>
+                </a:solidFill>
+                <a:latin typeface="Segoe UI"/>
+              </a:rPr>
+              <a:t> - seatbelt and driver-fatigue compliance for buses and lorries.</a:t>
+            </a:r>
+          </a:p>
+        </p:txBody>
+      </p:sp>
+      <p:sp>
+        <p:nvSpPr>
+          <p:cNvPr id="8" name="Rectangle 7"/>
+          <p:cNvSpPr/>
+          <p:nvPr/>
+        </p:nvSpPr>
+        <p:spPr>
+          <a:xfrm>
+            <a:off x="6309359" y="1828800"/>
+            <a:ext cx="5212080" cy="3931920"/>
+          </a:xfrm>
+          <a:prstGeom prst="rect">
+            <a:avLst/>
+          </a:prstGeom>
+          <a:solidFill>
+            <a:srgbClr val="111E3D"/>
+          </a:solidFill>
+          <a:ln>
+            <a:solidFill>
+              <a:srgbClr val="0B1428"/>
+            </a:solidFill>
+          </a:ln>
+          <a:effectLst/>
+        </p:spPr>
+        <p:style>
+          <a:lnRef idx="1">
+            <a:schemeClr val="accent1"/>
+          </a:lnRef>
+          <a:fillRef idx="3">
+            <a:schemeClr val="accent1"/>
+          </a:fillRef>
+          <a:effectRef idx="2">
+            <a:schemeClr val="accent1"/>
+          </a:effectRef>
+          <a:fontRef idx="minor">
+            <a:schemeClr val="lt1"/>
+          </a:fontRef>
+        </p:style>
+        <p:txBody>
+          <a:bodyPr rtlCol="0" anchor="ctr"/>
+          <a:lstStyle/>
+          <a:p>
+            <a:pPr algn="ctr"/>
+          </a:p>
+        </p:txBody>
+      </p:sp>
+      <p:sp>
+        <p:nvSpPr>
+          <p:cNvPr id="9" name="TextBox 8"/>
+          <p:cNvSpPr txBox="1"/>
+          <p:nvPr/>
+        </p:nvSpPr>
+        <p:spPr>
+          <a:xfrm>
+            <a:off x="6583679" y="2029968"/>
+            <a:ext cx="4663440" cy="457200"/>
+          </a:xfrm>
+          <a:prstGeom prst="rect">
+            <a:avLst/>
+          </a:prstGeom>
+          <a:noFill/>
+        </p:spPr>
+        <p:txBody>
+          <a:bodyPr wrap="square">
+            <a:spAutoFit/>
+          </a:bodyPr>
+          <a:lstStyle/>
+          <a:p>
+            <a:pPr algn="l">
+              <a:spcAft>
+                <a:spcPts val="600"/>
+              </a:spcAft>
+            </a:pPr>
+            <a:r>
+              <a:rPr sz="1700" b="1">
+                <a:solidFill>
+                  <a:srgbClr val="22D3EE"/>
+                </a:solidFill>
+                <a:latin typeface="Segoe UI"/>
+              </a:rPr>
+              <a:t>Why they buy</a:t>
+            </a:r>
+          </a:p>
+        </p:txBody>
+      </p:sp>
+      <p:sp>
+        <p:nvSpPr>
+          <p:cNvPr id="10" name="TextBox 9"/>
+          <p:cNvSpPr txBox="1"/>
+          <p:nvPr/>
+        </p:nvSpPr>
+        <p:spPr>
+          <a:xfrm>
+            <a:off x="6583679" y="2606040"/>
+            <a:ext cx="4663440" cy="2926080"/>
+          </a:xfrm>
+          <a:prstGeom prst="rect">
+            <a:avLst/>
+          </a:prstGeom>
+          <a:noFill/>
+        </p:spPr>
+        <p:txBody>
+          <a:bodyPr wrap="square">
+            <a:spAutoFit/>
+          </a:bodyPr>
+          <a:lstStyle/>
+          <a:p>
+            <a:pPr algn="l">
+              <a:spcAft>
+                <a:spcPts val="1000"/>
+              </a:spcAft>
+            </a:pPr>
+            <a:r>
+              <a:rPr sz="1350" b="0">
+                <a:solidFill>
+                  <a:srgbClr val="F2F6FF"/>
+                </a:solidFill>
+                <a:latin typeface="Segoe UI"/>
+              </a:rPr>
+              <a:t>Enforcement reach without hiring proportionally more officers.</a:t>
+            </a:r>
+          </a:p>
+          <a:p>
+            <a:pPr algn="l">
+              <a:spcAft>
+                <a:spcPts val="1000"/>
+              </a:spcAft>
+            </a:pPr>
+            <a:r>
+              <a:rPr sz="1350" b="0">
+                <a:solidFill>
+                  <a:srgbClr val="F2F6FF"/>
+                </a:solidFill>
+                <a:latin typeface="Segoe UI"/>
+              </a:rPr>
+              <a:t>Evidence that survives dispute, so fines are actually collected.</a:t>
+            </a:r>
+          </a:p>
+          <a:p>
+            <a:pPr algn="l">
+              <a:spcAft>
+                <a:spcPts val="1000"/>
+              </a:spcAft>
+            </a:pPr>
+            <a:r>
+              <a:rPr sz="1350" b="0">
+                <a:solidFill>
+                  <a:srgbClr val="F2F6FF"/>
+                </a:solidFill>
+                <a:latin typeface="Segoe UI"/>
+              </a:rPr>
+              <a:t>Data on where violations concentrate, to target scarce resources.</a:t>
+            </a:r>
+          </a:p>
+          <a:p>
+            <a:pPr algn="l">
+              <a:spcAft>
+                <a:spcPts val="1000"/>
+              </a:spcAft>
+            </a:pPr>
+            <a:r>
+              <a:rPr sz="1350" b="0">
+                <a:solidFill>
+                  <a:srgbClr val="F2F6FF"/>
+                </a:solidFill>
+                <a:latin typeface="Segoe UI"/>
+              </a:rPr>
+              <a:t>Fleet operators reduce insurance exposure and liability.</a:t>
+            </a:r>
+          </a:p>
+        </p:txBody>
+      </p:sp>
+      <p:sp>
+        <p:nvSpPr>
+          <p:cNvPr id="11" name="TextBox 10"/>
+          <p:cNvSpPr txBox="1"/>
+          <p:nvPr/>
+        </p:nvSpPr>
+        <p:spPr>
+          <a:xfrm>
+            <a:off x="731520" y="5943600"/>
+            <a:ext cx="10607040" cy="548640"/>
+          </a:xfrm>
+          <a:prstGeom prst="rect">
+            <a:avLst/>
+          </a:prstGeom>
+          <a:noFill/>
+        </p:spPr>
+        <p:txBody>
+          <a:bodyPr wrap="square">
+            <a:spAutoFit/>
+          </a:bodyPr>
+          <a:lstStyle/>
+          <a:p>
+            <a:pPr algn="ctr">
+              <a:spcAft>
+                <a:spcPts val="600"/>
+              </a:spcAft>
+            </a:pPr>
+            <a:r>
+              <a:rPr sz="1500" b="1">
+                <a:solidFill>
+                  <a:srgbClr val="FFC74D"/>
+                </a:solidFill>
+                <a:latin typeface="Segoe UI"/>
+              </a:rPr>
+              <a:t>Entry point: a single pilot junction. Expansion: corridor, then city.</a:t>
+            </a:r>
+          </a:p>
+        </p:txBody>
+      </p:sp>
+    </p:spTree>
+  </p:cSld>
+  <p:clrMapOvr>
+    <a:masterClrMapping/>
+  </p:clrMapOvr>
+</p:sld>
+</file>
+
+<file path=ppt/slides/slide13.xml><?xml version="1.0" encoding="utf-8"?>
+<p:sld xmlns:a="http://schemas.openxmlformats.org/drawingml/2006/main" xmlns:p="http://schemas.openxmlformats.org/presentationml/2006/main" xmlns:r="http://schemas.openxmlformats.org/officeDocument/2006/relationships">
+  <p:cSld>
+    <p:bg>
+      <p:bgPr>
+        <a:solidFill>
+          <a:srgbClr val="0B1428"/>
+        </a:solidFill>
+        <a:effectLst/>
+      </p:bgPr>
+    </p:bg>
+    <p:spTree>
+      <p:nvGrpSpPr>
+        <p:cNvPr id="1" name=""/>
+        <p:cNvGrpSpPr/>
+        <p:nvPr/>
+      </p:nvGrpSpPr>
+      <p:grpSpPr/>
+      <p:sp>
+        <p:nvSpPr>
+          <p:cNvPr id="2" name="Rectangle 1"/>
+          <p:cNvSpPr/>
+          <p:nvPr/>
+        </p:nvSpPr>
+        <p:spPr>
+          <a:xfrm>
+            <a:off x="0" y="0"/>
+            <a:ext cx="12191695" cy="82296"/>
+          </a:xfrm>
+          <a:prstGeom prst="rect">
+            <a:avLst/>
+          </a:prstGeom>
+          <a:solidFill>
+            <a:srgbClr val="22D3EE"/>
+          </a:solidFill>
+          <a:ln>
+            <a:noFill/>
+          </a:ln>
+          <a:effectLst/>
+        </p:spPr>
+        <p:style>
+          <a:lnRef idx="1">
+            <a:schemeClr val="accent1"/>
+          </a:lnRef>
+          <a:fillRef idx="3">
+            <a:schemeClr val="accent1"/>
+          </a:fillRef>
+          <a:effectRef idx="2">
+            <a:schemeClr val="accent1"/>
+          </a:effectRef>
+          <a:fontRef idx="minor">
+            <a:schemeClr val="lt1"/>
+          </a:fontRef>
+        </p:style>
+        <p:txBody>
+          <a:bodyPr rtlCol="0" anchor="ctr"/>
+          <a:lstStyle/>
+          <a:p>
+            <a:pPr algn="ctr"/>
+          </a:p>
+        </p:txBody>
+      </p:sp>
+      <p:sp>
+        <p:nvSpPr>
+          <p:cNvPr id="3" name="TextBox 2"/>
+          <p:cNvSpPr txBox="1"/>
+          <p:nvPr/>
+        </p:nvSpPr>
+        <p:spPr>
+          <a:xfrm>
+            <a:off x="640080" y="384048"/>
+            <a:ext cx="10058400" cy="365760"/>
+          </a:xfrm>
+          <a:prstGeom prst="rect">
+            <a:avLst/>
+          </a:prstGeom>
+          <a:noFill/>
+        </p:spPr>
+        <p:txBody>
+          <a:bodyPr wrap="square">
+            <a:spAutoFit/>
+          </a:bodyPr>
+          <a:lstStyle/>
+          <a:p>
+            <a:pPr algn="l">
+              <a:spcAft>
+                <a:spcPts val="600"/>
+              </a:spcAft>
+            </a:pPr>
+            <a:r>
+              <a:rPr sz="1300" b="1">
+                <a:solidFill>
+                  <a:srgbClr val="22D3EE"/>
+                </a:solidFill>
+                <a:latin typeface="Segoe UI"/>
+              </a:rPr>
+              <a:t>HOW IT SUSTAINS ITSELF</a:t>
+            </a:r>
+          </a:p>
+        </p:txBody>
+      </p:sp>
+      <p:sp>
+        <p:nvSpPr>
+          <p:cNvPr id="4" name="TextBox 3"/>
+          <p:cNvSpPr txBox="1"/>
+          <p:nvPr/>
+        </p:nvSpPr>
+        <p:spPr>
+          <a:xfrm>
+            <a:off x="640080" y="713232"/>
+            <a:ext cx="10972800" cy="914400"/>
+          </a:xfrm>
+          <a:prstGeom prst="rect">
+            <a:avLst/>
+          </a:prstGeom>
+          <a:noFill/>
+        </p:spPr>
+        <p:txBody>
+          <a:bodyPr wrap="square">
+            <a:spAutoFit/>
+          </a:bodyPr>
+          <a:lstStyle/>
+          <a:p>
+            <a:pPr algn="l">
+              <a:spcAft>
+                <a:spcPts val="600"/>
+              </a:spcAft>
+            </a:pPr>
+            <a:r>
+              <a:rPr sz="3400" b="1">
+                <a:solidFill>
+                  <a:srgbClr val="F2F6FF"/>
+                </a:solidFill>
+                <a:latin typeface="Segoe UI"/>
+              </a:rPr>
+              <a:t>Business model</a:t>
+            </a:r>
+          </a:p>
+        </p:txBody>
+      </p:sp>
+      <p:sp>
+        <p:nvSpPr>
+          <p:cNvPr id="5" name="Rectangle 4"/>
+          <p:cNvSpPr/>
+          <p:nvPr/>
+        </p:nvSpPr>
+        <p:spPr>
+          <a:xfrm>
+            <a:off x="777240" y="1828800"/>
+            <a:ext cx="10607040" cy="868680"/>
+          </a:xfrm>
+          <a:prstGeom prst="rect">
+            <a:avLst/>
+          </a:prstGeom>
+          <a:solidFill>
+            <a:srgbClr val="111E3D"/>
+          </a:solidFill>
+          <a:ln>
+            <a:solidFill>
+              <a:srgbClr val="0B1428"/>
+            </a:solidFill>
+          </a:ln>
+          <a:effectLst/>
+        </p:spPr>
+        <p:style>
+          <a:lnRef idx="1">
+            <a:schemeClr val="accent1"/>
+          </a:lnRef>
+          <a:fillRef idx="3">
+            <a:schemeClr val="accent1"/>
+          </a:fillRef>
+          <a:effectRef idx="2">
+            <a:schemeClr val="accent1"/>
+          </a:effectRef>
+          <a:fontRef idx="minor">
+            <a:schemeClr val="lt1"/>
+          </a:fontRef>
+        </p:style>
+        <p:txBody>
+          <a:bodyPr rtlCol="0" anchor="ctr"/>
+          <a:lstStyle/>
+          <a:p>
+            <a:pPr algn="ctr"/>
+          </a:p>
+        </p:txBody>
+      </p:sp>
+      <p:sp>
+        <p:nvSpPr>
+          <p:cNvPr id="6" name="TextBox 5"/>
+          <p:cNvSpPr txBox="1"/>
+          <p:nvPr/>
+        </p:nvSpPr>
+        <p:spPr>
+          <a:xfrm>
+            <a:off x="1051560" y="1938528"/>
+            <a:ext cx="4206240" cy="640080"/>
+          </a:xfrm>
+          <a:prstGeom prst="rect">
+            <a:avLst/>
+          </a:prstGeom>
+          <a:noFill/>
+        </p:spPr>
+        <p:txBody>
+          <a:bodyPr wrap="square">
+            <a:spAutoFit/>
+          </a:bodyPr>
+          <a:lstStyle/>
+          <a:p>
+            <a:pPr algn="l">
+              <a:spcAft>
+                <a:spcPts val="600"/>
+              </a:spcAft>
+            </a:pPr>
+            <a:r>
+              <a:rPr sz="1550" b="1">
+                <a:solidFill>
+                  <a:srgbClr val="22D3EE"/>
+                </a:solidFill>
+                <a:latin typeface="Segoe UI"/>
+              </a:rPr>
+              <a:t>Pilot deployment fee</a:t>
+            </a:r>
+          </a:p>
+        </p:txBody>
+      </p:sp>
+      <p:sp>
+        <p:nvSpPr>
+          <p:cNvPr id="7" name="TextBox 6"/>
+          <p:cNvSpPr txBox="1"/>
+          <p:nvPr/>
+        </p:nvSpPr>
+        <p:spPr>
+          <a:xfrm>
+            <a:off x="5394960" y="1956816"/>
+            <a:ext cx="5852160" cy="640080"/>
+          </a:xfrm>
+          <a:prstGeom prst="rect">
+            <a:avLst/>
+          </a:prstGeom>
+          <a:noFill/>
+        </p:spPr>
+        <p:txBody>
+          <a:bodyPr wrap="square">
+            <a:spAutoFit/>
+          </a:bodyPr>
+          <a:lstStyle/>
+          <a:p>
+            <a:pPr algn="l">
+              <a:spcAft>
+                <a:spcPts val="600"/>
+              </a:spcAft>
+            </a:pPr>
+            <a:r>
+              <a:rPr sz="1350" b="0">
+                <a:solidFill>
+                  <a:srgbClr val="F2F6FF"/>
+                </a:solidFill>
+                <a:latin typeface="Segoe UI"/>
+              </a:rPr>
+              <a:t>One-off setup and calibration per camera site</a:t>
+            </a:r>
+          </a:p>
+        </p:txBody>
+      </p:sp>
+      <p:sp>
+        <p:nvSpPr>
+          <p:cNvPr id="8" name="Rectangle 7"/>
+          <p:cNvSpPr/>
+          <p:nvPr/>
+        </p:nvSpPr>
+        <p:spPr>
+          <a:xfrm>
+            <a:off x="777240" y="2880360"/>
+            <a:ext cx="10607040" cy="868680"/>
+          </a:xfrm>
+          <a:prstGeom prst="rect">
+            <a:avLst/>
+          </a:prstGeom>
+          <a:solidFill>
+            <a:srgbClr val="111E3D"/>
+          </a:solidFill>
+          <a:ln>
+            <a:solidFill>
+              <a:srgbClr val="0B1428"/>
+            </a:solidFill>
+          </a:ln>
+          <a:effectLst/>
+        </p:spPr>
+        <p:style>
+          <a:lnRef idx="1">
+            <a:schemeClr val="accent1"/>
+          </a:lnRef>
+          <a:fillRef idx="3">
+            <a:schemeClr val="accent1"/>
+          </a:fillRef>
+          <a:effectRef idx="2">
+            <a:schemeClr val="accent1"/>
+          </a:effectRef>
+          <a:fontRef idx="minor">
+            <a:schemeClr val="lt1"/>
+          </a:fontRef>
+        </p:style>
+        <p:txBody>
+          <a:bodyPr rtlCol="0" anchor="ctr"/>
+          <a:lstStyle/>
+          <a:p>
+            <a:pPr algn="ctr"/>
+          </a:p>
+        </p:txBody>
+      </p:sp>
+      <p:sp>
+        <p:nvSpPr>
+          <p:cNvPr id="9" name="TextBox 8"/>
+          <p:cNvSpPr txBox="1"/>
+          <p:nvPr/>
+        </p:nvSpPr>
+        <p:spPr>
+          <a:xfrm>
+            <a:off x="1051560" y="2990088"/>
+            <a:ext cx="4206240" cy="640080"/>
+          </a:xfrm>
+          <a:prstGeom prst="rect">
+            <a:avLst/>
+          </a:prstGeom>
+          <a:noFill/>
+        </p:spPr>
+        <p:txBody>
+          <a:bodyPr wrap="square">
+            <a:spAutoFit/>
+          </a:bodyPr>
+          <a:lstStyle/>
+          <a:p>
+            <a:pPr algn="l">
+              <a:spcAft>
+                <a:spcPts val="600"/>
+              </a:spcAft>
+            </a:pPr>
+            <a:r>
+              <a:rPr sz="1550" b="1">
+                <a:solidFill>
+                  <a:srgbClr val="22D3EE"/>
+                </a:solidFill>
+                <a:latin typeface="Segoe UI"/>
+              </a:rPr>
+              <a:t>Annual software licence</a:t>
+            </a:r>
+          </a:p>
+        </p:txBody>
+      </p:sp>
+      <p:sp>
+        <p:nvSpPr>
+          <p:cNvPr id="10" name="TextBox 9"/>
+          <p:cNvSpPr txBox="1"/>
+          <p:nvPr/>
+        </p:nvSpPr>
+        <p:spPr>
+          <a:xfrm>
+            <a:off x="5394960" y="3008376"/>
+            <a:ext cx="5852160" cy="640080"/>
+          </a:xfrm>
+          <a:prstGeom prst="rect">
+            <a:avLst/>
+          </a:prstGeom>
+          <a:noFill/>
+        </p:spPr>
+        <p:txBody>
+          <a:bodyPr wrap="square">
+            <a:spAutoFit/>
+          </a:bodyPr>
+          <a:lstStyle/>
+          <a:p>
+            <a:pPr algn="l">
+              <a:spcAft>
+                <a:spcPts val="600"/>
+              </a:spcAft>
+            </a:pPr>
+            <a:r>
+              <a:rPr sz="1350" b="0">
+                <a:solidFill>
+                  <a:srgbClr val="F2F6FF"/>
+                </a:solidFill>
+                <a:latin typeface="Segoe UI"/>
+              </a:rPr>
+              <a:t>Per-camera subscription covering updates and model improvements</a:t>
+            </a:r>
+          </a:p>
+        </p:txBody>
+      </p:sp>
+      <p:sp>
+        <p:nvSpPr>
+          <p:cNvPr id="11" name="Rectangle 10"/>
+          <p:cNvSpPr/>
+          <p:nvPr/>
+        </p:nvSpPr>
+        <p:spPr>
+          <a:xfrm>
+            <a:off x="777240" y="3931920"/>
+            <a:ext cx="10607040" cy="868680"/>
+          </a:xfrm>
+          <a:prstGeom prst="rect">
+            <a:avLst/>
+          </a:prstGeom>
+          <a:solidFill>
+            <a:srgbClr val="111E3D"/>
+          </a:solidFill>
+          <a:ln>
+            <a:solidFill>
+              <a:srgbClr val="0B1428"/>
+            </a:solidFill>
+          </a:ln>
+          <a:effectLst/>
+        </p:spPr>
+        <p:style>
+          <a:lnRef idx="1">
+            <a:schemeClr val="accent1"/>
+          </a:lnRef>
+          <a:fillRef idx="3">
+            <a:schemeClr val="accent1"/>
+          </a:fillRef>
+          <a:effectRef idx="2">
+            <a:schemeClr val="accent1"/>
+          </a:effectRef>
+          <a:fontRef idx="minor">
+            <a:schemeClr val="lt1"/>
+          </a:fontRef>
+        </p:style>
+        <p:txBody>
+          <a:bodyPr rtlCol="0" anchor="ctr"/>
+          <a:lstStyle/>
+          <a:p>
+            <a:pPr algn="ctr"/>
+          </a:p>
+        </p:txBody>
+      </p:sp>
+      <p:sp>
+        <p:nvSpPr>
+          <p:cNvPr id="12" name="TextBox 11"/>
+          <p:cNvSpPr txBox="1"/>
+          <p:nvPr/>
+        </p:nvSpPr>
+        <p:spPr>
+          <a:xfrm>
+            <a:off x="1051560" y="4041648"/>
+            <a:ext cx="4206240" cy="640080"/>
+          </a:xfrm>
+          <a:prstGeom prst="rect">
+            <a:avLst/>
+          </a:prstGeom>
+          <a:noFill/>
+        </p:spPr>
+        <p:txBody>
+          <a:bodyPr wrap="square">
+            <a:spAutoFit/>
+          </a:bodyPr>
+          <a:lstStyle/>
+          <a:p>
+            <a:pPr algn="l">
+              <a:spcAft>
+                <a:spcPts val="600"/>
+              </a:spcAft>
+            </a:pPr>
+            <a:r>
+              <a:rPr sz="1550" b="1">
+                <a:solidFill>
+                  <a:srgbClr val="22D3EE"/>
+                </a:solidFill>
+                <a:latin typeface="Segoe UI"/>
+              </a:rPr>
+              <a:t>Support and analytics tier</a:t>
+            </a:r>
+          </a:p>
+        </p:txBody>
+      </p:sp>
+      <p:sp>
+        <p:nvSpPr>
+          <p:cNvPr id="13" name="TextBox 12"/>
+          <p:cNvSpPr txBox="1"/>
+          <p:nvPr/>
+        </p:nvSpPr>
+        <p:spPr>
+          <a:xfrm>
+            <a:off x="5394960" y="4059936"/>
+            <a:ext cx="5852160" cy="640080"/>
+          </a:xfrm>
+          <a:prstGeom prst="rect">
+            <a:avLst/>
+          </a:prstGeom>
+          <a:noFill/>
+        </p:spPr>
+        <p:txBody>
+          <a:bodyPr wrap="square">
+            <a:spAutoFit/>
+          </a:bodyPr>
+          <a:lstStyle/>
+          <a:p>
+            <a:pPr algn="l">
+              <a:spcAft>
+                <a:spcPts val="600"/>
+              </a:spcAft>
+            </a:pPr>
+            <a:r>
+              <a:rPr sz="1350" b="0">
+                <a:solidFill>
+                  <a:srgbClr val="F2F6FF"/>
+                </a:solidFill>
+                <a:latin typeface="Segoe UI"/>
+              </a:rPr>
+              <a:t>Dashboards, reporting and repeat-offender analytics for authorities</a:t>
+            </a:r>
+          </a:p>
+        </p:txBody>
+      </p:sp>
+      <p:sp>
+        <p:nvSpPr>
+          <p:cNvPr id="14" name="Rectangle 13"/>
+          <p:cNvSpPr/>
+          <p:nvPr/>
+        </p:nvSpPr>
+        <p:spPr>
+          <a:xfrm>
+            <a:off x="777240" y="4983479"/>
+            <a:ext cx="10607040" cy="868680"/>
+          </a:xfrm>
+          <a:prstGeom prst="rect">
+            <a:avLst/>
+          </a:prstGeom>
+          <a:solidFill>
+            <a:srgbClr val="111E3D"/>
+          </a:solidFill>
+          <a:ln>
+            <a:solidFill>
+              <a:srgbClr val="0B1428"/>
+            </a:solidFill>
+          </a:ln>
+          <a:effectLst/>
+        </p:spPr>
+        <p:style>
+          <a:lnRef idx="1">
+            <a:schemeClr val="accent1"/>
+          </a:lnRef>
+          <a:fillRef idx="3">
+            <a:schemeClr val="accent1"/>
+          </a:fillRef>
+          <a:effectRef idx="2">
+            <a:schemeClr val="accent1"/>
+          </a:effectRef>
+          <a:fontRef idx="minor">
+            <a:schemeClr val="lt1"/>
+          </a:fontRef>
+        </p:style>
+        <p:txBody>
+          <a:bodyPr rtlCol="0" anchor="ctr"/>
+          <a:lstStyle/>
+          <a:p>
+            <a:pPr algn="ctr"/>
+          </a:p>
+        </p:txBody>
+      </p:sp>
+      <p:sp>
+        <p:nvSpPr>
+          <p:cNvPr id="15" name="TextBox 14"/>
+          <p:cNvSpPr txBox="1"/>
+          <p:nvPr/>
+        </p:nvSpPr>
+        <p:spPr>
+          <a:xfrm>
+            <a:off x="1051560" y="5093207"/>
+            <a:ext cx="4206240" cy="640080"/>
+          </a:xfrm>
+          <a:prstGeom prst="rect">
+            <a:avLst/>
+          </a:prstGeom>
+          <a:noFill/>
+        </p:spPr>
+        <p:txBody>
+          <a:bodyPr wrap="square">
+            <a:spAutoFit/>
+          </a:bodyPr>
+          <a:lstStyle/>
+          <a:p>
+            <a:pPr algn="l">
+              <a:spcAft>
+                <a:spcPts val="600"/>
+              </a:spcAft>
+            </a:pPr>
+            <a:r>
+              <a:rPr sz="1550" b="1">
+                <a:solidFill>
+                  <a:srgbClr val="22D3EE"/>
+                </a:solidFill>
+                <a:latin typeface="Segoe UI"/>
+              </a:rPr>
+              <a:t>Fleet compliance package</a:t>
+            </a:r>
+          </a:p>
+        </p:txBody>
+      </p:sp>
+      <p:sp>
+        <p:nvSpPr>
+          <p:cNvPr id="16" name="TextBox 15"/>
+          <p:cNvSpPr txBox="1"/>
+          <p:nvPr/>
+        </p:nvSpPr>
+        <p:spPr>
+          <a:xfrm>
+            <a:off x="5394960" y="5111495"/>
+            <a:ext cx="5852160" cy="640080"/>
+          </a:xfrm>
+          <a:prstGeom prst="rect">
+            <a:avLst/>
+          </a:prstGeom>
+          <a:noFill/>
+        </p:spPr>
+        <p:txBody>
+          <a:bodyPr wrap="square">
+            <a:spAutoFit/>
+          </a:bodyPr>
+          <a:lstStyle/>
+          <a:p>
+            <a:pPr algn="l">
+              <a:spcAft>
+                <a:spcPts val="600"/>
+              </a:spcAft>
+            </a:pPr>
+            <a:r>
+              <a:rPr sz="1350" b="0">
+                <a:solidFill>
+                  <a:srgbClr val="F2F6FF"/>
+                </a:solidFill>
+                <a:latin typeface="Segoe UI"/>
+              </a:rPr>
+              <a:t>Per-vehicle monitoring sold to commercial operators</a:t>
+            </a:r>
+          </a:p>
+        </p:txBody>
+      </p:sp>
+      <p:sp>
+        <p:nvSpPr>
+          <p:cNvPr id="17" name="TextBox 16"/>
+          <p:cNvSpPr txBox="1"/>
+          <p:nvPr/>
+        </p:nvSpPr>
+        <p:spPr>
+          <a:xfrm>
+            <a:off x="777240" y="6172200"/>
+            <a:ext cx="10607040" cy="548640"/>
+          </a:xfrm>
+          <a:prstGeom prst="rect">
+            <a:avLst/>
+          </a:prstGeom>
+          <a:noFill/>
+        </p:spPr>
+        <p:txBody>
+          <a:bodyPr wrap="square">
+            <a:spAutoFit/>
+          </a:bodyPr>
+          <a:lstStyle/>
+          <a:p>
+            <a:pPr algn="l">
+              <a:spcAft>
+                <a:spcPts val="600"/>
+              </a:spcAft>
+            </a:pPr>
+            <a:r>
+              <a:rPr sz="1400" b="1">
+                <a:solidFill>
+                  <a:srgbClr val="FFC74D"/>
+                </a:solidFill>
+                <a:latin typeface="Segoe UI"/>
+              </a:rPr>
+              <a:t>Cost advantage: no new cameras and no per-site hardware, so a pilot is software and calibration only.</a:t>
+            </a:r>
+          </a:p>
+        </p:txBody>
+      </p:sp>
+    </p:spTree>
+  </p:cSld>
+  <p:clrMapOvr>
+    <a:masterClrMapping/>
+  </p:clrMapOvr>
+</p:sld>
+</file>
+
+<file path=ppt/slides/slide14.xml><?xml version="1.0" encoding="utf-8"?>
+<p:sld xmlns:a="http://schemas.openxmlformats.org/drawingml/2006/main" xmlns:p="http://schemas.openxmlformats.org/presentationml/2006/main" xmlns:r="http://schemas.openxmlformats.org/officeDocument/2006/relationships">
+  <p:cSld>
+    <p:bg>
+      <p:bgPr>
+        <a:solidFill>
+          <a:srgbClr val="0B1428"/>
+        </a:solidFill>
+        <a:effectLst/>
+      </p:bgPr>
+    </p:bg>
+    <p:spTree>
+      <p:nvGrpSpPr>
+        <p:cNvPr id="1" name=""/>
+        <p:cNvGrpSpPr/>
+        <p:nvPr/>
+      </p:nvGrpSpPr>
+      <p:grpSpPr/>
+      <p:sp>
+        <p:nvSpPr>
+          <p:cNvPr id="2" name="Rectangle 1"/>
+          <p:cNvSpPr/>
+          <p:nvPr/>
+        </p:nvSpPr>
+        <p:spPr>
+          <a:xfrm>
+            <a:off x="0" y="0"/>
+            <a:ext cx="12191695" cy="82296"/>
+          </a:xfrm>
+          <a:prstGeom prst="rect">
+            <a:avLst/>
+          </a:prstGeom>
+          <a:solidFill>
+            <a:srgbClr val="22D3EE"/>
+          </a:solidFill>
+          <a:ln>
+            <a:noFill/>
+          </a:ln>
+          <a:effectLst/>
+        </p:spPr>
+        <p:style>
+          <a:lnRef idx="1">
+            <a:schemeClr val="accent1"/>
+          </a:lnRef>
+          <a:fillRef idx="3">
+            <a:schemeClr val="accent1"/>
+          </a:fillRef>
+          <a:effectRef idx="2">
+            <a:schemeClr val="accent1"/>
+          </a:effectRef>
+          <a:fontRef idx="minor">
+            <a:schemeClr val="lt1"/>
+          </a:fontRef>
+        </p:style>
+        <p:txBody>
+          <a:bodyPr rtlCol="0" anchor="ctr"/>
+          <a:lstStyle/>
+          <a:p>
+            <a:pPr algn="ctr"/>
+          </a:p>
+        </p:txBody>
+      </p:sp>
+      <p:sp>
+        <p:nvSpPr>
+          <p:cNvPr id="3" name="TextBox 2"/>
+          <p:cNvSpPr txBox="1"/>
+          <p:nvPr/>
+        </p:nvSpPr>
+        <p:spPr>
+          <a:xfrm>
+            <a:off x="640080" y="384048"/>
+            <a:ext cx="10058400" cy="365760"/>
+          </a:xfrm>
+          <a:prstGeom prst="rect">
+            <a:avLst/>
+          </a:prstGeom>
+          <a:noFill/>
+        </p:spPr>
+        <p:txBody>
+          <a:bodyPr wrap="square">
+            <a:spAutoFit/>
+          </a:bodyPr>
+          <a:lstStyle/>
+          <a:p>
+            <a:pPr algn="l">
+              <a:spcAft>
+                <a:spcPts val="600"/>
+              </a:spcAft>
+            </a:pPr>
+            <a:r>
+              <a:rPr sz="1300" b="1">
+                <a:solidFill>
+                  <a:srgbClr val="22D3EE"/>
+                </a:solidFill>
+                <a:latin typeface="Segoe UI"/>
+              </a:rPr>
+              <a:t>ECONOMIC, SOCIAL, ENVIRONMENTAL</a:t>
+            </a:r>
+          </a:p>
+        </p:txBody>
+      </p:sp>
+      <p:sp>
+        <p:nvSpPr>
+          <p:cNvPr id="4" name="TextBox 3"/>
+          <p:cNvSpPr txBox="1"/>
+          <p:nvPr/>
+        </p:nvSpPr>
+        <p:spPr>
+          <a:xfrm>
+            <a:off x="640080" y="713232"/>
+            <a:ext cx="10972800" cy="914400"/>
+          </a:xfrm>
+          <a:prstGeom prst="rect">
+            <a:avLst/>
+          </a:prstGeom>
+          <a:noFill/>
+        </p:spPr>
+        <p:txBody>
+          <a:bodyPr wrap="square">
+            <a:spAutoFit/>
+          </a:bodyPr>
+          <a:lstStyle/>
+          <a:p>
+            <a:pPr algn="l">
+              <a:spcAft>
+                <a:spcPts val="600"/>
+              </a:spcAft>
+            </a:pPr>
+            <a:r>
+              <a:rPr sz="3400" b="1">
+                <a:solidFill>
+                  <a:srgbClr val="F2F6FF"/>
+                </a:solidFill>
+                <a:latin typeface="Segoe UI"/>
+              </a:rPr>
+              <a:t>Sustainability</a:t>
+            </a:r>
+          </a:p>
+        </p:txBody>
+      </p:sp>
+      <p:sp>
+        <p:nvSpPr>
+          <p:cNvPr id="5" name="Rectangle 4"/>
+          <p:cNvSpPr/>
+          <p:nvPr/>
+        </p:nvSpPr>
+        <p:spPr>
+          <a:xfrm>
+            <a:off x="731520" y="1828800"/>
+            <a:ext cx="5212080" cy="3931920"/>
+          </a:xfrm>
+          <a:prstGeom prst="rect">
+            <a:avLst/>
+          </a:prstGeom>
+          <a:solidFill>
+            <a:srgbClr val="111E3D"/>
+          </a:solidFill>
+          <a:ln>
+            <a:solidFill>
+              <a:srgbClr val="0B1428"/>
+            </a:solidFill>
+          </a:ln>
+          <a:effectLst/>
+        </p:spPr>
+        <p:style>
+          <a:lnRef idx="1">
+            <a:schemeClr val="accent1"/>
+          </a:lnRef>
+          <a:fillRef idx="3">
+            <a:schemeClr val="accent1"/>
+          </a:fillRef>
+          <a:effectRef idx="2">
+            <a:schemeClr val="accent1"/>
+          </a:effectRef>
+          <a:fontRef idx="minor">
+            <a:schemeClr val="lt1"/>
+          </a:fontRef>
+        </p:style>
+        <p:txBody>
+          <a:bodyPr rtlCol="0" anchor="ctr"/>
+          <a:lstStyle/>
+          <a:p>
+            <a:pPr algn="ctr"/>
+          </a:p>
+        </p:txBody>
+      </p:sp>
+      <p:sp>
+        <p:nvSpPr>
+          <p:cNvPr id="6" name="TextBox 5"/>
+          <p:cNvSpPr txBox="1"/>
+          <p:nvPr/>
+        </p:nvSpPr>
+        <p:spPr>
+          <a:xfrm>
+            <a:off x="1005840" y="2029968"/>
+            <a:ext cx="4663440" cy="457200"/>
+          </a:xfrm>
+          <a:prstGeom prst="rect">
+            <a:avLst/>
+          </a:prstGeom>
+          <a:noFill/>
+        </p:spPr>
+        <p:txBody>
+          <a:bodyPr wrap="square">
+            <a:spAutoFit/>
+          </a:bodyPr>
+          <a:lstStyle/>
+          <a:p>
+            <a:pPr algn="l">
+              <a:spcAft>
+                <a:spcPts val="600"/>
+              </a:spcAft>
+            </a:pPr>
+            <a:r>
+              <a:rPr sz="1700" b="1">
+                <a:solidFill>
+                  <a:srgbClr val="22D3EE"/>
+                </a:solidFill>
+                <a:latin typeface="Segoe UI"/>
+              </a:rPr>
+              <a:t>Economically self-sustaining</a:t>
+            </a:r>
+          </a:p>
+        </p:txBody>
+      </p:sp>
+      <p:sp>
+        <p:nvSpPr>
+          <p:cNvPr id="7" name="TextBox 6"/>
+          <p:cNvSpPr txBox="1"/>
+          <p:nvPr/>
+        </p:nvSpPr>
+        <p:spPr>
+          <a:xfrm>
+            <a:off x="1005840" y="2606040"/>
+            <a:ext cx="4663440" cy="2926080"/>
+          </a:xfrm>
+          <a:prstGeom prst="rect">
+            <a:avLst/>
+          </a:prstGeom>
+          <a:noFill/>
+        </p:spPr>
+        <p:txBody>
+          <a:bodyPr wrap="square">
+            <a:spAutoFit/>
+          </a:bodyPr>
+          <a:lstStyle/>
+          <a:p>
+            <a:pPr algn="l">
+              <a:spcAft>
+                <a:spcPts val="1000"/>
+              </a:spcAft>
+            </a:pPr>
+            <a:r>
+              <a:rPr sz="1350" b="0">
+                <a:solidFill>
+                  <a:srgbClr val="F2F6FF"/>
+                </a:solidFill>
+                <a:latin typeface="Segoe UI"/>
+              </a:rPr>
+              <a:t>Runs on </a:t>
+            </a:r>
+            <a:r>
+              <a:rPr sz="1350" b="1">
+                <a:solidFill>
+                  <a:srgbClr val="F2F6FF"/>
+                </a:solidFill>
+                <a:latin typeface="Segoe UI"/>
+              </a:rPr>
+              <a:t>infrastructure already paid for</a:t>
+            </a:r>
+            <a:r>
+              <a:rPr sz="1350" b="0">
+                <a:solidFill>
+                  <a:srgbClr val="F2F6FF"/>
+                </a:solidFill>
+                <a:latin typeface="Segoe UI"/>
+              </a:rPr>
+              <a:t>.</a:t>
+            </a:r>
+          </a:p>
+          <a:p>
+            <a:pPr algn="l">
+              <a:spcAft>
+                <a:spcPts val="1000"/>
+              </a:spcAft>
+            </a:pPr>
+            <a:r>
+              <a:rPr sz="1350" b="0">
+                <a:solidFill>
+                  <a:srgbClr val="F2F6FF"/>
+                </a:solidFill>
+                <a:latin typeface="Segoe UI"/>
+              </a:rPr>
+              <a:t>One laptop starts a pilot; no civil works, no gantries.</a:t>
+            </a:r>
+          </a:p>
+          <a:p>
+            <a:pPr algn="l">
+              <a:spcAft>
+                <a:spcPts val="1000"/>
+              </a:spcAft>
+            </a:pPr>
+            <a:r>
+              <a:rPr sz="1350" b="0">
+                <a:solidFill>
+                  <a:srgbClr val="F2F6FF"/>
+                </a:solidFill>
+                <a:latin typeface="Segoe UI"/>
+              </a:rPr>
+              <a:t>Recovered fines fund expansion without new capital.</a:t>
+            </a:r>
+          </a:p>
+        </p:txBody>
+      </p:sp>
+      <p:sp>
+        <p:nvSpPr>
+          <p:cNvPr id="8" name="Rectangle 7"/>
+          <p:cNvSpPr/>
+          <p:nvPr/>
+        </p:nvSpPr>
+        <p:spPr>
+          <a:xfrm>
+            <a:off x="6309359" y="1828800"/>
+            <a:ext cx="5212080" cy="3931920"/>
+          </a:xfrm>
+          <a:prstGeom prst="rect">
+            <a:avLst/>
+          </a:prstGeom>
+          <a:solidFill>
+            <a:srgbClr val="111E3D"/>
+          </a:solidFill>
+          <a:ln>
+            <a:solidFill>
+              <a:srgbClr val="0B1428"/>
+            </a:solidFill>
+          </a:ln>
+          <a:effectLst/>
+        </p:spPr>
+        <p:style>
+          <a:lnRef idx="1">
+            <a:schemeClr val="accent1"/>
+          </a:lnRef>
+          <a:fillRef idx="3">
+            <a:schemeClr val="accent1"/>
+          </a:fillRef>
+          <a:effectRef idx="2">
+            <a:schemeClr val="accent1"/>
+          </a:effectRef>
+          <a:fontRef idx="minor">
+            <a:schemeClr val="lt1"/>
+          </a:fontRef>
+        </p:style>
+        <p:txBody>
+          <a:bodyPr rtlCol="0" anchor="ctr"/>
+          <a:lstStyle/>
+          <a:p>
+            <a:pPr algn="ctr"/>
+          </a:p>
+        </p:txBody>
+      </p:sp>
+      <p:sp>
+        <p:nvSpPr>
+          <p:cNvPr id="9" name="TextBox 8"/>
+          <p:cNvSpPr txBox="1"/>
+          <p:nvPr/>
+        </p:nvSpPr>
+        <p:spPr>
+          <a:xfrm>
+            <a:off x="6583679" y="2029968"/>
+            <a:ext cx="4663440" cy="457200"/>
+          </a:xfrm>
+          <a:prstGeom prst="rect">
+            <a:avLst/>
+          </a:prstGeom>
+          <a:noFill/>
+        </p:spPr>
+        <p:txBody>
+          <a:bodyPr wrap="square">
+            <a:spAutoFit/>
+          </a:bodyPr>
+          <a:lstStyle/>
+          <a:p>
+            <a:pPr algn="l">
+              <a:spcAft>
+                <a:spcPts val="600"/>
+              </a:spcAft>
+            </a:pPr>
+            <a:r>
+              <a:rPr sz="1700" b="1">
+                <a:solidFill>
+                  <a:srgbClr val="22D3EE"/>
+                </a:solidFill>
+                <a:latin typeface="Segoe UI"/>
+              </a:rPr>
+              <a:t>Socially and environmentally sound</a:t>
+            </a:r>
+          </a:p>
+        </p:txBody>
+      </p:sp>
+      <p:sp>
+        <p:nvSpPr>
+          <p:cNvPr id="10" name="TextBox 9"/>
+          <p:cNvSpPr txBox="1"/>
+          <p:nvPr/>
+        </p:nvSpPr>
+        <p:spPr>
+          <a:xfrm>
+            <a:off x="6583679" y="2606040"/>
+            <a:ext cx="4663440" cy="2926080"/>
+          </a:xfrm>
+          <a:prstGeom prst="rect">
+            <a:avLst/>
+          </a:prstGeom>
+          <a:noFill/>
+        </p:spPr>
+        <p:txBody>
+          <a:bodyPr wrap="square">
+            <a:spAutoFit/>
+          </a:bodyPr>
+          <a:lstStyle/>
+          <a:p>
+            <a:pPr algn="l">
+              <a:spcAft>
+                <a:spcPts val="1000"/>
+              </a:spcAft>
+            </a:pPr>
+            <a:r>
+              <a:rPr sz="1350" b="1">
+                <a:solidFill>
+                  <a:srgbClr val="F2F6FF"/>
+                </a:solidFill>
+                <a:latin typeface="Segoe UI"/>
+              </a:rPr>
+              <a:t>Fairness</a:t>
+            </a:r>
+            <a:r>
+              <a:rPr sz="1350" b="0">
+                <a:solidFill>
+                  <a:srgbClr val="F2F6FF"/>
+                </a:solidFill>
+                <a:latin typeface="Segoe UI"/>
+              </a:rPr>
+              <a:t>: identical rules for every driver, no discretion.</a:t>
+            </a:r>
+          </a:p>
+          <a:p>
+            <a:pPr algn="l">
+              <a:spcAft>
+                <a:spcPts val="1000"/>
+              </a:spcAft>
+            </a:pPr>
+            <a:r>
+              <a:rPr sz="1350" b="1">
+                <a:solidFill>
+                  <a:srgbClr val="F2F6FF"/>
+                </a:solidFill>
+                <a:latin typeface="Segoe UI"/>
+              </a:rPr>
+              <a:t>Fewer deaths</a:t>
+            </a:r>
+            <a:r>
+              <a:rPr sz="1350" b="0">
+                <a:solidFill>
+                  <a:srgbClr val="F2F6FF"/>
+                </a:solidFill>
+                <a:latin typeface="Segoe UI"/>
+              </a:rPr>
+              <a:t> through deterrence, not punishment.</a:t>
+            </a:r>
+          </a:p>
+          <a:p>
+            <a:pPr algn="l">
+              <a:spcAft>
+                <a:spcPts val="1000"/>
+              </a:spcAft>
+            </a:pPr>
+            <a:r>
+              <a:rPr sz="1350" b="1">
+                <a:solidFill>
+                  <a:srgbClr val="F2F6FF"/>
+                </a:solidFill>
+                <a:latin typeface="Segoe UI"/>
+              </a:rPr>
+              <a:t>Lower emissions</a:t>
+            </a:r>
+            <a:r>
+              <a:rPr sz="1350" b="0">
+                <a:solidFill>
+                  <a:srgbClr val="F2F6FF"/>
+                </a:solidFill>
+                <a:latin typeface="Segoe UI"/>
+              </a:rPr>
+              <a:t> - smoother traffic and fewer crash-related jams.</a:t>
+            </a:r>
+          </a:p>
+          <a:p>
+            <a:pPr algn="l">
+              <a:spcAft>
+                <a:spcPts val="1000"/>
+              </a:spcAft>
+            </a:pPr>
+            <a:r>
+              <a:rPr sz="1350" b="1">
+                <a:solidFill>
+                  <a:srgbClr val="F2F6FF"/>
+                </a:solidFill>
+                <a:latin typeface="Segoe UI"/>
+              </a:rPr>
+              <a:t>Privacy-respecting</a:t>
+            </a:r>
+            <a:r>
+              <a:rPr sz="1350" b="0">
+                <a:solidFill>
+                  <a:srgbClr val="F2F6FF"/>
+                </a:solidFill>
+                <a:latin typeface="Segoe UI"/>
+              </a:rPr>
+              <a:t>: plates confirmed three times or marked unreadable; no identity inference.</a:t>
+            </a:r>
+          </a:p>
+        </p:txBody>
+      </p:sp>
+    </p:spTree>
+  </p:cSld>
+  <p:clrMapOvr>
+    <a:masterClrMapping/>
+  </p:clrMapOvr>
+</p:sld>
+</file>
+
+<file path=ppt/slides/slide15.xml><?xml version="1.0" encoding="utf-8"?>
+<p:sld xmlns:a="http://schemas.openxmlformats.org/drawingml/2006/main" xmlns:p="http://schemas.openxmlformats.org/presentationml/2006/main" xmlns:r="http://schemas.openxmlformats.org/officeDocument/2006/relationships">
+  <p:cSld>
+    <p:bg>
+      <p:bgPr>
+        <a:solidFill>
+          <a:srgbClr val="0B1428"/>
+        </a:solidFill>
+        <a:effectLst/>
+      </p:bgPr>
+    </p:bg>
+    <p:spTree>
+      <p:nvGrpSpPr>
+        <p:cNvPr id="1" name=""/>
+        <p:cNvGrpSpPr/>
+        <p:nvPr/>
+      </p:nvGrpSpPr>
+      <p:grpSpPr/>
+      <p:sp>
+        <p:nvSpPr>
+          <p:cNvPr id="2" name="Rectangle 1"/>
+          <p:cNvSpPr/>
+          <p:nvPr/>
+        </p:nvSpPr>
+        <p:spPr>
+          <a:xfrm>
+            <a:off x="0" y="0"/>
+            <a:ext cx="12191695" cy="82296"/>
+          </a:xfrm>
+          <a:prstGeom prst="rect">
+            <a:avLst/>
+          </a:prstGeom>
+          <a:solidFill>
+            <a:srgbClr val="22D3EE"/>
+          </a:solidFill>
+          <a:ln>
+            <a:noFill/>
+          </a:ln>
+          <a:effectLst/>
+        </p:spPr>
+        <p:style>
+          <a:lnRef idx="1">
+            <a:schemeClr val="accent1"/>
+          </a:lnRef>
+          <a:fillRef idx="3">
+            <a:schemeClr val="accent1"/>
+          </a:fillRef>
+          <a:effectRef idx="2">
+            <a:schemeClr val="accent1"/>
+          </a:effectRef>
+          <a:fontRef idx="minor">
+            <a:schemeClr val="lt1"/>
+          </a:fontRef>
+        </p:style>
+        <p:txBody>
+          <a:bodyPr rtlCol="0" anchor="ctr"/>
+          <a:lstStyle/>
+          <a:p>
+            <a:pPr algn="ctr"/>
+          </a:p>
+        </p:txBody>
+      </p:sp>
+      <p:sp>
+        <p:nvSpPr>
+          <p:cNvPr id="3" name="TextBox 2"/>
+          <p:cNvSpPr txBox="1"/>
+          <p:nvPr/>
+        </p:nvSpPr>
+        <p:spPr>
+          <a:xfrm>
+            <a:off x="640080" y="384048"/>
+            <a:ext cx="10058400" cy="365760"/>
+          </a:xfrm>
+          <a:prstGeom prst="rect">
+            <a:avLst/>
+          </a:prstGeom>
+          <a:noFill/>
+        </p:spPr>
+        <p:txBody>
+          <a:bodyPr wrap="square">
+            <a:spAutoFit/>
+          </a:bodyPr>
+          <a:lstStyle/>
+          <a:p>
+            <a:pPr algn="l">
+              <a:spcAft>
+                <a:spcPts val="600"/>
+              </a:spcAft>
+            </a:pPr>
+            <a:r>
+              <a:rPr sz="1300" b="1">
+                <a:solidFill>
+                  <a:srgbClr val="22D3EE"/>
+                </a:solidFill>
+                <a:latin typeface="Segoe UI"/>
+              </a:rPr>
+              <a:t>PRACTICAL AND MODULAR</a:t>
+            </a:r>
+          </a:p>
+        </p:txBody>
+      </p:sp>
+      <p:sp>
+        <p:nvSpPr>
+          <p:cNvPr id="4" name="TextBox 3"/>
+          <p:cNvSpPr txBox="1"/>
+          <p:nvPr/>
+        </p:nvSpPr>
+        <p:spPr>
+          <a:xfrm>
+            <a:off x="640080" y="713232"/>
+            <a:ext cx="10972800" cy="914400"/>
+          </a:xfrm>
+          <a:prstGeom prst="rect">
+            <a:avLst/>
+          </a:prstGeom>
+          <a:noFill/>
+        </p:spPr>
+        <p:txBody>
+          <a:bodyPr wrap="square">
+            <a:spAutoFit/>
+          </a:bodyPr>
+          <a:lstStyle/>
+          <a:p>
+            <a:pPr algn="l">
+              <a:spcAft>
+                <a:spcPts val="600"/>
+              </a:spcAft>
+            </a:pPr>
+            <a:r>
+              <a:rPr sz="3400" b="1">
+                <a:solidFill>
+                  <a:srgbClr val="F2F6FF"/>
+                </a:solidFill>
+                <a:latin typeface="Segoe UI"/>
+              </a:rPr>
+              <a:t>Deployment</a:t>
             </a:r>
           </a:p>
         </p:txBody>
@@ -4429,8 +6801,8 @@
         </p:nvSpPr>
         <p:spPr>
           <a:xfrm>
-            <a:off x="822960" y="4572000"/>
-            <a:ext cx="10515600" cy="548640"/>
+            <a:off x="731520" y="1874519"/>
+            <a:ext cx="10607040" cy="3657600"/>
           </a:xfrm>
           <a:prstGeom prst="rect">
             <a:avLst/>
@@ -4445,17 +6817,878 @@
           <a:p>
             <a:pPr algn="l">
               <a:spcAft>
+                <a:spcPts val="1200"/>
+              </a:spcAft>
+            </a:pPr>
+            <a:r>
+              <a:rPr sz="1700" b="0">
+                <a:solidFill>
+                  <a:srgbClr val="F2F6FF"/>
+                </a:solidFill>
+                <a:latin typeface="Segoe UI"/>
+              </a:rPr>
+              <a:t>Works with </a:t>
+            </a:r>
+            <a:r>
+              <a:rPr sz="1700" b="1">
+                <a:solidFill>
+                  <a:srgbClr val="F2F6FF"/>
+                </a:solidFill>
+                <a:latin typeface="Segoe UI"/>
+              </a:rPr>
+              <a:t>existing CCTV</a:t>
+            </a:r>
+            <a:r>
+              <a:rPr sz="1700" b="0">
+                <a:solidFill>
+                  <a:srgbClr val="F2F6FF"/>
+                </a:solidFill>
+                <a:latin typeface="Segoe UI"/>
+              </a:rPr>
+              <a:t>, a phone stream, or a drone via OBS.</a:t>
+            </a:r>
+          </a:p>
+          <a:p>
+            <a:pPr algn="l">
+              <a:spcAft>
+                <a:spcPts val="1200"/>
+              </a:spcAft>
+            </a:pPr>
+            <a:r>
+              <a:rPr sz="1700" b="0">
+                <a:solidFill>
+                  <a:srgbClr val="F2F6FF"/>
+                </a:solidFill>
+                <a:latin typeface="Segoe UI"/>
+              </a:rPr>
+              <a:t>A pilot site runs on a </a:t>
+            </a:r>
+            <a:r>
+              <a:rPr sz="1700" b="1">
+                <a:solidFill>
+                  <a:srgbClr val="F2F6FF"/>
+                </a:solidFill>
+                <a:latin typeface="Segoe UI"/>
+              </a:rPr>
+              <a:t>single laptop</a:t>
+            </a:r>
+            <a:r>
+              <a:rPr sz="1700" b="0">
+                <a:solidFill>
+                  <a:srgbClr val="F2F6FF"/>
+                </a:solidFill>
+                <a:latin typeface="Segoe UI"/>
+              </a:rPr>
+              <a:t>; cities use GPU edge boxes.</a:t>
+            </a:r>
+          </a:p>
+          <a:p>
+            <a:pPr algn="l">
+              <a:spcAft>
+                <a:spcPts val="1200"/>
+              </a:spcAft>
+            </a:pPr>
+            <a:r>
+              <a:rPr sz="1700" b="0">
+                <a:solidFill>
+                  <a:srgbClr val="F2F6FF"/>
+                </a:solidFill>
+                <a:latin typeface="Segoe UI"/>
+              </a:rPr>
+              <a:t>Helmet, seatbelt, plate and three-wheeler models are </a:t>
+            </a:r>
+            <a:r>
+              <a:rPr sz="1700" b="1">
+                <a:solidFill>
+                  <a:srgbClr val="F2F6FF"/>
+                </a:solidFill>
+                <a:latin typeface="Segoe UI"/>
+              </a:rPr>
+              <a:t>drop-in files</a:t>
+            </a:r>
+            <a:r>
+              <a:rPr sz="1700" b="0">
+                <a:solidFill>
+                  <a:srgbClr val="F2F6FF"/>
+                </a:solidFill>
+                <a:latin typeface="Segoe UI"/>
+              </a:rPr>
+              <a:t> - no code change.</a:t>
+            </a:r>
+          </a:p>
+          <a:p>
+            <a:pPr algn="l">
+              <a:spcAft>
+                <a:spcPts val="1200"/>
+              </a:spcAft>
+            </a:pPr>
+            <a:r>
+              <a:rPr sz="1700" b="0">
+                <a:solidFill>
+                  <a:srgbClr val="F2F6FF"/>
+                </a:solidFill>
+                <a:latin typeface="Segoe UI"/>
+              </a:rPr>
+              <a:t>Python, FastAPI, YOLOv8, ByteTrack, OpenCV, EasyOCR, SQLite.</a:t>
+            </a:r>
+          </a:p>
+          <a:p>
+            <a:pPr algn="l">
+              <a:spcAft>
+                <a:spcPts val="1200"/>
+              </a:spcAft>
+            </a:pPr>
+            <a:r>
+              <a:rPr sz="1700" b="0">
+                <a:solidFill>
+                  <a:srgbClr val="F2F6FF"/>
+                </a:solidFill>
+                <a:latin typeface="Segoe UI"/>
+              </a:rPr>
+              <a:t>Dashboard is a </a:t>
+            </a:r>
+            <a:r>
+              <a:rPr sz="1700" b="1">
+                <a:solidFill>
+                  <a:srgbClr val="F2F6FF"/>
+                </a:solidFill>
+                <a:latin typeface="Segoe UI"/>
+              </a:rPr>
+              <a:t>single self-contained HTML file</a:t>
+            </a:r>
+            <a:r>
+              <a:rPr sz="1700" b="0">
+                <a:solidFill>
+                  <a:srgbClr val="F2F6FF"/>
+                </a:solidFill>
+                <a:latin typeface="Segoe UI"/>
+              </a:rPr>
+              <a:t>, no external dependencies.</a:t>
+            </a:r>
+          </a:p>
+        </p:txBody>
+      </p:sp>
+    </p:spTree>
+  </p:cSld>
+  <p:clrMapOvr>
+    <a:masterClrMapping/>
+  </p:clrMapOvr>
+</p:sld>
+</file>
+
+<file path=ppt/slides/slide16.xml><?xml version="1.0" encoding="utf-8"?>
+<p:sld xmlns:a="http://schemas.openxmlformats.org/drawingml/2006/main" xmlns:p="http://schemas.openxmlformats.org/presentationml/2006/main" xmlns:r="http://schemas.openxmlformats.org/officeDocument/2006/relationships">
+  <p:cSld>
+    <p:bg>
+      <p:bgPr>
+        <a:solidFill>
+          <a:srgbClr val="0B1428"/>
+        </a:solidFill>
+        <a:effectLst/>
+      </p:bgPr>
+    </p:bg>
+    <p:spTree>
+      <p:nvGrpSpPr>
+        <p:cNvPr id="1" name=""/>
+        <p:cNvGrpSpPr/>
+        <p:nvPr/>
+      </p:nvGrpSpPr>
+      <p:grpSpPr/>
+      <p:sp>
+        <p:nvSpPr>
+          <p:cNvPr id="2" name="Rectangle 1"/>
+          <p:cNvSpPr/>
+          <p:nvPr/>
+        </p:nvSpPr>
+        <p:spPr>
+          <a:xfrm>
+            <a:off x="0" y="0"/>
+            <a:ext cx="12191695" cy="82296"/>
+          </a:xfrm>
+          <a:prstGeom prst="rect">
+            <a:avLst/>
+          </a:prstGeom>
+          <a:solidFill>
+            <a:srgbClr val="22D3EE"/>
+          </a:solidFill>
+          <a:ln>
+            <a:noFill/>
+          </a:ln>
+          <a:effectLst/>
+        </p:spPr>
+        <p:style>
+          <a:lnRef idx="1">
+            <a:schemeClr val="accent1"/>
+          </a:lnRef>
+          <a:fillRef idx="3">
+            <a:schemeClr val="accent1"/>
+          </a:fillRef>
+          <a:effectRef idx="2">
+            <a:schemeClr val="accent1"/>
+          </a:effectRef>
+          <a:fontRef idx="minor">
+            <a:schemeClr val="lt1"/>
+          </a:fontRef>
+        </p:style>
+        <p:txBody>
+          <a:bodyPr rtlCol="0" anchor="ctr"/>
+          <a:lstStyle/>
+          <a:p>
+            <a:pPr algn="ctr"/>
+          </a:p>
+        </p:txBody>
+      </p:sp>
+      <p:sp>
+        <p:nvSpPr>
+          <p:cNvPr id="3" name="TextBox 2"/>
+          <p:cNvSpPr txBox="1"/>
+          <p:nvPr/>
+        </p:nvSpPr>
+        <p:spPr>
+          <a:xfrm>
+            <a:off x="640080" y="384048"/>
+            <a:ext cx="10058400" cy="365760"/>
+          </a:xfrm>
+          <a:prstGeom prst="rect">
+            <a:avLst/>
+          </a:prstGeom>
+          <a:noFill/>
+        </p:spPr>
+        <p:txBody>
+          <a:bodyPr wrap="square">
+            <a:spAutoFit/>
+          </a:bodyPr>
+          <a:lstStyle/>
+          <a:p>
+            <a:pPr algn="l">
+              <a:spcAft>
                 <a:spcPts val="600"/>
               </a:spcAft>
             </a:pPr>
             <a:r>
-              <a:rPr sz="1400" b="0">
+              <a:rPr sz="1300" b="1">
+                <a:solidFill>
+                  <a:srgbClr val="22D3EE"/>
+                </a:solidFill>
+                <a:latin typeface="Segoe UI"/>
+              </a:rPr>
+              <a:t>WHERE THIS GOES</a:t>
+            </a:r>
+          </a:p>
+        </p:txBody>
+      </p:sp>
+      <p:sp>
+        <p:nvSpPr>
+          <p:cNvPr id="4" name="TextBox 3"/>
+          <p:cNvSpPr txBox="1"/>
+          <p:nvPr/>
+        </p:nvSpPr>
+        <p:spPr>
+          <a:xfrm>
+            <a:off x="640080" y="713232"/>
+            <a:ext cx="10972800" cy="914400"/>
+          </a:xfrm>
+          <a:prstGeom prst="rect">
+            <a:avLst/>
+          </a:prstGeom>
+          <a:noFill/>
+        </p:spPr>
+        <p:txBody>
+          <a:bodyPr wrap="square">
+            <a:spAutoFit/>
+          </a:bodyPr>
+          <a:lstStyle/>
+          <a:p>
+            <a:pPr algn="l">
+              <a:spcAft>
+                <a:spcPts val="600"/>
+              </a:spcAft>
+            </a:pPr>
+            <a:r>
+              <a:rPr sz="3400" b="1">
+                <a:solidFill>
+                  <a:srgbClr val="F2F6FF"/>
+                </a:solidFill>
+                <a:latin typeface="Segoe UI"/>
+              </a:rPr>
+              <a:t>Scalability and future plans</a:t>
+            </a:r>
+          </a:p>
+        </p:txBody>
+      </p:sp>
+      <p:sp>
+        <p:nvSpPr>
+          <p:cNvPr id="5" name="TextBox 4"/>
+          <p:cNvSpPr txBox="1"/>
+          <p:nvPr/>
+        </p:nvSpPr>
+        <p:spPr>
+          <a:xfrm>
+            <a:off x="822960" y="1920240"/>
+            <a:ext cx="2377440" cy="640080"/>
+          </a:xfrm>
+          <a:prstGeom prst="rect">
+            <a:avLst/>
+          </a:prstGeom>
+          <a:noFill/>
+        </p:spPr>
+        <p:txBody>
+          <a:bodyPr wrap="square">
+            <a:spAutoFit/>
+          </a:bodyPr>
+          <a:lstStyle/>
+          <a:p>
+            <a:pPr algn="l">
+              <a:spcAft>
+                <a:spcPts val="600"/>
+              </a:spcAft>
+            </a:pPr>
+            <a:r>
+              <a:rPr sz="1600" b="1">
+                <a:solidFill>
+                  <a:srgbClr val="FFC74D"/>
+                </a:solidFill>
+                <a:latin typeface="Segoe UI"/>
+              </a:rPr>
+              <a:t>Now</a:t>
+            </a:r>
+          </a:p>
+        </p:txBody>
+      </p:sp>
+      <p:sp>
+        <p:nvSpPr>
+          <p:cNvPr id="6" name="TextBox 5"/>
+          <p:cNvSpPr txBox="1"/>
+          <p:nvPr/>
+        </p:nvSpPr>
+        <p:spPr>
+          <a:xfrm>
+            <a:off x="3291840" y="1920240"/>
+            <a:ext cx="8138160" cy="822960"/>
+          </a:xfrm>
+          <a:prstGeom prst="rect">
+            <a:avLst/>
+          </a:prstGeom>
+          <a:noFill/>
+        </p:spPr>
+        <p:txBody>
+          <a:bodyPr wrap="square">
+            <a:spAutoFit/>
+          </a:bodyPr>
+          <a:lstStyle/>
+          <a:p>
+            <a:pPr algn="l">
+              <a:spcAft>
+                <a:spcPts val="600"/>
+              </a:spcAft>
+            </a:pPr>
+            <a:r>
+              <a:rPr sz="1450" b="0">
+                <a:solidFill>
+                  <a:srgbClr val="F2F6FF"/>
+                </a:solidFill>
+                <a:latin typeface="Segoe UI"/>
+              </a:rPr>
+              <a:t>Working system, 79 tests, verified on real Sri Lankan road footage</a:t>
+            </a:r>
+          </a:p>
+        </p:txBody>
+      </p:sp>
+      <p:sp>
+        <p:nvSpPr>
+          <p:cNvPr id="7" name="TextBox 6"/>
+          <p:cNvSpPr txBox="1"/>
+          <p:nvPr/>
+        </p:nvSpPr>
+        <p:spPr>
+          <a:xfrm>
+            <a:off x="822960" y="2971800"/>
+            <a:ext cx="2377440" cy="640080"/>
+          </a:xfrm>
+          <a:prstGeom prst="rect">
+            <a:avLst/>
+          </a:prstGeom>
+          <a:noFill/>
+        </p:spPr>
+        <p:txBody>
+          <a:bodyPr wrap="square">
+            <a:spAutoFit/>
+          </a:bodyPr>
+          <a:lstStyle/>
+          <a:p>
+            <a:pPr algn="l">
+              <a:spcAft>
+                <a:spcPts val="600"/>
+              </a:spcAft>
+            </a:pPr>
+            <a:r>
+              <a:rPr sz="1600" b="1">
+                <a:solidFill>
+                  <a:srgbClr val="FFC74D"/>
+                </a:solidFill>
+                <a:latin typeface="Segoe UI"/>
+              </a:rPr>
+              <a:t>Next 3 months</a:t>
+            </a:r>
+          </a:p>
+        </p:txBody>
+      </p:sp>
+      <p:sp>
+        <p:nvSpPr>
+          <p:cNvPr id="8" name="TextBox 7"/>
+          <p:cNvSpPr txBox="1"/>
+          <p:nvPr/>
+        </p:nvSpPr>
+        <p:spPr>
+          <a:xfrm>
+            <a:off x="3291840" y="2971800"/>
+            <a:ext cx="8138160" cy="822960"/>
+          </a:xfrm>
+          <a:prstGeom prst="rect">
+            <a:avLst/>
+          </a:prstGeom>
+          <a:noFill/>
+        </p:spPr>
+        <p:txBody>
+          <a:bodyPr wrap="square">
+            <a:spAutoFit/>
+          </a:bodyPr>
+          <a:lstStyle/>
+          <a:p>
+            <a:pPr algn="l">
+              <a:spcAft>
+                <a:spcPts val="600"/>
+              </a:spcAft>
+            </a:pPr>
+            <a:r>
+              <a:rPr sz="1450" b="0">
+                <a:solidFill>
+                  <a:srgbClr val="F2F6FF"/>
+                </a:solidFill>
+                <a:latin typeface="Segoe UI"/>
+              </a:rPr>
+              <a:t>Live pilot at one signalised junction with police partnership</a:t>
+            </a:r>
+          </a:p>
+        </p:txBody>
+      </p:sp>
+      <p:sp>
+        <p:nvSpPr>
+          <p:cNvPr id="9" name="TextBox 8"/>
+          <p:cNvSpPr txBox="1"/>
+          <p:nvPr/>
+        </p:nvSpPr>
+        <p:spPr>
+          <a:xfrm>
+            <a:off x="822960" y="4023360"/>
+            <a:ext cx="2377440" cy="640080"/>
+          </a:xfrm>
+          <a:prstGeom prst="rect">
+            <a:avLst/>
+          </a:prstGeom>
+          <a:noFill/>
+        </p:spPr>
+        <p:txBody>
+          <a:bodyPr wrap="square">
+            <a:spAutoFit/>
+          </a:bodyPr>
+          <a:lstStyle/>
+          <a:p>
+            <a:pPr algn="l">
+              <a:spcAft>
+                <a:spcPts val="600"/>
+              </a:spcAft>
+            </a:pPr>
+            <a:r>
+              <a:rPr sz="1600" b="1">
+                <a:solidFill>
+                  <a:srgbClr val="FFC74D"/>
+                </a:solidFill>
+                <a:latin typeface="Segoe UI"/>
+              </a:rPr>
+              <a:t>6-12 months</a:t>
+            </a:r>
+          </a:p>
+        </p:txBody>
+      </p:sp>
+      <p:sp>
+        <p:nvSpPr>
+          <p:cNvPr id="10" name="TextBox 9"/>
+          <p:cNvSpPr txBox="1"/>
+          <p:nvPr/>
+        </p:nvSpPr>
+        <p:spPr>
+          <a:xfrm>
+            <a:off x="3291840" y="4023360"/>
+            <a:ext cx="8138160" cy="822960"/>
+          </a:xfrm>
+          <a:prstGeom prst="rect">
+            <a:avLst/>
+          </a:prstGeom>
+          <a:noFill/>
+        </p:spPr>
+        <p:txBody>
+          <a:bodyPr wrap="square">
+            <a:spAutoFit/>
+          </a:bodyPr>
+          <a:lstStyle/>
+          <a:p>
+            <a:pPr algn="l">
+              <a:spcAft>
+                <a:spcPts val="600"/>
+              </a:spcAft>
+            </a:pPr>
+            <a:r>
+              <a:rPr sz="1450" b="0">
+                <a:solidFill>
+                  <a:srgbClr val="F2F6FF"/>
+                </a:solidFill>
+                <a:latin typeface="Segoe UI"/>
+              </a:rPr>
+              <a:t>Corridor deployment; night and adverse-weather models; trained three-wheeler class for local traffic</a:t>
+            </a:r>
+          </a:p>
+        </p:txBody>
+      </p:sp>
+      <p:sp>
+        <p:nvSpPr>
+          <p:cNvPr id="11" name="TextBox 10"/>
+          <p:cNvSpPr txBox="1"/>
+          <p:nvPr/>
+        </p:nvSpPr>
+        <p:spPr>
+          <a:xfrm>
+            <a:off x="822960" y="5074920"/>
+            <a:ext cx="2377440" cy="640080"/>
+          </a:xfrm>
+          <a:prstGeom prst="rect">
+            <a:avLst/>
+          </a:prstGeom>
+          <a:noFill/>
+        </p:spPr>
+        <p:txBody>
+          <a:bodyPr wrap="square">
+            <a:spAutoFit/>
+          </a:bodyPr>
+          <a:lstStyle/>
+          <a:p>
+            <a:pPr algn="l">
+              <a:spcAft>
+                <a:spcPts val="600"/>
+              </a:spcAft>
+            </a:pPr>
+            <a:r>
+              <a:rPr sz="1600" b="1">
+                <a:solidFill>
+                  <a:srgbClr val="FFC74D"/>
+                </a:solidFill>
+                <a:latin typeface="Segoe UI"/>
+              </a:rPr>
+              <a:t>Beyond</a:t>
+            </a:r>
+          </a:p>
+        </p:txBody>
+      </p:sp>
+      <p:sp>
+        <p:nvSpPr>
+          <p:cNvPr id="12" name="TextBox 11"/>
+          <p:cNvSpPr txBox="1"/>
+          <p:nvPr/>
+        </p:nvSpPr>
+        <p:spPr>
+          <a:xfrm>
+            <a:off x="3291840" y="5074920"/>
+            <a:ext cx="8138160" cy="822960"/>
+          </a:xfrm>
+          <a:prstGeom prst="rect">
+            <a:avLst/>
+          </a:prstGeom>
+          <a:noFill/>
+        </p:spPr>
+        <p:txBody>
+          <a:bodyPr wrap="square">
+            <a:spAutoFit/>
+          </a:bodyPr>
+          <a:lstStyle/>
+          <a:p>
+            <a:pPr algn="l">
+              <a:spcAft>
+                <a:spcPts val="600"/>
+              </a:spcAft>
+            </a:pPr>
+            <a:r>
+              <a:rPr sz="1450" b="0">
+                <a:solidFill>
+                  <a:srgbClr val="F2F6FF"/>
+                </a:solidFill>
+                <a:latin typeface="Segoe UI"/>
+              </a:rPr>
+              <a:t>City-wide multi-camera dashboard; vision-language models for ambiguous cases; export to comparable South Asian markets</a:t>
+            </a:r>
+          </a:p>
+        </p:txBody>
+      </p:sp>
+      <p:sp>
+        <p:nvSpPr>
+          <p:cNvPr id="13" name="TextBox 12"/>
+          <p:cNvSpPr txBox="1"/>
+          <p:nvPr/>
+        </p:nvSpPr>
+        <p:spPr>
+          <a:xfrm>
+            <a:off x="822960" y="6217920"/>
+            <a:ext cx="10607040" cy="457200"/>
+          </a:xfrm>
+          <a:prstGeom prst="rect">
+            <a:avLst/>
+          </a:prstGeom>
+          <a:noFill/>
+        </p:spPr>
+        <p:txBody>
+          <a:bodyPr wrap="square">
+            <a:spAutoFit/>
+          </a:bodyPr>
+          <a:lstStyle/>
+          <a:p>
+            <a:pPr algn="l">
+              <a:spcAft>
+                <a:spcPts val="600"/>
+              </a:spcAft>
+            </a:pPr>
+            <a:r>
+              <a:rPr sz="1400" b="1">
+                <a:solidFill>
+                  <a:srgbClr val="22D3EE"/>
+                </a:solidFill>
+                <a:latin typeface="Segoe UI"/>
+              </a:rPr>
+              <a:t>Each camera added is software only - marginal cost falls as coverage grows.</a:t>
+            </a:r>
+          </a:p>
+        </p:txBody>
+      </p:sp>
+    </p:spTree>
+  </p:cSld>
+  <p:clrMapOvr>
+    <a:masterClrMapping/>
+  </p:clrMapOvr>
+</p:sld>
+</file>
+
+<file path=ppt/slides/slide17.xml><?xml version="1.0" encoding="utf-8"?>
+<p:sld xmlns:a="http://schemas.openxmlformats.org/drawingml/2006/main" xmlns:p="http://schemas.openxmlformats.org/presentationml/2006/main" xmlns:r="http://schemas.openxmlformats.org/officeDocument/2006/relationships">
+  <p:cSld>
+    <p:bg>
+      <p:bgPr>
+        <a:solidFill>
+          <a:srgbClr val="0B1428"/>
+        </a:solidFill>
+        <a:effectLst/>
+      </p:bgPr>
+    </p:bg>
+    <p:spTree>
+      <p:nvGrpSpPr>
+        <p:cNvPr id="1" name=""/>
+        <p:cNvGrpSpPr/>
+        <p:nvPr/>
+      </p:nvGrpSpPr>
+      <p:grpSpPr/>
+      <p:sp>
+        <p:nvSpPr>
+          <p:cNvPr id="2" name="Rectangle 1"/>
+          <p:cNvSpPr/>
+          <p:nvPr/>
+        </p:nvSpPr>
+        <p:spPr>
+          <a:xfrm>
+            <a:off x="0" y="0"/>
+            <a:ext cx="12191695" cy="82296"/>
+          </a:xfrm>
+          <a:prstGeom prst="rect">
+            <a:avLst/>
+          </a:prstGeom>
+          <a:solidFill>
+            <a:srgbClr val="22D3EE"/>
+          </a:solidFill>
+          <a:ln>
+            <a:noFill/>
+          </a:ln>
+          <a:effectLst/>
+        </p:spPr>
+        <p:style>
+          <a:lnRef idx="1">
+            <a:schemeClr val="accent1"/>
+          </a:lnRef>
+          <a:fillRef idx="3">
+            <a:schemeClr val="accent1"/>
+          </a:fillRef>
+          <a:effectRef idx="2">
+            <a:schemeClr val="accent1"/>
+          </a:effectRef>
+          <a:fontRef idx="minor">
+            <a:schemeClr val="lt1"/>
+          </a:fontRef>
+        </p:style>
+        <p:txBody>
+          <a:bodyPr rtlCol="0" anchor="ctr"/>
+          <a:lstStyle/>
+          <a:p>
+            <a:pPr algn="ctr"/>
+          </a:p>
+        </p:txBody>
+      </p:sp>
+      <p:sp>
+        <p:nvSpPr>
+          <p:cNvPr id="3" name="TextBox 2"/>
+          <p:cNvSpPr txBox="1"/>
+          <p:nvPr/>
+        </p:nvSpPr>
+        <p:spPr>
+          <a:xfrm>
+            <a:off x="822960" y="2468880"/>
+            <a:ext cx="10515600" cy="1097280"/>
+          </a:xfrm>
+          <a:prstGeom prst="rect">
+            <a:avLst/>
+          </a:prstGeom>
+          <a:noFill/>
+        </p:spPr>
+        <p:txBody>
+          <a:bodyPr wrap="square">
+            <a:spAutoFit/>
+          </a:bodyPr>
+          <a:lstStyle/>
+          <a:p>
+            <a:pPr algn="l">
+              <a:spcAft>
+                <a:spcPts val="600"/>
+              </a:spcAft>
+            </a:pPr>
+            <a:r>
+              <a:rPr sz="4200" b="1">
+                <a:solidFill>
+                  <a:srgbClr val="F2F6FF"/>
+                </a:solidFill>
+                <a:latin typeface="Segoe UI"/>
+              </a:rPr>
+              <a:t>Safer roads, proven by evidence.</a:t>
+            </a:r>
+          </a:p>
+        </p:txBody>
+      </p:sp>
+      <p:sp>
+        <p:nvSpPr>
+          <p:cNvPr id="4" name="TextBox 3"/>
+          <p:cNvSpPr txBox="1"/>
+          <p:nvPr/>
+        </p:nvSpPr>
+        <p:spPr>
+          <a:xfrm>
+            <a:off x="822960" y="3657600"/>
+            <a:ext cx="10515600" cy="640080"/>
+          </a:xfrm>
+          <a:prstGeom prst="rect">
+            <a:avLst/>
+          </a:prstGeom>
+          <a:noFill/>
+        </p:spPr>
+        <p:txBody>
+          <a:bodyPr wrap="square">
+            <a:spAutoFit/>
+          </a:bodyPr>
+          <a:lstStyle/>
+          <a:p>
+            <a:pPr algn="l">
+              <a:spcAft>
+                <a:spcPts val="600"/>
+              </a:spcAft>
+            </a:pPr>
+            <a:r>
+              <a:rPr sz="1800" b="0">
+                <a:solidFill>
+                  <a:srgbClr val="22D3EE"/>
+                </a:solidFill>
+                <a:latin typeface="Segoe UI"/>
+              </a:rPr>
+              <a:t>Nine violation types. Real speed. Verified plates. Automatic challans.</a:t>
+            </a:r>
+          </a:p>
+        </p:txBody>
+      </p:sp>
+      <p:sp>
+        <p:nvSpPr>
+          <p:cNvPr id="5" name="TextBox 4"/>
+          <p:cNvSpPr txBox="1"/>
+          <p:nvPr/>
+        </p:nvSpPr>
+        <p:spPr>
+          <a:xfrm>
+            <a:off x="822960" y="4480560"/>
+            <a:ext cx="10515600" cy="548640"/>
+          </a:xfrm>
+          <a:prstGeom prst="rect">
+            <a:avLst/>
+          </a:prstGeom>
+          <a:noFill/>
+        </p:spPr>
+        <p:txBody>
+          <a:bodyPr wrap="square">
+            <a:spAutoFit/>
+          </a:bodyPr>
+          <a:lstStyle/>
+          <a:p>
+            <a:pPr algn="l">
+              <a:spcAft>
+                <a:spcPts val="600"/>
+              </a:spcAft>
+            </a:pPr>
+            <a:r>
+              <a:rPr sz="1700" b="1">
+                <a:solidFill>
+                  <a:srgbClr val="FFC74D"/>
+                </a:solidFill>
+                <a:latin typeface="Segoe UI"/>
+              </a:rPr>
+              <a:t>On cameras this country already owns.</a:t>
+            </a:r>
+          </a:p>
+        </p:txBody>
+      </p:sp>
+      <p:sp>
+        <p:nvSpPr>
+          <p:cNvPr id="6" name="TextBox 5"/>
+          <p:cNvSpPr txBox="1"/>
+          <p:nvPr/>
+        </p:nvSpPr>
+        <p:spPr>
+          <a:xfrm>
+            <a:off x="822960" y="5486400"/>
+            <a:ext cx="10515600" cy="548640"/>
+          </a:xfrm>
+          <a:prstGeom prst="rect">
+            <a:avLst/>
+          </a:prstGeom>
+          <a:noFill/>
+        </p:spPr>
+        <p:txBody>
+          <a:bodyPr wrap="square">
+            <a:spAutoFit/>
+          </a:bodyPr>
+          <a:lstStyle/>
+          <a:p>
+            <a:pPr algn="l">
+              <a:spcAft>
+                <a:spcPts val="600"/>
+              </a:spcAft>
+            </a:pPr>
+            <a:r>
+              <a:rPr sz="1300" b="0">
                 <a:solidFill>
                   <a:srgbClr val="9FB3D1"/>
                 </a:solidFill>
                 <a:latin typeface="Segoe UI"/>
               </a:rPr>
-              <a:t>github.com/Jeba-Jebarsan/AI-SMART-TRAFFIC-INTELLIGENCE</a:t>
+              <a:t>Team Three Hacks  |  github.com/Jeba-Jebarsan/AI-SMART-TRAFFIC-INTELLIGENCE</a:t>
             </a:r>
           </a:p>
         </p:txBody>
@@ -4564,7 +7797,7 @@
                 </a:solidFill>
                 <a:latin typeface="Segoe UI"/>
               </a:rPr>
-              <a:t>WHY THIS MATTERS</a:t>
+              <a:t>PROBLEM STATEMENT</a:t>
             </a:r>
           </a:p>
         </p:txBody>
@@ -4616,8 +7849,8 @@
         </p:nvSpPr>
         <p:spPr>
           <a:xfrm>
-            <a:off x="731520" y="1920240"/>
-            <a:ext cx="10607040" cy="3291840"/>
+            <a:off x="731520" y="1874519"/>
+            <a:ext cx="10607040" cy="3657600"/>
           </a:xfrm>
           <a:prstGeom prst="rect">
             <a:avLst/>
@@ -4632,11 +7865,11 @@
           <a:p>
             <a:pPr algn="l">
               <a:spcAft>
-                <a:spcPts val="1600"/>
-              </a:spcAft>
-            </a:pPr>
-            <a:r>
-              <a:rPr sz="1900" b="0">
+                <a:spcPts val="1400"/>
+              </a:spcAft>
+            </a:pPr>
+            <a:r>
+              <a:rPr sz="1850" b="0">
                 <a:solidFill>
                   <a:srgbClr val="F2F6FF"/>
                 </a:solidFill>
@@ -4645,7 +7878,7 @@
               <a:t>Sri Lanka records roughly </a:t>
             </a:r>
             <a:r>
-              <a:rPr sz="1900" b="1">
+              <a:rPr sz="1850" b="1">
                 <a:solidFill>
                   <a:srgbClr val="F2F6FF"/>
                 </a:solidFill>
@@ -4654,7 +7887,7 @@
               <a:t>3,000 road deaths a year</a:t>
             </a:r>
             <a:r>
-              <a:rPr sz="1900" b="0">
+              <a:rPr sz="1850" b="0">
                 <a:solidFill>
                   <a:srgbClr val="F2F6FF"/>
                 </a:solidFill>
@@ -4666,27 +7899,45 @@
           <a:p>
             <a:pPr algn="l">
               <a:spcAft>
-                <a:spcPts val="1600"/>
-              </a:spcAft>
-            </a:pPr>
-            <a:r>
-              <a:rPr sz="1900" b="0">
-                <a:solidFill>
-                  <a:srgbClr val="F2F6FF"/>
-                </a:solidFill>
-                <a:latin typeface="Segoe UI"/>
-              </a:rPr>
-              <a:t>Officers cannot watch every junction, 24 hours a day.</a:t>
-            </a:r>
-          </a:p>
-          <a:p>
-            <a:pPr algn="l">
-              <a:spcAft>
-                <a:spcPts val="1600"/>
-              </a:spcAft>
-            </a:pPr>
-            <a:r>
-              <a:rPr sz="1900" b="0">
+                <a:spcPts val="1400"/>
+              </a:spcAft>
+            </a:pPr>
+            <a:r>
+              <a:rPr sz="1850" b="0">
+                <a:solidFill>
+                  <a:srgbClr val="F2F6FF"/>
+                </a:solidFill>
+                <a:latin typeface="Segoe UI"/>
+              </a:rPr>
+              <a:t>Officers cannot watch every junction, 24 hours a day - enforcement is a </a:t>
+            </a:r>
+            <a:r>
+              <a:rPr sz="1850" b="1">
+                <a:solidFill>
+                  <a:srgbClr val="F2F6FF"/>
+                </a:solidFill>
+                <a:latin typeface="Segoe UI"/>
+              </a:rPr>
+              <a:t>human bottleneck</a:t>
+            </a:r>
+            <a:r>
+              <a:rPr sz="1850" b="0">
+                <a:solidFill>
+                  <a:srgbClr val="F2F6FF"/>
+                </a:solidFill>
+                <a:latin typeface="Segoe UI"/>
+              </a:rPr>
+              <a:t>.</a:t>
+            </a:r>
+          </a:p>
+          <a:p>
+            <a:pPr algn="l">
+              <a:spcAft>
+                <a:spcPts val="1400"/>
+              </a:spcAft>
+            </a:pPr>
+            <a:r>
+              <a:rPr sz="1850" b="0">
                 <a:solidFill>
                   <a:srgbClr val="F2F6FF"/>
                 </a:solidFill>
@@ -4695,7 +7946,7 @@
               <a:t>Violations recorded </a:t>
             </a:r>
             <a:r>
-              <a:rPr sz="1900" b="1">
+              <a:rPr sz="1850" b="1">
                 <a:solidFill>
                   <a:srgbClr val="F2F6FF"/>
                 </a:solidFill>
@@ -4704,29 +7955,47 @@
               <a:t>without photographic proof or a verified plate</a:t>
             </a:r>
             <a:r>
-              <a:rPr sz="1900" b="0">
-                <a:solidFill>
-                  <a:srgbClr val="F2F6FF"/>
-                </a:solidFill>
-                <a:latin typeface="Segoe UI"/>
-              </a:rPr>
-              <a:t> are disputed and unpaid.</a:t>
-            </a:r>
-          </a:p>
-          <a:p>
-            <a:pPr algn="l">
-              <a:spcAft>
-                <a:spcPts val="1600"/>
-              </a:spcAft>
-            </a:pPr>
-            <a:r>
-              <a:rPr sz="1900" b="0">
-                <a:solidFill>
-                  <a:srgbClr val="F2F6FF"/>
-                </a:solidFill>
-                <a:latin typeface="Segoe UI"/>
-              </a:rPr>
-              <a:t>No searchable record means repeat offenders go unnoticed.</a:t>
+              <a:rPr sz="1850" b="0">
+                <a:solidFill>
+                  <a:srgbClr val="F2F6FF"/>
+                </a:solidFill>
+                <a:latin typeface="Segoe UI"/>
+              </a:rPr>
+              <a:t> are disputed and go unpaid.</a:t>
+            </a:r>
+          </a:p>
+          <a:p>
+            <a:pPr algn="l">
+              <a:spcAft>
+                <a:spcPts val="1400"/>
+              </a:spcAft>
+            </a:pPr>
+            <a:r>
+              <a:rPr sz="1850" b="0">
+                <a:solidFill>
+                  <a:srgbClr val="F2F6FF"/>
+                </a:solidFill>
+                <a:latin typeface="Segoe UI"/>
+              </a:rPr>
+              <a:t>No searchable record means </a:t>
+            </a:r>
+            <a:r>
+              <a:rPr sz="1850" b="1">
+                <a:solidFill>
+                  <a:srgbClr val="F2F6FF"/>
+                </a:solidFill>
+                <a:latin typeface="Segoe UI"/>
+              </a:rPr>
+              <a:t>repeat offenders go unnoticed</a:t>
+            </a:r>
+            <a:r>
+              <a:rPr sz="1850" b="0">
+                <a:solidFill>
+                  <a:srgbClr val="F2F6FF"/>
+                </a:solidFill>
+                <a:latin typeface="Segoe UI"/>
+              </a:rPr>
+              <a:t>.</a:t>
             </a:r>
           </a:p>
         </p:txBody>
@@ -4874,7 +8143,7 @@
                 </a:solidFill>
                 <a:latin typeface="Segoe UI"/>
               </a:rPr>
-              <a:t>THE SOLUTION</a:t>
+              <a:t>WHY NOW</a:t>
             </a:r>
           </a:p>
         </p:txBody>
@@ -4913,21 +8182,67 @@
                 </a:solidFill>
                 <a:latin typeface="Segoe UI"/>
               </a:rPr>
-              <a:t>What we built</a:t>
-            </a:r>
-          </a:p>
-        </p:txBody>
-      </p:sp>
-      <p:sp>
-        <p:nvSpPr>
-          <p:cNvPr id="5" name="TextBox 4"/>
+              <a:t>The opportunity</a:t>
+            </a:r>
+          </a:p>
+        </p:txBody>
+      </p:sp>
+      <p:sp>
+        <p:nvSpPr>
+          <p:cNvPr id="5" name="Rectangle 4"/>
+          <p:cNvSpPr/>
+          <p:nvPr/>
+        </p:nvSpPr>
+        <p:spPr>
+          <a:xfrm>
+            <a:off x="731520" y="1828800"/>
+            <a:ext cx="5212080" cy="3931920"/>
+          </a:xfrm>
+          <a:prstGeom prst="rect">
+            <a:avLst/>
+          </a:prstGeom>
+          <a:solidFill>
+            <a:srgbClr val="111E3D"/>
+          </a:solidFill>
+          <a:ln>
+            <a:solidFill>
+              <a:srgbClr val="0B1428"/>
+            </a:solidFill>
+          </a:ln>
+          <a:effectLst/>
+        </p:spPr>
+        <p:style>
+          <a:lnRef idx="1">
+            <a:schemeClr val="accent1"/>
+          </a:lnRef>
+          <a:fillRef idx="3">
+            <a:schemeClr val="accent1"/>
+          </a:fillRef>
+          <a:effectRef idx="2">
+            <a:schemeClr val="accent1"/>
+          </a:effectRef>
+          <a:fontRef idx="minor">
+            <a:schemeClr val="lt1"/>
+          </a:fontRef>
+        </p:style>
+        <p:txBody>
+          <a:bodyPr rtlCol="0" anchor="ctr"/>
+          <a:lstStyle/>
+          <a:p>
+            <a:pPr algn="ctr"/>
+          </a:p>
+        </p:txBody>
+      </p:sp>
+      <p:sp>
+        <p:nvSpPr>
+          <p:cNvPr id="6" name="TextBox 5"/>
           <p:cNvSpPr txBox="1"/>
           <p:nvPr/>
         </p:nvSpPr>
         <p:spPr>
           <a:xfrm>
-            <a:off x="731520" y="1874519"/>
-            <a:ext cx="10607040" cy="2926080"/>
+            <a:off x="1005840" y="2029968"/>
+            <a:ext cx="4663440" cy="457200"/>
           </a:xfrm>
           <a:prstGeom prst="rect">
             <a:avLst/>
@@ -4942,151 +8257,31 @@
           <a:p>
             <a:pPr algn="l">
               <a:spcAft>
-                <a:spcPts val="1500"/>
-              </a:spcAft>
-            </a:pPr>
-            <a:r>
-              <a:rPr sz="1900" b="0">
-                <a:solidFill>
-                  <a:srgbClr val="F2F6FF"/>
-                </a:solidFill>
-                <a:latin typeface="Segoe UI"/>
-              </a:rPr>
-              <a:t>One AI pipeline on an ordinary camera detects </a:t>
-            </a:r>
-            <a:r>
-              <a:rPr sz="1900" b="1">
-                <a:solidFill>
-                  <a:srgbClr val="F2F6FF"/>
-                </a:solidFill>
-                <a:latin typeface="Segoe UI"/>
-              </a:rPr>
-              <a:t>nine violation types</a:t>
-            </a:r>
-            <a:r>
-              <a:rPr sz="1900" b="0">
-                <a:solidFill>
-                  <a:srgbClr val="F2F6FF"/>
-                </a:solidFill>
-                <a:latin typeface="Segoe UI"/>
-              </a:rPr>
-              <a:t>.</a:t>
-            </a:r>
-          </a:p>
-          <a:p>
-            <a:pPr algn="l">
-              <a:spcAft>
-                <a:spcPts val="1500"/>
-              </a:spcAft>
-            </a:pPr>
-            <a:r>
-              <a:rPr sz="1900" b="0">
-                <a:solidFill>
-                  <a:srgbClr val="F2F6FF"/>
-                </a:solidFill>
-                <a:latin typeface="Segoe UI"/>
-              </a:rPr>
-              <a:t>Reads </a:t>
-            </a:r>
-            <a:r>
-              <a:rPr sz="1900" b="1">
-                <a:solidFill>
-                  <a:srgbClr val="F2F6FF"/>
-                </a:solidFill>
-                <a:latin typeface="Segoe UI"/>
-              </a:rPr>
-              <a:t>number plates on every vehicle</a:t>
-            </a:r>
-            <a:r>
-              <a:rPr sz="1900" b="0">
-                <a:solidFill>
-                  <a:srgbClr val="F2F6FF"/>
-                </a:solidFill>
-                <a:latin typeface="Segoe UI"/>
-              </a:rPr>
-              <a:t>, not only offenders.</a:t>
-            </a:r>
-          </a:p>
-          <a:p>
-            <a:pPr algn="l">
-              <a:spcAft>
-                <a:spcPts val="1500"/>
-              </a:spcAft>
-            </a:pPr>
-            <a:r>
-              <a:rPr sz="1900" b="0">
-                <a:solidFill>
-                  <a:srgbClr val="F2F6FF"/>
-                </a:solidFill>
-                <a:latin typeface="Segoe UI"/>
-              </a:rPr>
-              <a:t>Measures </a:t>
-            </a:r>
-            <a:r>
-              <a:rPr sz="1900" b="1">
-                <a:solidFill>
-                  <a:srgbClr val="F2F6FF"/>
-                </a:solidFill>
-                <a:latin typeface="Segoe UI"/>
-              </a:rPr>
-              <a:t>real speed</a:t>
-            </a:r>
-            <a:r>
-              <a:rPr sz="1900" b="0">
-                <a:solidFill>
-                  <a:srgbClr val="F2F6FF"/>
-                </a:solidFill>
-                <a:latin typeface="Segoe UI"/>
-              </a:rPr>
-              <a:t> through per-camera geometric calibration.</a:t>
-            </a:r>
-          </a:p>
-          <a:p>
-            <a:pPr algn="l">
-              <a:spcAft>
-                <a:spcPts val="1500"/>
-              </a:spcAft>
-            </a:pPr>
-            <a:r>
-              <a:rPr sz="1900" b="0">
-                <a:solidFill>
-                  <a:srgbClr val="F2F6FF"/>
-                </a:solidFill>
-                <a:latin typeface="Segoe UI"/>
-              </a:rPr>
-              <a:t>Generates an </a:t>
-            </a:r>
-            <a:r>
-              <a:rPr sz="1900" b="1">
-                <a:solidFill>
-                  <a:srgbClr val="F2F6FF"/>
-                </a:solidFill>
-                <a:latin typeface="Segoe UI"/>
-              </a:rPr>
-              <a:t>e-challan with stamped photographic evidence</a:t>
-            </a:r>
-            <a:r>
-              <a:rPr sz="1900" b="0">
-                <a:solidFill>
-                  <a:srgbClr val="F2F6FF"/>
-                </a:solidFill>
-                <a:latin typeface="Segoe UI"/>
-              </a:rPr>
-              <a:t>, delivered to police.</a:t>
-            </a:r>
-          </a:p>
-        </p:txBody>
-      </p:sp>
-      <p:sp>
-        <p:nvSpPr>
-          <p:cNvPr id="6" name="TextBox 5"/>
+                <a:spcPts val="600"/>
+              </a:spcAft>
+            </a:pPr>
+            <a:r>
+              <a:rPr sz="1700" b="1">
+                <a:solidFill>
+                  <a:srgbClr val="22D3EE"/>
+                </a:solidFill>
+                <a:latin typeface="Segoe UI"/>
+              </a:rPr>
+              <a:t>What already exists</a:t>
+            </a:r>
+          </a:p>
+        </p:txBody>
+      </p:sp>
+      <p:sp>
+        <p:nvSpPr>
+          <p:cNvPr id="7" name="TextBox 6"/>
           <p:cNvSpPr txBox="1"/>
           <p:nvPr/>
         </p:nvSpPr>
         <p:spPr>
           <a:xfrm>
-            <a:off x="731520" y="5029200"/>
-            <a:ext cx="10607040" cy="822960"/>
+            <a:off x="1005840" y="2606040"/>
+            <a:ext cx="4663440" cy="2926080"/>
           </a:xfrm>
           <a:prstGeom prst="rect">
             <a:avLst/>
@@ -5101,17 +8296,280 @@
           <a:p>
             <a:pPr algn="l">
               <a:spcAft>
+                <a:spcPts val="1000"/>
+              </a:spcAft>
+            </a:pPr>
+            <a:r>
+              <a:rPr sz="1350" b="0">
+                <a:solidFill>
+                  <a:srgbClr val="F2F6FF"/>
+                </a:solidFill>
+                <a:latin typeface="Segoe UI"/>
+              </a:rPr>
+              <a:t>Colombo alone has </a:t>
+            </a:r>
+            <a:r>
+              <a:rPr sz="1350" b="1">
+                <a:solidFill>
+                  <a:srgbClr val="F2F6FF"/>
+                </a:solidFill>
+                <a:latin typeface="Segoe UI"/>
+              </a:rPr>
+              <a:t>over 100 road cameras</a:t>
+            </a:r>
+            <a:r>
+              <a:rPr sz="1350" b="0">
+                <a:solidFill>
+                  <a:srgbClr val="F2F6FF"/>
+                </a:solidFill>
+                <a:latin typeface="Segoe UI"/>
+              </a:rPr>
+              <a:t> already installed.</a:t>
+            </a:r>
+          </a:p>
+          <a:p>
+            <a:pPr algn="l">
+              <a:spcAft>
+                <a:spcPts val="1000"/>
+              </a:spcAft>
+            </a:pPr>
+            <a:r>
+              <a:rPr sz="1350" b="0">
+                <a:solidFill>
+                  <a:srgbClr val="F2F6FF"/>
+                </a:solidFill>
+                <a:latin typeface="Segoe UI"/>
+              </a:rPr>
+              <a:t>Police already issue spot fines - the legal framework is in place.</a:t>
+            </a:r>
+          </a:p>
+          <a:p>
+            <a:pPr algn="l">
+              <a:spcAft>
+                <a:spcPts val="1000"/>
+              </a:spcAft>
+            </a:pPr>
+            <a:r>
+              <a:rPr sz="1350" b="0">
+                <a:solidFill>
+                  <a:srgbClr val="F2F6FF"/>
+                </a:solidFill>
+                <a:latin typeface="Segoe UI"/>
+              </a:rPr>
+              <a:t>Smartphones and drones make any road coverable today.</a:t>
+            </a:r>
+          </a:p>
+        </p:txBody>
+      </p:sp>
+      <p:sp>
+        <p:nvSpPr>
+          <p:cNvPr id="8" name="Rectangle 7"/>
+          <p:cNvSpPr/>
+          <p:nvPr/>
+        </p:nvSpPr>
+        <p:spPr>
+          <a:xfrm>
+            <a:off x="6309359" y="1828800"/>
+            <a:ext cx="5212080" cy="3931920"/>
+          </a:xfrm>
+          <a:prstGeom prst="rect">
+            <a:avLst/>
+          </a:prstGeom>
+          <a:solidFill>
+            <a:srgbClr val="111E3D"/>
+          </a:solidFill>
+          <a:ln>
+            <a:solidFill>
+              <a:srgbClr val="0B1428"/>
+            </a:solidFill>
+          </a:ln>
+          <a:effectLst/>
+        </p:spPr>
+        <p:style>
+          <a:lnRef idx="1">
+            <a:schemeClr val="accent1"/>
+          </a:lnRef>
+          <a:fillRef idx="3">
+            <a:schemeClr val="accent1"/>
+          </a:fillRef>
+          <a:effectRef idx="2">
+            <a:schemeClr val="accent1"/>
+          </a:effectRef>
+          <a:fontRef idx="minor">
+            <a:schemeClr val="lt1"/>
+          </a:fontRef>
+        </p:style>
+        <p:txBody>
+          <a:bodyPr rtlCol="0" anchor="ctr"/>
+          <a:lstStyle/>
+          <a:p>
+            <a:pPr algn="ctr"/>
+          </a:p>
+        </p:txBody>
+      </p:sp>
+      <p:sp>
+        <p:nvSpPr>
+          <p:cNvPr id="9" name="TextBox 8"/>
+          <p:cNvSpPr txBox="1"/>
+          <p:nvPr/>
+        </p:nvSpPr>
+        <p:spPr>
+          <a:xfrm>
+            <a:off x="6583679" y="2029968"/>
+            <a:ext cx="4663440" cy="457200"/>
+          </a:xfrm>
+          <a:prstGeom prst="rect">
+            <a:avLst/>
+          </a:prstGeom>
+          <a:noFill/>
+        </p:spPr>
+        <p:txBody>
+          <a:bodyPr wrap="square">
+            <a:spAutoFit/>
+          </a:bodyPr>
+          <a:lstStyle/>
+          <a:p>
+            <a:pPr algn="l">
+              <a:spcAft>
                 <a:spcPts val="600"/>
               </a:spcAft>
             </a:pPr>
             <a:r>
-              <a:rPr sz="1500" b="1">
+              <a:rPr sz="1700" b="1">
                 <a:solidFill>
                   <a:srgbClr val="22D3EE"/>
                 </a:solidFill>
                 <a:latin typeface="Segoe UI"/>
               </a:rPr>
-              <a:t>Camera  -&gt;  YOLOv8s  -&gt;  ByteTrack  -&gt;  Homography  -&gt;  Violation engine  -&gt;  ANPR  -&gt;  e-Challan</a:t>
+              <a:t>What is missing</a:t>
+            </a:r>
+          </a:p>
+        </p:txBody>
+      </p:sp>
+      <p:sp>
+        <p:nvSpPr>
+          <p:cNvPr id="10" name="TextBox 9"/>
+          <p:cNvSpPr txBox="1"/>
+          <p:nvPr/>
+        </p:nvSpPr>
+        <p:spPr>
+          <a:xfrm>
+            <a:off x="6583679" y="2606040"/>
+            <a:ext cx="4663440" cy="2926080"/>
+          </a:xfrm>
+          <a:prstGeom prst="rect">
+            <a:avLst/>
+          </a:prstGeom>
+          <a:noFill/>
+        </p:spPr>
+        <p:txBody>
+          <a:bodyPr wrap="square">
+            <a:spAutoFit/>
+          </a:bodyPr>
+          <a:lstStyle/>
+          <a:p>
+            <a:pPr algn="l">
+              <a:spcAft>
+                <a:spcPts val="1000"/>
+              </a:spcAft>
+            </a:pPr>
+            <a:r>
+              <a:rPr sz="1350" b="0">
+                <a:solidFill>
+                  <a:srgbClr val="F2F6FF"/>
+                </a:solidFill>
+                <a:latin typeface="Segoe UI"/>
+              </a:rPr>
+              <a:t>Those cameras are </a:t>
+            </a:r>
+            <a:r>
+              <a:rPr sz="1350" b="1">
+                <a:solidFill>
+                  <a:srgbClr val="F2F6FF"/>
+                </a:solidFill>
+                <a:latin typeface="Segoe UI"/>
+              </a:rPr>
+              <a:t>watched by people, or not at all</a:t>
+            </a:r>
+            <a:r>
+              <a:rPr sz="1350" b="0">
+                <a:solidFill>
+                  <a:srgbClr val="F2F6FF"/>
+                </a:solidFill>
+                <a:latin typeface="Segoe UI"/>
+              </a:rPr>
+              <a:t>.</a:t>
+            </a:r>
+          </a:p>
+          <a:p>
+            <a:pPr algn="l">
+              <a:spcAft>
+                <a:spcPts val="1000"/>
+              </a:spcAft>
+            </a:pPr>
+            <a:r>
+              <a:rPr sz="1350" b="0">
+                <a:solidFill>
+                  <a:srgbClr val="F2F6FF"/>
+                </a:solidFill>
+                <a:latin typeface="Segoe UI"/>
+              </a:rPr>
+              <a:t>No automatic link from camera to challan to payment.</a:t>
+            </a:r>
+          </a:p>
+          <a:p>
+            <a:pPr algn="l">
+              <a:spcAft>
+                <a:spcPts val="1000"/>
+              </a:spcAft>
+            </a:pPr>
+            <a:r>
+              <a:rPr sz="1350" b="0">
+                <a:solidFill>
+                  <a:srgbClr val="F2F6FF"/>
+                </a:solidFill>
+                <a:latin typeface="Segoe UI"/>
+              </a:rPr>
+              <a:t>Enforcement scales with headcount, not with technology.</a:t>
+            </a:r>
+          </a:p>
+        </p:txBody>
+      </p:sp>
+      <p:sp>
+        <p:nvSpPr>
+          <p:cNvPr id="11" name="TextBox 10"/>
+          <p:cNvSpPr txBox="1"/>
+          <p:nvPr/>
+        </p:nvSpPr>
+        <p:spPr>
+          <a:xfrm>
+            <a:off x="731520" y="5943600"/>
+            <a:ext cx="10607040" cy="548640"/>
+          </a:xfrm>
+          <a:prstGeom prst="rect">
+            <a:avLst/>
+          </a:prstGeom>
+          <a:noFill/>
+        </p:spPr>
+        <p:txBody>
+          <a:bodyPr wrap="square">
+            <a:spAutoFit/>
+          </a:bodyPr>
+          <a:lstStyle/>
+          <a:p>
+            <a:pPr algn="ctr">
+              <a:spcAft>
+                <a:spcPts val="600"/>
+              </a:spcAft>
+            </a:pPr>
+            <a:r>
+              <a:rPr sz="1600" b="1">
+                <a:solidFill>
+                  <a:srgbClr val="FFC74D"/>
+                </a:solidFill>
+                <a:latin typeface="Segoe UI"/>
+              </a:rPr>
+              <a:t>We do not need new cameras. We need intelligence behind the ones already there.</a:t>
             </a:r>
           </a:p>
         </p:txBody>
@@ -5220,7 +8678,7 @@
                 </a:solidFill>
                 <a:latin typeface="Segoe UI"/>
               </a:rPr>
-              <a:t>CAPABILITY</a:t>
+              <a:t>THE PRODUCT</a:t>
             </a:r>
           </a:p>
         </p:txBody>
@@ -5259,54 +8717,167 @@
                 </a:solidFill>
                 <a:latin typeface="Segoe UI"/>
               </a:rPr>
-              <a:t>Nine violations, one pipeline</a:t>
-            </a:r>
-          </a:p>
-        </p:txBody>
-      </p:sp>
-      <p:sp>
-        <p:nvSpPr>
-          <p:cNvPr id="5" name="Rectangle 4"/>
-          <p:cNvSpPr/>
-          <p:nvPr/>
-        </p:nvSpPr>
-        <p:spPr>
-          <a:xfrm>
-            <a:off x="731520" y="2011680"/>
-            <a:ext cx="3383280" cy="914400"/>
-          </a:xfrm>
-          <a:prstGeom prst="rect">
-            <a:avLst/>
-          </a:prstGeom>
-          <a:solidFill>
-            <a:srgbClr val="111E3D"/>
-          </a:solidFill>
-          <a:ln>
-            <a:solidFill>
-              <a:srgbClr val="294A8F"/>
-            </a:solidFill>
-          </a:ln>
-          <a:effectLst/>
-        </p:spPr>
-        <p:style>
-          <a:lnRef idx="1">
-            <a:schemeClr val="accent1"/>
-          </a:lnRef>
-          <a:fillRef idx="3">
-            <a:schemeClr val="accent1"/>
-          </a:fillRef>
-          <a:effectRef idx="2">
-            <a:schemeClr val="accent1"/>
-          </a:effectRef>
-          <a:fontRef idx="minor">
-            <a:schemeClr val="lt1"/>
-          </a:fontRef>
-        </p:style>
-        <p:txBody>
-          <a:bodyPr rtlCol="0" anchor="ctr"/>
-          <a:lstStyle/>
-          <a:p>
-            <a:pPr algn="ctr"/>
+              <a:t>Our solution</a:t>
+            </a:r>
+          </a:p>
+        </p:txBody>
+      </p:sp>
+      <p:sp>
+        <p:nvSpPr>
+          <p:cNvPr id="5" name="TextBox 4"/>
+          <p:cNvSpPr txBox="1"/>
+          <p:nvPr/>
+        </p:nvSpPr>
+        <p:spPr>
+          <a:xfrm>
+            <a:off x="731520" y="1874519"/>
+            <a:ext cx="10607040" cy="3657600"/>
+          </a:xfrm>
+          <a:prstGeom prst="rect">
+            <a:avLst/>
+          </a:prstGeom>
+          <a:noFill/>
+        </p:spPr>
+        <p:txBody>
+          <a:bodyPr wrap="square">
+            <a:spAutoFit/>
+          </a:bodyPr>
+          <a:lstStyle/>
+          <a:p>
+            <a:pPr algn="l">
+              <a:spcAft>
+                <a:spcPts val="1400"/>
+              </a:spcAft>
+            </a:pPr>
+            <a:r>
+              <a:rPr sz="1800" b="0">
+                <a:solidFill>
+                  <a:srgbClr val="F2F6FF"/>
+                </a:solidFill>
+                <a:latin typeface="Segoe UI"/>
+              </a:rPr>
+              <a:t>One AI pipeline on an ordinary camera detects </a:t>
+            </a:r>
+            <a:r>
+              <a:rPr sz="1800" b="1">
+                <a:solidFill>
+                  <a:srgbClr val="F2F6FF"/>
+                </a:solidFill>
+                <a:latin typeface="Segoe UI"/>
+              </a:rPr>
+              <a:t>nine violation types</a:t>
+            </a:r>
+            <a:r>
+              <a:rPr sz="1800" b="0">
+                <a:solidFill>
+                  <a:srgbClr val="F2F6FF"/>
+                </a:solidFill>
+                <a:latin typeface="Segoe UI"/>
+              </a:rPr>
+              <a:t>.</a:t>
+            </a:r>
+          </a:p>
+          <a:p>
+            <a:pPr algn="l">
+              <a:spcAft>
+                <a:spcPts val="1400"/>
+              </a:spcAft>
+            </a:pPr>
+            <a:r>
+              <a:rPr sz="1800" b="0">
+                <a:solidFill>
+                  <a:srgbClr val="F2F6FF"/>
+                </a:solidFill>
+                <a:latin typeface="Segoe UI"/>
+              </a:rPr>
+              <a:t>Reads </a:t>
+            </a:r>
+            <a:r>
+              <a:rPr sz="1800" b="1">
+                <a:solidFill>
+                  <a:srgbClr val="F2F6FF"/>
+                </a:solidFill>
+                <a:latin typeface="Segoe UI"/>
+              </a:rPr>
+              <a:t>number plates on every vehicle</a:t>
+            </a:r>
+            <a:r>
+              <a:rPr sz="1800" b="0">
+                <a:solidFill>
+                  <a:srgbClr val="F2F6FF"/>
+                </a:solidFill>
+                <a:latin typeface="Segoe UI"/>
+              </a:rPr>
+              <a:t>, not only offenders.</a:t>
+            </a:r>
+          </a:p>
+          <a:p>
+            <a:pPr algn="l">
+              <a:spcAft>
+                <a:spcPts val="1400"/>
+              </a:spcAft>
+            </a:pPr>
+            <a:r>
+              <a:rPr sz="1800" b="0">
+                <a:solidFill>
+                  <a:srgbClr val="F2F6FF"/>
+                </a:solidFill>
+                <a:latin typeface="Segoe UI"/>
+              </a:rPr>
+              <a:t>Measures </a:t>
+            </a:r>
+            <a:r>
+              <a:rPr sz="1800" b="1">
+                <a:solidFill>
+                  <a:srgbClr val="F2F6FF"/>
+                </a:solidFill>
+                <a:latin typeface="Segoe UI"/>
+              </a:rPr>
+              <a:t>real road speed</a:t>
+            </a:r>
+            <a:r>
+              <a:rPr sz="1800" b="0">
+                <a:solidFill>
+                  <a:srgbClr val="F2F6FF"/>
+                </a:solidFill>
+                <a:latin typeface="Segoe UI"/>
+              </a:rPr>
+              <a:t> through geometric calibration.</a:t>
+            </a:r>
+          </a:p>
+          <a:p>
+            <a:pPr algn="l">
+              <a:spcAft>
+                <a:spcPts val="1400"/>
+              </a:spcAft>
+            </a:pPr>
+            <a:r>
+              <a:rPr sz="1800" b="0">
+                <a:solidFill>
+                  <a:srgbClr val="F2F6FF"/>
+                </a:solidFill>
+                <a:latin typeface="Segoe UI"/>
+              </a:rPr>
+              <a:t>Issues an </a:t>
+            </a:r>
+            <a:r>
+              <a:rPr sz="1800" b="1">
+                <a:solidFill>
+                  <a:srgbClr val="F2F6FF"/>
+                </a:solidFill>
+                <a:latin typeface="Segoe UI"/>
+              </a:rPr>
+              <a:t>e-challan with stamped photographic evidence</a:t>
+            </a:r>
+            <a:r>
+              <a:rPr sz="1800" b="0">
+                <a:solidFill>
+                  <a:srgbClr val="F2F6FF"/>
+                </a:solidFill>
+                <a:latin typeface="Segoe UI"/>
+              </a:rPr>
+              <a:t>, delivered to the police automatically.</a:t>
+            </a:r>
           </a:p>
         </p:txBody>
       </p:sp>
@@ -5318,8 +8889,8 @@
         </p:nvSpPr>
         <p:spPr>
           <a:xfrm>
-            <a:off x="731520" y="2267712"/>
-            <a:ext cx="3383280" cy="457200"/>
+            <a:off x="731520" y="5120640"/>
+            <a:ext cx="10607040" cy="822960"/>
           </a:xfrm>
           <a:prstGeom prst="rect">
             <a:avLst/>
@@ -5332,738 +8903,19 @@
           </a:bodyPr>
           <a:lstStyle/>
           <a:p>
-            <a:pPr algn="ctr">
+            <a:pPr algn="l">
               <a:spcAft>
                 <a:spcPts val="600"/>
               </a:spcAft>
             </a:pPr>
             <a:r>
-              <a:rPr sz="1700" b="1">
-                <a:solidFill>
-                  <a:srgbClr val="F2F6FF"/>
-                </a:solidFill>
-                <a:latin typeface="Segoe UI"/>
-              </a:rPr>
-              <a:t>No Helmet</a:t>
-            </a:r>
-          </a:p>
-        </p:txBody>
-      </p:sp>
-      <p:sp>
-        <p:nvSpPr>
-          <p:cNvPr id="7" name="Rectangle 6"/>
-          <p:cNvSpPr/>
-          <p:nvPr/>
-        </p:nvSpPr>
-        <p:spPr>
-          <a:xfrm>
-            <a:off x="4389120" y="2011680"/>
-            <a:ext cx="3383280" cy="914400"/>
-          </a:xfrm>
-          <a:prstGeom prst="rect">
-            <a:avLst/>
-          </a:prstGeom>
-          <a:solidFill>
-            <a:srgbClr val="111E3D"/>
-          </a:solidFill>
-          <a:ln>
-            <a:solidFill>
-              <a:srgbClr val="294A8F"/>
-            </a:solidFill>
-          </a:ln>
-          <a:effectLst/>
-        </p:spPr>
-        <p:style>
-          <a:lnRef idx="1">
-            <a:schemeClr val="accent1"/>
-          </a:lnRef>
-          <a:fillRef idx="3">
-            <a:schemeClr val="accent1"/>
-          </a:fillRef>
-          <a:effectRef idx="2">
-            <a:schemeClr val="accent1"/>
-          </a:effectRef>
-          <a:fontRef idx="minor">
-            <a:schemeClr val="lt1"/>
-          </a:fontRef>
-        </p:style>
-        <p:txBody>
-          <a:bodyPr rtlCol="0" anchor="ctr"/>
-          <a:lstStyle/>
-          <a:p>
-            <a:pPr algn="ctr"/>
-          </a:p>
-        </p:txBody>
-      </p:sp>
-      <p:sp>
-        <p:nvSpPr>
-          <p:cNvPr id="8" name="TextBox 7"/>
-          <p:cNvSpPr txBox="1"/>
-          <p:nvPr/>
-        </p:nvSpPr>
-        <p:spPr>
-          <a:xfrm>
-            <a:off x="4389120" y="2267712"/>
-            <a:ext cx="3383280" cy="457200"/>
-          </a:xfrm>
-          <a:prstGeom prst="rect">
-            <a:avLst/>
-          </a:prstGeom>
-          <a:noFill/>
-        </p:spPr>
-        <p:txBody>
-          <a:bodyPr wrap="square">
-            <a:spAutoFit/>
-          </a:bodyPr>
-          <a:lstStyle/>
-          <a:p>
-            <a:pPr algn="ctr">
-              <a:spcAft>
-                <a:spcPts val="600"/>
-              </a:spcAft>
-            </a:pPr>
-            <a:r>
-              <a:rPr sz="1700" b="1">
-                <a:solidFill>
-                  <a:srgbClr val="F2F6FF"/>
-                </a:solidFill>
-                <a:latin typeface="Segoe UI"/>
-              </a:rPr>
-              <a:t>Triple Riding</a:t>
-            </a:r>
-          </a:p>
-        </p:txBody>
-      </p:sp>
-      <p:sp>
-        <p:nvSpPr>
-          <p:cNvPr id="9" name="Rectangle 8"/>
-          <p:cNvSpPr/>
-          <p:nvPr/>
-        </p:nvSpPr>
-        <p:spPr>
-          <a:xfrm>
-            <a:off x="8046720" y="2011680"/>
-            <a:ext cx="3383280" cy="914400"/>
-          </a:xfrm>
-          <a:prstGeom prst="rect">
-            <a:avLst/>
-          </a:prstGeom>
-          <a:solidFill>
-            <a:srgbClr val="111E3D"/>
-          </a:solidFill>
-          <a:ln>
-            <a:solidFill>
-              <a:srgbClr val="294A8F"/>
-            </a:solidFill>
-          </a:ln>
-          <a:effectLst/>
-        </p:spPr>
-        <p:style>
-          <a:lnRef idx="1">
-            <a:schemeClr val="accent1"/>
-          </a:lnRef>
-          <a:fillRef idx="3">
-            <a:schemeClr val="accent1"/>
-          </a:fillRef>
-          <a:effectRef idx="2">
-            <a:schemeClr val="accent1"/>
-          </a:effectRef>
-          <a:fontRef idx="minor">
-            <a:schemeClr val="lt1"/>
-          </a:fontRef>
-        </p:style>
-        <p:txBody>
-          <a:bodyPr rtlCol="0" anchor="ctr"/>
-          <a:lstStyle/>
-          <a:p>
-            <a:pPr algn="ctr"/>
-          </a:p>
-        </p:txBody>
-      </p:sp>
-      <p:sp>
-        <p:nvSpPr>
-          <p:cNvPr id="10" name="TextBox 9"/>
-          <p:cNvSpPr txBox="1"/>
-          <p:nvPr/>
-        </p:nvSpPr>
-        <p:spPr>
-          <a:xfrm>
-            <a:off x="8046720" y="2267712"/>
-            <a:ext cx="3383280" cy="457200"/>
-          </a:xfrm>
-          <a:prstGeom prst="rect">
-            <a:avLst/>
-          </a:prstGeom>
-          <a:noFill/>
-        </p:spPr>
-        <p:txBody>
-          <a:bodyPr wrap="square">
-            <a:spAutoFit/>
-          </a:bodyPr>
-          <a:lstStyle/>
-          <a:p>
-            <a:pPr algn="ctr">
-              <a:spcAft>
-                <a:spcPts val="600"/>
-              </a:spcAft>
-            </a:pPr>
-            <a:r>
-              <a:rPr sz="1700" b="1">
-                <a:solidFill>
-                  <a:srgbClr val="F2F6FF"/>
-                </a:solidFill>
-                <a:latin typeface="Segoe UI"/>
-              </a:rPr>
-              <a:t>Over Speeding</a:t>
-            </a:r>
-          </a:p>
-        </p:txBody>
-      </p:sp>
-      <p:sp>
-        <p:nvSpPr>
-          <p:cNvPr id="11" name="Rectangle 10"/>
-          <p:cNvSpPr/>
-          <p:nvPr/>
-        </p:nvSpPr>
-        <p:spPr>
-          <a:xfrm>
-            <a:off x="731520" y="3154680"/>
-            <a:ext cx="3383280" cy="914400"/>
-          </a:xfrm>
-          <a:prstGeom prst="rect">
-            <a:avLst/>
-          </a:prstGeom>
-          <a:solidFill>
-            <a:srgbClr val="111E3D"/>
-          </a:solidFill>
-          <a:ln>
-            <a:solidFill>
-              <a:srgbClr val="294A8F"/>
-            </a:solidFill>
-          </a:ln>
-          <a:effectLst/>
-        </p:spPr>
-        <p:style>
-          <a:lnRef idx="1">
-            <a:schemeClr val="accent1"/>
-          </a:lnRef>
-          <a:fillRef idx="3">
-            <a:schemeClr val="accent1"/>
-          </a:fillRef>
-          <a:effectRef idx="2">
-            <a:schemeClr val="accent1"/>
-          </a:effectRef>
-          <a:fontRef idx="minor">
-            <a:schemeClr val="lt1"/>
-          </a:fontRef>
-        </p:style>
-        <p:txBody>
-          <a:bodyPr rtlCol="0" anchor="ctr"/>
-          <a:lstStyle/>
-          <a:p>
-            <a:pPr algn="ctr"/>
-          </a:p>
-        </p:txBody>
-      </p:sp>
-      <p:sp>
-        <p:nvSpPr>
-          <p:cNvPr id="12" name="TextBox 11"/>
-          <p:cNvSpPr txBox="1"/>
-          <p:nvPr/>
-        </p:nvSpPr>
-        <p:spPr>
-          <a:xfrm>
-            <a:off x="731520" y="3410712"/>
-            <a:ext cx="3383280" cy="457200"/>
-          </a:xfrm>
-          <a:prstGeom prst="rect">
-            <a:avLst/>
-          </a:prstGeom>
-          <a:noFill/>
-        </p:spPr>
-        <p:txBody>
-          <a:bodyPr wrap="square">
-            <a:spAutoFit/>
-          </a:bodyPr>
-          <a:lstStyle/>
-          <a:p>
-            <a:pPr algn="ctr">
-              <a:spcAft>
-                <a:spcPts val="600"/>
-              </a:spcAft>
-            </a:pPr>
-            <a:r>
-              <a:rPr sz="1700" b="1">
-                <a:solidFill>
-                  <a:srgbClr val="F2F6FF"/>
-                </a:solidFill>
-                <a:latin typeface="Segoe UI"/>
-              </a:rPr>
-              <a:t>Red Light Jump</a:t>
-            </a:r>
-          </a:p>
-        </p:txBody>
-      </p:sp>
-      <p:sp>
-        <p:nvSpPr>
-          <p:cNvPr id="13" name="Rectangle 12"/>
-          <p:cNvSpPr/>
-          <p:nvPr/>
-        </p:nvSpPr>
-        <p:spPr>
-          <a:xfrm>
-            <a:off x="4389120" y="3154680"/>
-            <a:ext cx="3383280" cy="914400"/>
-          </a:xfrm>
-          <a:prstGeom prst="rect">
-            <a:avLst/>
-          </a:prstGeom>
-          <a:solidFill>
-            <a:srgbClr val="111E3D"/>
-          </a:solidFill>
-          <a:ln>
-            <a:solidFill>
-              <a:srgbClr val="294A8F"/>
-            </a:solidFill>
-          </a:ln>
-          <a:effectLst/>
-        </p:spPr>
-        <p:style>
-          <a:lnRef idx="1">
-            <a:schemeClr val="accent1"/>
-          </a:lnRef>
-          <a:fillRef idx="3">
-            <a:schemeClr val="accent1"/>
-          </a:fillRef>
-          <a:effectRef idx="2">
-            <a:schemeClr val="accent1"/>
-          </a:effectRef>
-          <a:fontRef idx="minor">
-            <a:schemeClr val="lt1"/>
-          </a:fontRef>
-        </p:style>
-        <p:txBody>
-          <a:bodyPr rtlCol="0" anchor="ctr"/>
-          <a:lstStyle/>
-          <a:p>
-            <a:pPr algn="ctr"/>
-          </a:p>
-        </p:txBody>
-      </p:sp>
-      <p:sp>
-        <p:nvSpPr>
-          <p:cNvPr id="14" name="TextBox 13"/>
-          <p:cNvSpPr txBox="1"/>
-          <p:nvPr/>
-        </p:nvSpPr>
-        <p:spPr>
-          <a:xfrm>
-            <a:off x="4389120" y="3410712"/>
-            <a:ext cx="3383280" cy="457200"/>
-          </a:xfrm>
-          <a:prstGeom prst="rect">
-            <a:avLst/>
-          </a:prstGeom>
-          <a:noFill/>
-        </p:spPr>
-        <p:txBody>
-          <a:bodyPr wrap="square">
-            <a:spAutoFit/>
-          </a:bodyPr>
-          <a:lstStyle/>
-          <a:p>
-            <a:pPr algn="ctr">
-              <a:spcAft>
-                <a:spcPts val="600"/>
-              </a:spcAft>
-            </a:pPr>
-            <a:r>
-              <a:rPr sz="1700" b="1">
-                <a:solidFill>
-                  <a:srgbClr val="F2F6FF"/>
-                </a:solidFill>
-                <a:latin typeface="Segoe UI"/>
-              </a:rPr>
-              <a:t>Wrong Way</a:t>
-            </a:r>
-          </a:p>
-        </p:txBody>
-      </p:sp>
-      <p:sp>
-        <p:nvSpPr>
-          <p:cNvPr id="15" name="Rectangle 14"/>
-          <p:cNvSpPr/>
-          <p:nvPr/>
-        </p:nvSpPr>
-        <p:spPr>
-          <a:xfrm>
-            <a:off x="8046720" y="3154680"/>
-            <a:ext cx="3383280" cy="914400"/>
-          </a:xfrm>
-          <a:prstGeom prst="rect">
-            <a:avLst/>
-          </a:prstGeom>
-          <a:solidFill>
-            <a:srgbClr val="111E3D"/>
-          </a:solidFill>
-          <a:ln>
-            <a:solidFill>
-              <a:srgbClr val="294A8F"/>
-            </a:solidFill>
-          </a:ln>
-          <a:effectLst/>
-        </p:spPr>
-        <p:style>
-          <a:lnRef idx="1">
-            <a:schemeClr val="accent1"/>
-          </a:lnRef>
-          <a:fillRef idx="3">
-            <a:schemeClr val="accent1"/>
-          </a:fillRef>
-          <a:effectRef idx="2">
-            <a:schemeClr val="accent1"/>
-          </a:effectRef>
-          <a:fontRef idx="minor">
-            <a:schemeClr val="lt1"/>
-          </a:fontRef>
-        </p:style>
-        <p:txBody>
-          <a:bodyPr rtlCol="0" anchor="ctr"/>
-          <a:lstStyle/>
-          <a:p>
-            <a:pPr algn="ctr"/>
-          </a:p>
-        </p:txBody>
-      </p:sp>
-      <p:sp>
-        <p:nvSpPr>
-          <p:cNvPr id="16" name="TextBox 15"/>
-          <p:cNvSpPr txBox="1"/>
-          <p:nvPr/>
-        </p:nvSpPr>
-        <p:spPr>
-          <a:xfrm>
-            <a:off x="8046720" y="3410712"/>
-            <a:ext cx="3383280" cy="457200"/>
-          </a:xfrm>
-          <a:prstGeom prst="rect">
-            <a:avLst/>
-          </a:prstGeom>
-          <a:noFill/>
-        </p:spPr>
-        <p:txBody>
-          <a:bodyPr wrap="square">
-            <a:spAutoFit/>
-          </a:bodyPr>
-          <a:lstStyle/>
-          <a:p>
-            <a:pPr algn="ctr">
-              <a:spcAft>
-                <a:spcPts val="600"/>
-              </a:spcAft>
-            </a:pPr>
-            <a:r>
-              <a:rPr sz="1700" b="1">
-                <a:solidFill>
-                  <a:srgbClr val="F2F6FF"/>
-                </a:solidFill>
-                <a:latin typeface="Segoe UI"/>
-              </a:rPr>
-              <a:t>No Seatbelt</a:t>
-            </a:r>
-          </a:p>
-        </p:txBody>
-      </p:sp>
-      <p:sp>
-        <p:nvSpPr>
-          <p:cNvPr id="17" name="Rectangle 16"/>
-          <p:cNvSpPr/>
-          <p:nvPr/>
-        </p:nvSpPr>
-        <p:spPr>
-          <a:xfrm>
-            <a:off x="731520" y="4297680"/>
-            <a:ext cx="3383280" cy="914400"/>
-          </a:xfrm>
-          <a:prstGeom prst="rect">
-            <a:avLst/>
-          </a:prstGeom>
-          <a:solidFill>
-            <a:srgbClr val="111E3D"/>
-          </a:solidFill>
-          <a:ln>
-            <a:solidFill>
-              <a:srgbClr val="294A8F"/>
-            </a:solidFill>
-          </a:ln>
-          <a:effectLst/>
-        </p:spPr>
-        <p:style>
-          <a:lnRef idx="1">
-            <a:schemeClr val="accent1"/>
-          </a:lnRef>
-          <a:fillRef idx="3">
-            <a:schemeClr val="accent1"/>
-          </a:fillRef>
-          <a:effectRef idx="2">
-            <a:schemeClr val="accent1"/>
-          </a:effectRef>
-          <a:fontRef idx="minor">
-            <a:schemeClr val="lt1"/>
-          </a:fontRef>
-        </p:style>
-        <p:txBody>
-          <a:bodyPr rtlCol="0" anchor="ctr"/>
-          <a:lstStyle/>
-          <a:p>
-            <a:pPr algn="ctr"/>
-          </a:p>
-        </p:txBody>
-      </p:sp>
-      <p:sp>
-        <p:nvSpPr>
-          <p:cNvPr id="18" name="TextBox 17"/>
-          <p:cNvSpPr txBox="1"/>
-          <p:nvPr/>
-        </p:nvSpPr>
-        <p:spPr>
-          <a:xfrm>
-            <a:off x="731520" y="4553712"/>
-            <a:ext cx="3383280" cy="457200"/>
-          </a:xfrm>
-          <a:prstGeom prst="rect">
-            <a:avLst/>
-          </a:prstGeom>
-          <a:noFill/>
-        </p:spPr>
-        <p:txBody>
-          <a:bodyPr wrap="square">
-            <a:spAutoFit/>
-          </a:bodyPr>
-          <a:lstStyle/>
-          <a:p>
-            <a:pPr algn="ctr">
-              <a:spcAft>
-                <a:spcPts val="600"/>
-              </a:spcAft>
-            </a:pPr>
-            <a:r>
-              <a:rPr sz="1700" b="1">
-                <a:solidFill>
-                  <a:srgbClr val="F2F6FF"/>
-                </a:solidFill>
-                <a:latin typeface="Segoe UI"/>
-              </a:rPr>
-              <a:t>Mobile Phone Use</a:t>
-            </a:r>
-          </a:p>
-        </p:txBody>
-      </p:sp>
-      <p:sp>
-        <p:nvSpPr>
-          <p:cNvPr id="19" name="Rectangle 18"/>
-          <p:cNvSpPr/>
-          <p:nvPr/>
-        </p:nvSpPr>
-        <p:spPr>
-          <a:xfrm>
-            <a:off x="4389120" y="4297680"/>
-            <a:ext cx="3383280" cy="914400"/>
-          </a:xfrm>
-          <a:prstGeom prst="rect">
-            <a:avLst/>
-          </a:prstGeom>
-          <a:solidFill>
-            <a:srgbClr val="111E3D"/>
-          </a:solidFill>
-          <a:ln>
-            <a:solidFill>
-              <a:srgbClr val="294A8F"/>
-            </a:solidFill>
-          </a:ln>
-          <a:effectLst/>
-        </p:spPr>
-        <p:style>
-          <a:lnRef idx="1">
-            <a:schemeClr val="accent1"/>
-          </a:lnRef>
-          <a:fillRef idx="3">
-            <a:schemeClr val="accent1"/>
-          </a:fillRef>
-          <a:effectRef idx="2">
-            <a:schemeClr val="accent1"/>
-          </a:effectRef>
-          <a:fontRef idx="minor">
-            <a:schemeClr val="lt1"/>
-          </a:fontRef>
-        </p:style>
-        <p:txBody>
-          <a:bodyPr rtlCol="0" anchor="ctr"/>
-          <a:lstStyle/>
-          <a:p>
-            <a:pPr algn="ctr"/>
-          </a:p>
-        </p:txBody>
-      </p:sp>
-      <p:sp>
-        <p:nvSpPr>
-          <p:cNvPr id="20" name="TextBox 19"/>
-          <p:cNvSpPr txBox="1"/>
-          <p:nvPr/>
-        </p:nvSpPr>
-        <p:spPr>
-          <a:xfrm>
-            <a:off x="4389120" y="4553712"/>
-            <a:ext cx="3383280" cy="457200"/>
-          </a:xfrm>
-          <a:prstGeom prst="rect">
-            <a:avLst/>
-          </a:prstGeom>
-          <a:noFill/>
-        </p:spPr>
-        <p:txBody>
-          <a:bodyPr wrap="square">
-            <a:spAutoFit/>
-          </a:bodyPr>
-          <a:lstStyle/>
-          <a:p>
-            <a:pPr algn="ctr">
-              <a:spcAft>
-                <a:spcPts val="600"/>
-              </a:spcAft>
-            </a:pPr>
-            <a:r>
-              <a:rPr sz="1700" b="1">
-                <a:solidFill>
-                  <a:srgbClr val="F2F6FF"/>
-                </a:solidFill>
-                <a:latin typeface="Segoe UI"/>
-              </a:rPr>
-              <a:t>Illegal Parking</a:t>
-            </a:r>
-          </a:p>
-        </p:txBody>
-      </p:sp>
-      <p:sp>
-        <p:nvSpPr>
-          <p:cNvPr id="21" name="Rectangle 20"/>
-          <p:cNvSpPr/>
-          <p:nvPr/>
-        </p:nvSpPr>
-        <p:spPr>
-          <a:xfrm>
-            <a:off x="8046720" y="4297680"/>
-            <a:ext cx="3383280" cy="914400"/>
-          </a:xfrm>
-          <a:prstGeom prst="rect">
-            <a:avLst/>
-          </a:prstGeom>
-          <a:solidFill>
-            <a:srgbClr val="111E3D"/>
-          </a:solidFill>
-          <a:ln>
-            <a:solidFill>
-              <a:srgbClr val="294A8F"/>
-            </a:solidFill>
-          </a:ln>
-          <a:effectLst/>
-        </p:spPr>
-        <p:style>
-          <a:lnRef idx="1">
-            <a:schemeClr val="accent1"/>
-          </a:lnRef>
-          <a:fillRef idx="3">
-            <a:schemeClr val="accent1"/>
-          </a:fillRef>
-          <a:effectRef idx="2">
-            <a:schemeClr val="accent1"/>
-          </a:effectRef>
-          <a:fontRef idx="minor">
-            <a:schemeClr val="lt1"/>
-          </a:fontRef>
-        </p:style>
-        <p:txBody>
-          <a:bodyPr rtlCol="0" anchor="ctr"/>
-          <a:lstStyle/>
-          <a:p>
-            <a:pPr algn="ctr"/>
-          </a:p>
-        </p:txBody>
-      </p:sp>
-      <p:sp>
-        <p:nvSpPr>
-          <p:cNvPr id="22" name="TextBox 21"/>
-          <p:cNvSpPr txBox="1"/>
-          <p:nvPr/>
-        </p:nvSpPr>
-        <p:spPr>
-          <a:xfrm>
-            <a:off x="8046720" y="4553712"/>
-            <a:ext cx="3383280" cy="457200"/>
-          </a:xfrm>
-          <a:prstGeom prst="rect">
-            <a:avLst/>
-          </a:prstGeom>
-          <a:noFill/>
-        </p:spPr>
-        <p:txBody>
-          <a:bodyPr wrap="square">
-            <a:spAutoFit/>
-          </a:bodyPr>
-          <a:lstStyle/>
-          <a:p>
-            <a:pPr algn="ctr">
-              <a:spcAft>
-                <a:spcPts val="600"/>
-              </a:spcAft>
-            </a:pPr>
-            <a:r>
-              <a:rPr sz="1700" b="1">
-                <a:solidFill>
-                  <a:srgbClr val="F2F6FF"/>
-                </a:solidFill>
-                <a:latin typeface="Segoe UI"/>
-              </a:rPr>
-              <a:t>Driver Fatigue</a:t>
-            </a:r>
-          </a:p>
-        </p:txBody>
-      </p:sp>
-      <p:sp>
-        <p:nvSpPr>
-          <p:cNvPr id="23" name="TextBox 22"/>
-          <p:cNvSpPr txBox="1"/>
-          <p:nvPr/>
-        </p:nvSpPr>
-        <p:spPr>
-          <a:xfrm>
-            <a:off x="731520" y="5669280"/>
-            <a:ext cx="10607040" cy="548640"/>
-          </a:xfrm>
-          <a:prstGeom prst="rect">
-            <a:avLst/>
-          </a:prstGeom>
-          <a:noFill/>
-        </p:spPr>
-        <p:txBody>
-          <a:bodyPr wrap="square">
-            <a:spAutoFit/>
-          </a:bodyPr>
-          <a:lstStyle/>
-          <a:p>
-            <a:pPr algn="ctr">
-              <a:spcAft>
-                <a:spcPts val="600"/>
-              </a:spcAft>
-            </a:pPr>
-            <a:r>
-              <a:rPr sz="1500" b="0">
-                <a:solidFill>
-                  <a:srgbClr val="9FB3D1"/>
-                </a:solidFill>
-                <a:latin typeface="Segoe UI"/>
-              </a:rPr>
-              <a:t>Plus ANPR on every tracked vehicle, building a searchable log.</a:t>
+              <a:rPr sz="1500" b="1">
+                <a:solidFill>
+                  <a:srgbClr val="22D3EE"/>
+                </a:solidFill>
+                <a:latin typeface="Segoe UI"/>
+              </a:rPr>
+              <a:t>Camera  -&gt;  YOLOv8s  -&gt;  ByteTrack  -&gt;  Homography  -&gt;  Violation engine  -&gt;  ANPR  -&gt;  e-Challan</a:t>
             </a:r>
           </a:p>
         </p:txBody>
@@ -6172,7 +9024,7 @@
                 </a:solidFill>
                 <a:latin typeface="Segoe UI"/>
               </a:rPr>
-              <a:t>VERIFIED OUTPUT</a:t>
+              <a:t>CAPABILITY</a:t>
             </a:r>
           </a:p>
         </p:txBody>
@@ -6211,35 +9063,57 @@
                 </a:solidFill>
                 <a:latin typeface="Segoe UI"/>
               </a:rPr>
-              <a:t>Proof: over-speeding</a:t>
-            </a:r>
-          </a:p>
-        </p:txBody>
-      </p:sp>
-      <p:pic>
-        <p:nvPicPr>
-          <p:cNvPr id="5" name="Picture 4" descr="01_over_speeding_evidence_1.jpg"/>
-          <p:cNvPicPr>
-            <a:picLocks noChangeAspect="1"/>
-          </p:cNvPicPr>
-          <p:nvPr/>
-        </p:nvPicPr>
-        <p:blipFill>
-          <a:blip r:embed="rId2"/>
-          <a:stretch>
-            <a:fillRect/>
-          </a:stretch>
-        </p:blipFill>
-        <p:spPr>
-          <a:xfrm>
-            <a:off x="2585720" y="1783080"/>
-            <a:ext cx="6990080" cy="3931920"/>
-          </a:xfrm>
-          <a:prstGeom prst="rect">
-            <a:avLst/>
-          </a:prstGeom>
-        </p:spPr>
-      </p:pic>
+              <a:t>Nine violations, one pipeline</a:t>
+            </a:r>
+          </a:p>
+        </p:txBody>
+      </p:sp>
+      <p:sp>
+        <p:nvSpPr>
+          <p:cNvPr id="5" name="Rectangle 4"/>
+          <p:cNvSpPr/>
+          <p:nvPr/>
+        </p:nvSpPr>
+        <p:spPr>
+          <a:xfrm>
+            <a:off x="731520" y="2011680"/>
+            <a:ext cx="3383280" cy="914400"/>
+          </a:xfrm>
+          <a:prstGeom prst="rect">
+            <a:avLst/>
+          </a:prstGeom>
+          <a:solidFill>
+            <a:srgbClr val="111E3D"/>
+          </a:solidFill>
+          <a:ln>
+            <a:solidFill>
+              <a:srgbClr val="0B1428"/>
+            </a:solidFill>
+          </a:ln>
+          <a:effectLst/>
+        </p:spPr>
+        <p:style>
+          <a:lnRef idx="1">
+            <a:schemeClr val="accent1"/>
+          </a:lnRef>
+          <a:fillRef idx="3">
+            <a:schemeClr val="accent1"/>
+          </a:fillRef>
+          <a:effectRef idx="2">
+            <a:schemeClr val="accent1"/>
+          </a:effectRef>
+          <a:fontRef idx="minor">
+            <a:schemeClr val="lt1"/>
+          </a:fontRef>
+        </p:style>
+        <p:txBody>
+          <a:bodyPr rtlCol="0" anchor="ctr"/>
+          <a:lstStyle/>
+          <a:p>
+            <a:pPr algn="ctr"/>
+          </a:p>
+        </p:txBody>
+      </p:sp>
       <p:sp>
         <p:nvSpPr>
           <p:cNvPr id="6" name="TextBox 5"/>
@@ -6248,8 +9122,8 @@
         </p:nvSpPr>
         <p:spPr>
           <a:xfrm>
-            <a:off x="731520" y="5897880"/>
-            <a:ext cx="10607040" cy="731520"/>
+            <a:off x="731520" y="2267712"/>
+            <a:ext cx="3383280" cy="457200"/>
           </a:xfrm>
           <a:prstGeom prst="rect">
             <a:avLst/>
@@ -6268,49 +9142,732 @@
               </a:spcAft>
             </a:pPr>
             <a:r>
-              <a:rPr sz="1450" b="0">
+              <a:rPr sz="1700" b="1">
+                <a:solidFill>
+                  <a:srgbClr val="F2F6FF"/>
+                </a:solidFill>
+                <a:latin typeface="Segoe UI"/>
+              </a:rPr>
+              <a:t>No Helmet</a:t>
+            </a:r>
+          </a:p>
+        </p:txBody>
+      </p:sp>
+      <p:sp>
+        <p:nvSpPr>
+          <p:cNvPr id="7" name="Rectangle 6"/>
+          <p:cNvSpPr/>
+          <p:nvPr/>
+        </p:nvSpPr>
+        <p:spPr>
+          <a:xfrm>
+            <a:off x="4389120" y="2011680"/>
+            <a:ext cx="3383280" cy="914400"/>
+          </a:xfrm>
+          <a:prstGeom prst="rect">
+            <a:avLst/>
+          </a:prstGeom>
+          <a:solidFill>
+            <a:srgbClr val="111E3D"/>
+          </a:solidFill>
+          <a:ln>
+            <a:solidFill>
+              <a:srgbClr val="0B1428"/>
+            </a:solidFill>
+          </a:ln>
+          <a:effectLst/>
+        </p:spPr>
+        <p:style>
+          <a:lnRef idx="1">
+            <a:schemeClr val="accent1"/>
+          </a:lnRef>
+          <a:fillRef idx="3">
+            <a:schemeClr val="accent1"/>
+          </a:fillRef>
+          <a:effectRef idx="2">
+            <a:schemeClr val="accent1"/>
+          </a:effectRef>
+          <a:fontRef idx="minor">
+            <a:schemeClr val="lt1"/>
+          </a:fontRef>
+        </p:style>
+        <p:txBody>
+          <a:bodyPr rtlCol="0" anchor="ctr"/>
+          <a:lstStyle/>
+          <a:p>
+            <a:pPr algn="ctr"/>
+          </a:p>
+        </p:txBody>
+      </p:sp>
+      <p:sp>
+        <p:nvSpPr>
+          <p:cNvPr id="8" name="TextBox 7"/>
+          <p:cNvSpPr txBox="1"/>
+          <p:nvPr/>
+        </p:nvSpPr>
+        <p:spPr>
+          <a:xfrm>
+            <a:off x="4389120" y="2267712"/>
+            <a:ext cx="3383280" cy="457200"/>
+          </a:xfrm>
+          <a:prstGeom prst="rect">
+            <a:avLst/>
+          </a:prstGeom>
+          <a:noFill/>
+        </p:spPr>
+        <p:txBody>
+          <a:bodyPr wrap="square">
+            <a:spAutoFit/>
+          </a:bodyPr>
+          <a:lstStyle/>
+          <a:p>
+            <a:pPr algn="ctr">
+              <a:spcAft>
+                <a:spcPts val="600"/>
+              </a:spcAft>
+            </a:pPr>
+            <a:r>
+              <a:rPr sz="1700" b="1">
+                <a:solidFill>
+                  <a:srgbClr val="F2F6FF"/>
+                </a:solidFill>
+                <a:latin typeface="Segoe UI"/>
+              </a:rPr>
+              <a:t>Triple Riding</a:t>
+            </a:r>
+          </a:p>
+        </p:txBody>
+      </p:sp>
+      <p:sp>
+        <p:nvSpPr>
+          <p:cNvPr id="9" name="Rectangle 8"/>
+          <p:cNvSpPr/>
+          <p:nvPr/>
+        </p:nvSpPr>
+        <p:spPr>
+          <a:xfrm>
+            <a:off x="8046720" y="2011680"/>
+            <a:ext cx="3383280" cy="914400"/>
+          </a:xfrm>
+          <a:prstGeom prst="rect">
+            <a:avLst/>
+          </a:prstGeom>
+          <a:solidFill>
+            <a:srgbClr val="111E3D"/>
+          </a:solidFill>
+          <a:ln>
+            <a:solidFill>
+              <a:srgbClr val="0B1428"/>
+            </a:solidFill>
+          </a:ln>
+          <a:effectLst/>
+        </p:spPr>
+        <p:style>
+          <a:lnRef idx="1">
+            <a:schemeClr val="accent1"/>
+          </a:lnRef>
+          <a:fillRef idx="3">
+            <a:schemeClr val="accent1"/>
+          </a:fillRef>
+          <a:effectRef idx="2">
+            <a:schemeClr val="accent1"/>
+          </a:effectRef>
+          <a:fontRef idx="minor">
+            <a:schemeClr val="lt1"/>
+          </a:fontRef>
+        </p:style>
+        <p:txBody>
+          <a:bodyPr rtlCol="0" anchor="ctr"/>
+          <a:lstStyle/>
+          <a:p>
+            <a:pPr algn="ctr"/>
+          </a:p>
+        </p:txBody>
+      </p:sp>
+      <p:sp>
+        <p:nvSpPr>
+          <p:cNvPr id="10" name="TextBox 9"/>
+          <p:cNvSpPr txBox="1"/>
+          <p:nvPr/>
+        </p:nvSpPr>
+        <p:spPr>
+          <a:xfrm>
+            <a:off x="8046720" y="2267712"/>
+            <a:ext cx="3383280" cy="457200"/>
+          </a:xfrm>
+          <a:prstGeom prst="rect">
+            <a:avLst/>
+          </a:prstGeom>
+          <a:noFill/>
+        </p:spPr>
+        <p:txBody>
+          <a:bodyPr wrap="square">
+            <a:spAutoFit/>
+          </a:bodyPr>
+          <a:lstStyle/>
+          <a:p>
+            <a:pPr algn="ctr">
+              <a:spcAft>
+                <a:spcPts val="600"/>
+              </a:spcAft>
+            </a:pPr>
+            <a:r>
+              <a:rPr sz="1700" b="1">
+                <a:solidFill>
+                  <a:srgbClr val="F2F6FF"/>
+                </a:solidFill>
+                <a:latin typeface="Segoe UI"/>
+              </a:rPr>
+              <a:t>Over Speeding</a:t>
+            </a:r>
+          </a:p>
+        </p:txBody>
+      </p:sp>
+      <p:sp>
+        <p:nvSpPr>
+          <p:cNvPr id="11" name="Rectangle 10"/>
+          <p:cNvSpPr/>
+          <p:nvPr/>
+        </p:nvSpPr>
+        <p:spPr>
+          <a:xfrm>
+            <a:off x="731520" y="3154680"/>
+            <a:ext cx="3383280" cy="914400"/>
+          </a:xfrm>
+          <a:prstGeom prst="rect">
+            <a:avLst/>
+          </a:prstGeom>
+          <a:solidFill>
+            <a:srgbClr val="111E3D"/>
+          </a:solidFill>
+          <a:ln>
+            <a:solidFill>
+              <a:srgbClr val="0B1428"/>
+            </a:solidFill>
+          </a:ln>
+          <a:effectLst/>
+        </p:spPr>
+        <p:style>
+          <a:lnRef idx="1">
+            <a:schemeClr val="accent1"/>
+          </a:lnRef>
+          <a:fillRef idx="3">
+            <a:schemeClr val="accent1"/>
+          </a:fillRef>
+          <a:effectRef idx="2">
+            <a:schemeClr val="accent1"/>
+          </a:effectRef>
+          <a:fontRef idx="minor">
+            <a:schemeClr val="lt1"/>
+          </a:fontRef>
+        </p:style>
+        <p:txBody>
+          <a:bodyPr rtlCol="0" anchor="ctr"/>
+          <a:lstStyle/>
+          <a:p>
+            <a:pPr algn="ctr"/>
+          </a:p>
+        </p:txBody>
+      </p:sp>
+      <p:sp>
+        <p:nvSpPr>
+          <p:cNvPr id="12" name="TextBox 11"/>
+          <p:cNvSpPr txBox="1"/>
+          <p:nvPr/>
+        </p:nvSpPr>
+        <p:spPr>
+          <a:xfrm>
+            <a:off x="731520" y="3410712"/>
+            <a:ext cx="3383280" cy="457200"/>
+          </a:xfrm>
+          <a:prstGeom prst="rect">
+            <a:avLst/>
+          </a:prstGeom>
+          <a:noFill/>
+        </p:spPr>
+        <p:txBody>
+          <a:bodyPr wrap="square">
+            <a:spAutoFit/>
+          </a:bodyPr>
+          <a:lstStyle/>
+          <a:p>
+            <a:pPr algn="ctr">
+              <a:spcAft>
+                <a:spcPts val="600"/>
+              </a:spcAft>
+            </a:pPr>
+            <a:r>
+              <a:rPr sz="1700" b="1">
+                <a:solidFill>
+                  <a:srgbClr val="F2F6FF"/>
+                </a:solidFill>
+                <a:latin typeface="Segoe UI"/>
+              </a:rPr>
+              <a:t>Red Light Jump</a:t>
+            </a:r>
+          </a:p>
+        </p:txBody>
+      </p:sp>
+      <p:sp>
+        <p:nvSpPr>
+          <p:cNvPr id="13" name="Rectangle 12"/>
+          <p:cNvSpPr/>
+          <p:nvPr/>
+        </p:nvSpPr>
+        <p:spPr>
+          <a:xfrm>
+            <a:off x="4389120" y="3154680"/>
+            <a:ext cx="3383280" cy="914400"/>
+          </a:xfrm>
+          <a:prstGeom prst="rect">
+            <a:avLst/>
+          </a:prstGeom>
+          <a:solidFill>
+            <a:srgbClr val="111E3D"/>
+          </a:solidFill>
+          <a:ln>
+            <a:solidFill>
+              <a:srgbClr val="0B1428"/>
+            </a:solidFill>
+          </a:ln>
+          <a:effectLst/>
+        </p:spPr>
+        <p:style>
+          <a:lnRef idx="1">
+            <a:schemeClr val="accent1"/>
+          </a:lnRef>
+          <a:fillRef idx="3">
+            <a:schemeClr val="accent1"/>
+          </a:fillRef>
+          <a:effectRef idx="2">
+            <a:schemeClr val="accent1"/>
+          </a:effectRef>
+          <a:fontRef idx="minor">
+            <a:schemeClr val="lt1"/>
+          </a:fontRef>
+        </p:style>
+        <p:txBody>
+          <a:bodyPr rtlCol="0" anchor="ctr"/>
+          <a:lstStyle/>
+          <a:p>
+            <a:pPr algn="ctr"/>
+          </a:p>
+        </p:txBody>
+      </p:sp>
+      <p:sp>
+        <p:nvSpPr>
+          <p:cNvPr id="14" name="TextBox 13"/>
+          <p:cNvSpPr txBox="1"/>
+          <p:nvPr/>
+        </p:nvSpPr>
+        <p:spPr>
+          <a:xfrm>
+            <a:off x="4389120" y="3410712"/>
+            <a:ext cx="3383280" cy="457200"/>
+          </a:xfrm>
+          <a:prstGeom prst="rect">
+            <a:avLst/>
+          </a:prstGeom>
+          <a:noFill/>
+        </p:spPr>
+        <p:txBody>
+          <a:bodyPr wrap="square">
+            <a:spAutoFit/>
+          </a:bodyPr>
+          <a:lstStyle/>
+          <a:p>
+            <a:pPr algn="ctr">
+              <a:spcAft>
+                <a:spcPts val="600"/>
+              </a:spcAft>
+            </a:pPr>
+            <a:r>
+              <a:rPr sz="1700" b="1">
+                <a:solidFill>
+                  <a:srgbClr val="F2F6FF"/>
+                </a:solidFill>
+                <a:latin typeface="Segoe UI"/>
+              </a:rPr>
+              <a:t>Wrong Way</a:t>
+            </a:r>
+          </a:p>
+        </p:txBody>
+      </p:sp>
+      <p:sp>
+        <p:nvSpPr>
+          <p:cNvPr id="15" name="Rectangle 14"/>
+          <p:cNvSpPr/>
+          <p:nvPr/>
+        </p:nvSpPr>
+        <p:spPr>
+          <a:xfrm>
+            <a:off x="8046720" y="3154680"/>
+            <a:ext cx="3383280" cy="914400"/>
+          </a:xfrm>
+          <a:prstGeom prst="rect">
+            <a:avLst/>
+          </a:prstGeom>
+          <a:solidFill>
+            <a:srgbClr val="111E3D"/>
+          </a:solidFill>
+          <a:ln>
+            <a:solidFill>
+              <a:srgbClr val="0B1428"/>
+            </a:solidFill>
+          </a:ln>
+          <a:effectLst/>
+        </p:spPr>
+        <p:style>
+          <a:lnRef idx="1">
+            <a:schemeClr val="accent1"/>
+          </a:lnRef>
+          <a:fillRef idx="3">
+            <a:schemeClr val="accent1"/>
+          </a:fillRef>
+          <a:effectRef idx="2">
+            <a:schemeClr val="accent1"/>
+          </a:effectRef>
+          <a:fontRef idx="minor">
+            <a:schemeClr val="lt1"/>
+          </a:fontRef>
+        </p:style>
+        <p:txBody>
+          <a:bodyPr rtlCol="0" anchor="ctr"/>
+          <a:lstStyle/>
+          <a:p>
+            <a:pPr algn="ctr"/>
+          </a:p>
+        </p:txBody>
+      </p:sp>
+      <p:sp>
+        <p:nvSpPr>
+          <p:cNvPr id="16" name="TextBox 15"/>
+          <p:cNvSpPr txBox="1"/>
+          <p:nvPr/>
+        </p:nvSpPr>
+        <p:spPr>
+          <a:xfrm>
+            <a:off x="8046720" y="3410712"/>
+            <a:ext cx="3383280" cy="457200"/>
+          </a:xfrm>
+          <a:prstGeom prst="rect">
+            <a:avLst/>
+          </a:prstGeom>
+          <a:noFill/>
+        </p:spPr>
+        <p:txBody>
+          <a:bodyPr wrap="square">
+            <a:spAutoFit/>
+          </a:bodyPr>
+          <a:lstStyle/>
+          <a:p>
+            <a:pPr algn="ctr">
+              <a:spcAft>
+                <a:spcPts val="600"/>
+              </a:spcAft>
+            </a:pPr>
+            <a:r>
+              <a:rPr sz="1700" b="1">
+                <a:solidFill>
+                  <a:srgbClr val="F2F6FF"/>
+                </a:solidFill>
+                <a:latin typeface="Segoe UI"/>
+              </a:rPr>
+              <a:t>No Seatbelt</a:t>
+            </a:r>
+          </a:p>
+        </p:txBody>
+      </p:sp>
+      <p:sp>
+        <p:nvSpPr>
+          <p:cNvPr id="17" name="Rectangle 16"/>
+          <p:cNvSpPr/>
+          <p:nvPr/>
+        </p:nvSpPr>
+        <p:spPr>
+          <a:xfrm>
+            <a:off x="731520" y="4297680"/>
+            <a:ext cx="3383280" cy="914400"/>
+          </a:xfrm>
+          <a:prstGeom prst="rect">
+            <a:avLst/>
+          </a:prstGeom>
+          <a:solidFill>
+            <a:srgbClr val="111E3D"/>
+          </a:solidFill>
+          <a:ln>
+            <a:solidFill>
+              <a:srgbClr val="0B1428"/>
+            </a:solidFill>
+          </a:ln>
+          <a:effectLst/>
+        </p:spPr>
+        <p:style>
+          <a:lnRef idx="1">
+            <a:schemeClr val="accent1"/>
+          </a:lnRef>
+          <a:fillRef idx="3">
+            <a:schemeClr val="accent1"/>
+          </a:fillRef>
+          <a:effectRef idx="2">
+            <a:schemeClr val="accent1"/>
+          </a:effectRef>
+          <a:fontRef idx="minor">
+            <a:schemeClr val="lt1"/>
+          </a:fontRef>
+        </p:style>
+        <p:txBody>
+          <a:bodyPr rtlCol="0" anchor="ctr"/>
+          <a:lstStyle/>
+          <a:p>
+            <a:pPr algn="ctr"/>
+          </a:p>
+        </p:txBody>
+      </p:sp>
+      <p:sp>
+        <p:nvSpPr>
+          <p:cNvPr id="18" name="TextBox 17"/>
+          <p:cNvSpPr txBox="1"/>
+          <p:nvPr/>
+        </p:nvSpPr>
+        <p:spPr>
+          <a:xfrm>
+            <a:off x="731520" y="4553712"/>
+            <a:ext cx="3383280" cy="457200"/>
+          </a:xfrm>
+          <a:prstGeom prst="rect">
+            <a:avLst/>
+          </a:prstGeom>
+          <a:noFill/>
+        </p:spPr>
+        <p:txBody>
+          <a:bodyPr wrap="square">
+            <a:spAutoFit/>
+          </a:bodyPr>
+          <a:lstStyle/>
+          <a:p>
+            <a:pPr algn="ctr">
+              <a:spcAft>
+                <a:spcPts val="600"/>
+              </a:spcAft>
+            </a:pPr>
+            <a:r>
+              <a:rPr sz="1700" b="1">
+                <a:solidFill>
+                  <a:srgbClr val="F2F6FF"/>
+                </a:solidFill>
+                <a:latin typeface="Segoe UI"/>
+              </a:rPr>
+              <a:t>Mobile Phone Use</a:t>
+            </a:r>
+          </a:p>
+        </p:txBody>
+      </p:sp>
+      <p:sp>
+        <p:nvSpPr>
+          <p:cNvPr id="19" name="Rectangle 18"/>
+          <p:cNvSpPr/>
+          <p:nvPr/>
+        </p:nvSpPr>
+        <p:spPr>
+          <a:xfrm>
+            <a:off x="4389120" y="4297680"/>
+            <a:ext cx="3383280" cy="914400"/>
+          </a:xfrm>
+          <a:prstGeom prst="rect">
+            <a:avLst/>
+          </a:prstGeom>
+          <a:solidFill>
+            <a:srgbClr val="111E3D"/>
+          </a:solidFill>
+          <a:ln>
+            <a:solidFill>
+              <a:srgbClr val="0B1428"/>
+            </a:solidFill>
+          </a:ln>
+          <a:effectLst/>
+        </p:spPr>
+        <p:style>
+          <a:lnRef idx="1">
+            <a:schemeClr val="accent1"/>
+          </a:lnRef>
+          <a:fillRef idx="3">
+            <a:schemeClr val="accent1"/>
+          </a:fillRef>
+          <a:effectRef idx="2">
+            <a:schemeClr val="accent1"/>
+          </a:effectRef>
+          <a:fontRef idx="minor">
+            <a:schemeClr val="lt1"/>
+          </a:fontRef>
+        </p:style>
+        <p:txBody>
+          <a:bodyPr rtlCol="0" anchor="ctr"/>
+          <a:lstStyle/>
+          <a:p>
+            <a:pPr algn="ctr"/>
+          </a:p>
+        </p:txBody>
+      </p:sp>
+      <p:sp>
+        <p:nvSpPr>
+          <p:cNvPr id="20" name="TextBox 19"/>
+          <p:cNvSpPr txBox="1"/>
+          <p:nvPr/>
+        </p:nvSpPr>
+        <p:spPr>
+          <a:xfrm>
+            <a:off x="4389120" y="4553712"/>
+            <a:ext cx="3383280" cy="457200"/>
+          </a:xfrm>
+          <a:prstGeom prst="rect">
+            <a:avLst/>
+          </a:prstGeom>
+          <a:noFill/>
+        </p:spPr>
+        <p:txBody>
+          <a:bodyPr wrap="square">
+            <a:spAutoFit/>
+          </a:bodyPr>
+          <a:lstStyle/>
+          <a:p>
+            <a:pPr algn="ctr">
+              <a:spcAft>
+                <a:spcPts val="600"/>
+              </a:spcAft>
+            </a:pPr>
+            <a:r>
+              <a:rPr sz="1700" b="1">
+                <a:solidFill>
+                  <a:srgbClr val="F2F6FF"/>
+                </a:solidFill>
+                <a:latin typeface="Segoe UI"/>
+              </a:rPr>
+              <a:t>Illegal Parking</a:t>
+            </a:r>
+          </a:p>
+        </p:txBody>
+      </p:sp>
+      <p:sp>
+        <p:nvSpPr>
+          <p:cNvPr id="21" name="Rectangle 20"/>
+          <p:cNvSpPr/>
+          <p:nvPr/>
+        </p:nvSpPr>
+        <p:spPr>
+          <a:xfrm>
+            <a:off x="8046720" y="4297680"/>
+            <a:ext cx="3383280" cy="914400"/>
+          </a:xfrm>
+          <a:prstGeom prst="rect">
+            <a:avLst/>
+          </a:prstGeom>
+          <a:solidFill>
+            <a:srgbClr val="111E3D"/>
+          </a:solidFill>
+          <a:ln>
+            <a:solidFill>
+              <a:srgbClr val="0B1428"/>
+            </a:solidFill>
+          </a:ln>
+          <a:effectLst/>
+        </p:spPr>
+        <p:style>
+          <a:lnRef idx="1">
+            <a:schemeClr val="accent1"/>
+          </a:lnRef>
+          <a:fillRef idx="3">
+            <a:schemeClr val="accent1"/>
+          </a:fillRef>
+          <a:effectRef idx="2">
+            <a:schemeClr val="accent1"/>
+          </a:effectRef>
+          <a:fontRef idx="minor">
+            <a:schemeClr val="lt1"/>
+          </a:fontRef>
+        </p:style>
+        <p:txBody>
+          <a:bodyPr rtlCol="0" anchor="ctr"/>
+          <a:lstStyle/>
+          <a:p>
+            <a:pPr algn="ctr"/>
+          </a:p>
+        </p:txBody>
+      </p:sp>
+      <p:sp>
+        <p:nvSpPr>
+          <p:cNvPr id="22" name="TextBox 21"/>
+          <p:cNvSpPr txBox="1"/>
+          <p:nvPr/>
+        </p:nvSpPr>
+        <p:spPr>
+          <a:xfrm>
+            <a:off x="8046720" y="4553712"/>
+            <a:ext cx="3383280" cy="457200"/>
+          </a:xfrm>
+          <a:prstGeom prst="rect">
+            <a:avLst/>
+          </a:prstGeom>
+          <a:noFill/>
+        </p:spPr>
+        <p:txBody>
+          <a:bodyPr wrap="square">
+            <a:spAutoFit/>
+          </a:bodyPr>
+          <a:lstStyle/>
+          <a:p>
+            <a:pPr algn="ctr">
+              <a:spcAft>
+                <a:spcPts val="600"/>
+              </a:spcAft>
+            </a:pPr>
+            <a:r>
+              <a:rPr sz="1700" b="1">
+                <a:solidFill>
+                  <a:srgbClr val="F2F6FF"/>
+                </a:solidFill>
+                <a:latin typeface="Segoe UI"/>
+              </a:rPr>
+              <a:t>Driver Fatigue</a:t>
+            </a:r>
+          </a:p>
+        </p:txBody>
+      </p:sp>
+      <p:sp>
+        <p:nvSpPr>
+          <p:cNvPr id="23" name="TextBox 22"/>
+          <p:cNvSpPr txBox="1"/>
+          <p:nvPr/>
+        </p:nvSpPr>
+        <p:spPr>
+          <a:xfrm>
+            <a:off x="731520" y="5669280"/>
+            <a:ext cx="10607040" cy="548640"/>
+          </a:xfrm>
+          <a:prstGeom prst="rect">
+            <a:avLst/>
+          </a:prstGeom>
+          <a:noFill/>
+        </p:spPr>
+        <p:txBody>
+          <a:bodyPr wrap="square">
+            <a:spAutoFit/>
+          </a:bodyPr>
+          <a:lstStyle/>
+          <a:p>
+            <a:pPr algn="ctr">
+              <a:spcAft>
+                <a:spcPts val="600"/>
+              </a:spcAft>
+            </a:pPr>
+            <a:r>
+              <a:rPr sz="1500" b="0">
                 <a:solidFill>
                   <a:srgbClr val="9FB3D1"/>
                 </a:solidFill>
                 <a:latin typeface="Segoe UI"/>
               </a:rPr>
-              <a:t>134.0 km/h in a 60 zone - vehicle boxed, plate zoomed, proof stamped onto the image. </a:t>
-            </a:r>
-            <a:r>
-              <a:rPr sz="1450" b="1">
-                <a:solidFill>
-                  <a:srgbClr val="9FB3D1"/>
-                </a:solidFill>
-                <a:latin typeface="Segoe UI"/>
-              </a:rPr>
-              <a:t>7 over-speeding events</a:t>
-            </a:r>
-            <a:r>
-              <a:rPr sz="1450" b="0">
-                <a:solidFill>
-                  <a:srgbClr val="9FB3D1"/>
-                </a:solidFill>
-                <a:latin typeface="Segoe UI"/>
-              </a:rPr>
-              <a:t> measured at </a:t>
-            </a:r>
-            <a:r>
-              <a:rPr sz="1450" b="1">
-                <a:solidFill>
-                  <a:srgbClr val="9FB3D1"/>
-                </a:solidFill>
-                <a:latin typeface="Segoe UI"/>
-              </a:rPr>
-              <a:t>83-163 km/h</a:t>
-            </a:r>
-            <a:r>
-              <a:rPr sz="1450" b="0">
-                <a:solidFill>
-                  <a:srgbClr val="9FB3D1"/>
-                </a:solidFill>
-                <a:latin typeface="Segoe UI"/>
-              </a:rPr>
-              <a:t>.</a:t>
+              <a:t>Plus ANPR on every tracked vehicle, building a searchable enforcement log.</a:t>
             </a:r>
           </a:p>
         </p:txBody>
@@ -6419,7 +9976,7 @@
                 </a:solidFill>
                 <a:latin typeface="Segoe UI"/>
               </a:rPr>
-              <a:t>VERIFIED OUTPUT</a:t>
+              <a:t>VERIFIED SYSTEM OUTPUT</a:t>
             </a:r>
           </a:p>
         </p:txBody>
@@ -6458,14 +10015,14 @@
                 </a:solidFill>
                 <a:latin typeface="Segoe UI"/>
               </a:rPr>
-              <a:t>Proof: helmet and triple riding</a:t>
+              <a:t>Proof: over-speeding</a:t>
             </a:r>
           </a:p>
         </p:txBody>
       </p:sp>
       <p:pic>
         <p:nvPicPr>
-          <p:cNvPr id="5" name="Picture 4" descr="07_image_upload_triple_helmet.jpg"/>
+          <p:cNvPr id="5" name="Picture 4" descr="01_over_speeding_evidence_1.jpg"/>
           <p:cNvPicPr>
             <a:picLocks noChangeAspect="1"/>
           </p:cNvPicPr>
@@ -6479,8 +10036,8 @@
         </p:blipFill>
         <p:spPr>
           <a:xfrm>
-            <a:off x="3131820" y="1783080"/>
-            <a:ext cx="5897880" cy="3931920"/>
+            <a:off x="2585720" y="1783080"/>
+            <a:ext cx="6990080" cy="3931920"/>
           </a:xfrm>
           <a:prstGeom prst="rect">
             <a:avLst/>
@@ -6515,49 +10072,49 @@
               </a:spcAft>
             </a:pPr>
             <a:r>
-              <a:rPr sz="1450" b="0">
+              <a:rPr sz="1400" b="0">
                 <a:solidFill>
                   <a:srgbClr val="9FB3D1"/>
                 </a:solidFill>
                 <a:latin typeface="Segoe UI"/>
               </a:rPr>
-              <a:t>Both violations detected from a </a:t>
-            </a:r>
-            <a:r>
-              <a:rPr sz="1450" b="1">
+              <a:t>134.0 km/h in a 60 zone - vehicle boxed, plate zoomed, proof stamped onto the image. </a:t>
+            </a:r>
+            <a:r>
+              <a:rPr sz="1400" b="1">
                 <a:solidFill>
                   <a:srgbClr val="9FB3D1"/>
                 </a:solidFill>
                 <a:latin typeface="Segoe UI"/>
               </a:rPr>
-              <a:t>single uploaded photograph</a:t>
-            </a:r>
-            <a:r>
-              <a:rPr sz="1450" b="0">
+              <a:t>7 events</a:t>
+            </a:r>
+            <a:r>
+              <a:rPr sz="1400" b="0">
                 <a:solidFill>
                   <a:srgbClr val="9FB3D1"/>
                 </a:solidFill>
                 <a:latin typeface="Segoe UI"/>
               </a:rPr>
-              <a:t>, producing </a:t>
-            </a:r>
-            <a:r>
-              <a:rPr sz="1450" b="1">
+              <a:t> measured at </a:t>
+            </a:r>
+            <a:r>
+              <a:rPr sz="1400" b="1">
                 <a:solidFill>
                   <a:srgbClr val="9FB3D1"/>
                 </a:solidFill>
                 <a:latin typeface="Segoe UI"/>
               </a:rPr>
-              <a:t>two separate challans</a:t>
-            </a:r>
-            <a:r>
-              <a:rPr sz="1450" b="0">
+              <a:t>83-163 km/h</a:t>
+            </a:r>
+            <a:r>
+              <a:rPr sz="1400" b="0">
                 <a:solidFill>
                   <a:srgbClr val="9FB3D1"/>
                 </a:solidFill>
                 <a:latin typeface="Segoe UI"/>
               </a:rPr>
-              <a:t>.</a:t>
+              <a:t> across two cameras.</a:t>
             </a:r>
           </a:p>
         </p:txBody>
@@ -6666,7 +10223,7 @@
                 </a:solidFill>
                 <a:latin typeface="Segoe UI"/>
               </a:rPr>
-              <a:t>VERIFIED OUTPUT</a:t>
+              <a:t>VERIFIED SYSTEM OUTPUT</a:t>
             </a:r>
           </a:p>
         </p:txBody>
@@ -6705,14 +10262,14 @@
                 </a:solidFill>
                 <a:latin typeface="Segoe UI"/>
               </a:rPr>
-              <a:t>Proof: number-plate recognition</a:t>
+              <a:t>Proof: helmet and triple riding</a:t>
             </a:r>
           </a:p>
         </p:txBody>
       </p:sp>
       <p:pic>
         <p:nvPicPr>
-          <p:cNvPr id="5" name="Picture 4" descr="05_anpr_sri_lanka_0.jpg"/>
+          <p:cNvPr id="5" name="Picture 4" descr="07_image_upload_triple_helmet.jpg"/>
           <p:cNvPicPr>
             <a:picLocks noChangeAspect="1"/>
           </p:cNvPicPr>
@@ -6726,8 +10283,8 @@
         </p:blipFill>
         <p:spPr>
           <a:xfrm>
-            <a:off x="3459480" y="1783080"/>
-            <a:ext cx="5242560" cy="3931920"/>
+            <a:off x="3131820" y="1783080"/>
+            <a:ext cx="5897880" cy="3931920"/>
           </a:xfrm>
           <a:prstGeom prst="rect">
             <a:avLst/>
@@ -6762,43 +10319,43 @@
               </a:spcAft>
             </a:pPr>
             <a:r>
-              <a:rPr sz="1450" b="0">
+              <a:rPr sz="1400" b="0">
                 <a:solidFill>
                   <a:srgbClr val="9FB3D1"/>
                 </a:solidFill>
                 <a:latin typeface="Segoe UI"/>
               </a:rPr>
-              <a:t>Live Sri Lankan road: 18 vehicles tracked, plate </a:t>
-            </a:r>
-            <a:r>
-              <a:rPr sz="1450" b="1">
+              <a:t>Both violations detected from a </a:t>
+            </a:r>
+            <a:r>
+              <a:rPr sz="1400" b="1">
                 <a:solidFill>
                   <a:srgbClr val="9FB3D1"/>
                 </a:solidFill>
                 <a:latin typeface="Segoe UI"/>
               </a:rPr>
-              <a:t>AAG 4002</a:t>
-            </a:r>
-            <a:r>
-              <a:rPr sz="1450" b="0">
+              <a:t>single uploaded photograph</a:t>
+            </a:r>
+            <a:r>
+              <a:rPr sz="1400" b="0">
                 <a:solidFill>
                   <a:srgbClr val="9FB3D1"/>
                 </a:solidFill>
                 <a:latin typeface="Segoe UI"/>
               </a:rPr>
-              <a:t> read and confirmed. A plate counts only when </a:t>
-            </a:r>
-            <a:r>
-              <a:rPr sz="1450" b="1">
+              <a:t>, producing </a:t>
+            </a:r>
+            <a:r>
+              <a:rPr sz="1400" b="1">
                 <a:solidFill>
                   <a:srgbClr val="9FB3D1"/>
                 </a:solidFill>
                 <a:latin typeface="Segoe UI"/>
               </a:rPr>
-              <a:t>three separate reads agree</a:t>
-            </a:r>
-            <a:r>
-              <a:rPr sz="1450" b="0">
+              <a:t>two separate challans</a:t>
+            </a:r>
+            <a:r>
+              <a:rPr sz="1400" b="0">
                 <a:solidFill>
                   <a:srgbClr val="9FB3D1"/>
                 </a:solidFill>
@@ -6913,7 +10470,7 @@
                 </a:solidFill>
                 <a:latin typeface="Segoe UI"/>
               </a:rPr>
-              <a:t>THE DIFFERENTIATOR</a:t>
+              <a:t>VERIFIED SYSTEM OUTPUT</a:t>
             </a:r>
           </a:p>
         </p:txBody>
@@ -6952,21 +10509,45 @@
                 </a:solidFill>
                 <a:latin typeface="Segoe UI"/>
               </a:rPr>
-              <a:t>Why it can be trusted</a:t>
-            </a:r>
-          </a:p>
-        </p:txBody>
-      </p:sp>
-      <p:sp>
-        <p:nvSpPr>
-          <p:cNvPr id="5" name="TextBox 4"/>
+              <a:t>Proof: number-plate recognition</a:t>
+            </a:r>
+          </a:p>
+        </p:txBody>
+      </p:sp>
+      <p:pic>
+        <p:nvPicPr>
+          <p:cNvPr id="5" name="Picture 4" descr="05_anpr_sri_lanka_0.jpg"/>
+          <p:cNvPicPr>
+            <a:picLocks noChangeAspect="1"/>
+          </p:cNvPicPr>
+          <p:nvPr/>
+        </p:nvPicPr>
+        <p:blipFill>
+          <a:blip r:embed="rId2"/>
+          <a:stretch>
+            <a:fillRect/>
+          </a:stretch>
+        </p:blipFill>
+        <p:spPr>
+          <a:xfrm>
+            <a:off x="3459480" y="1783080"/>
+            <a:ext cx="5242560" cy="3931920"/>
+          </a:xfrm>
+          <a:prstGeom prst="rect">
+            <a:avLst/>
+          </a:prstGeom>
+        </p:spPr>
+      </p:pic>
+      <p:sp>
+        <p:nvSpPr>
+          <p:cNvPr id="6" name="TextBox 5"/>
           <p:cNvSpPr txBox="1"/>
           <p:nvPr/>
         </p:nvSpPr>
         <p:spPr>
           <a:xfrm>
-            <a:off x="731520" y="1783080"/>
-            <a:ext cx="10607040" cy="3108960"/>
+            <a:off x="731520" y="5897880"/>
+            <a:ext cx="10607040" cy="731520"/>
           </a:xfrm>
           <a:prstGeom prst="rect">
             <a:avLst/>
@@ -6979,500 +10560,55 @@
           </a:bodyPr>
           <a:lstStyle/>
           <a:p>
-            <a:pPr algn="l">
-              <a:spcAft>
-                <a:spcPts val="1300"/>
-              </a:spcAft>
-            </a:pPr>
-            <a:r>
-              <a:rPr sz="1750" b="1">
-                <a:solidFill>
-                  <a:srgbClr val="F2F6FF"/>
-                </a:solidFill>
-                <a:latin typeface="Segoe UI"/>
-              </a:rPr>
-              <a:t>Parked vehicles are never fined</a:t>
-            </a:r>
-            <a:r>
-              <a:rPr sz="1750" b="0">
-                <a:solidFill>
-                  <a:srgbClr val="F2F6FF"/>
-                </a:solidFill>
-                <a:latin typeface="Segoe UI"/>
-              </a:rPr>
-              <a:t> - 41 vehicles, 0 violations on a parked-motorcycle clip.</a:t>
-            </a:r>
-          </a:p>
-          <a:p>
-            <a:pPr algn="l">
-              <a:spcAft>
-                <a:spcPts val="1300"/>
-              </a:spcAft>
-            </a:pPr>
-            <a:r>
-              <a:rPr sz="1750" b="1">
-                <a:solidFill>
-                  <a:srgbClr val="F2F6FF"/>
-                </a:solidFill>
-                <a:latin typeface="Segoe UI"/>
-              </a:rPr>
-              <a:t>Unreadable plates say UNREADABLE</a:t>
-            </a:r>
-            <a:r>
-              <a:rPr sz="1750" b="0">
-                <a:solidFill>
-                  <a:srgbClr val="F2F6FF"/>
-                </a:solidFill>
-                <a:latin typeface="Segoe UI"/>
-              </a:rPr>
-              <a:t> - a number is never invented.</a:t>
-            </a:r>
-          </a:p>
-          <a:p>
-            <a:pPr algn="l">
-              <a:spcAft>
-                <a:spcPts val="1300"/>
-              </a:spcAft>
-            </a:pPr>
-            <a:r>
-              <a:rPr sz="1750" b="1">
-                <a:solidFill>
-                  <a:srgbClr val="F2F6FF"/>
-                </a:solidFill>
-                <a:latin typeface="Segoe UI"/>
-              </a:rPr>
-              <a:t>No calibration means no speed shown</a:t>
-            </a:r>
-            <a:r>
-              <a:rPr sz="1750" b="0">
-                <a:solidFill>
-                  <a:srgbClr val="F2F6FF"/>
-                </a:solidFill>
-                <a:latin typeface="Segoe UI"/>
-              </a:rPr>
-              <a:t>, rather than a misleading guess.</a:t>
-            </a:r>
-          </a:p>
-          <a:p>
-            <a:pPr algn="l">
-              <a:spcAft>
-                <a:spcPts val="1300"/>
-              </a:spcAft>
-            </a:pPr>
-            <a:r>
-              <a:rPr sz="1750" b="1">
-                <a:solidFill>
-                  <a:srgbClr val="F2F6FF"/>
-                </a:solidFill>
-                <a:latin typeface="Segoe UI"/>
-              </a:rPr>
-              <a:t>A violation must persist across frames</a:t>
-            </a:r>
-            <a:r>
-              <a:rPr sz="1750" b="0">
-                <a:solidFill>
-                  <a:srgbClr val="F2F6FF"/>
-                </a:solidFill>
-                <a:latin typeface="Segoe UI"/>
-              </a:rPr>
-              <a:t> - one-frame anomalies are rejected.</a:t>
-            </a:r>
-          </a:p>
-          <a:p>
-            <a:pPr algn="l">
-              <a:spcAft>
-                <a:spcPts val="1300"/>
-              </a:spcAft>
-            </a:pPr>
-            <a:r>
-              <a:rPr sz="1750" b="1">
-                <a:solidFill>
-                  <a:srgbClr val="F2F6FF"/>
-                </a:solidFill>
-                <a:latin typeface="Segoe UI"/>
-              </a:rPr>
-              <a:t>No mock data exists</a:t>
-            </a:r>
-            <a:r>
-              <a:rPr sz="1750" b="0">
-                <a:solidFill>
-                  <a:srgbClr val="F2F6FF"/>
-                </a:solidFill>
-                <a:latin typeface="Segoe UI"/>
-              </a:rPr>
-              <a:t> anywhere in the product.</a:t>
-            </a:r>
-          </a:p>
-        </p:txBody>
-      </p:sp>
-      <p:sp>
-        <p:nvSpPr>
-          <p:cNvPr id="6" name="Rectangle 5"/>
-          <p:cNvSpPr/>
-          <p:nvPr/>
-        </p:nvSpPr>
-        <p:spPr>
-          <a:xfrm>
-            <a:off x="822960" y="5074920"/>
-            <a:ext cx="3291840" cy="1234440"/>
-          </a:xfrm>
-          <a:prstGeom prst="rect">
-            <a:avLst/>
-          </a:prstGeom>
-          <a:solidFill>
-            <a:srgbClr val="111E3D"/>
-          </a:solidFill>
-          <a:ln>
-            <a:solidFill>
-              <a:srgbClr val="294A8F"/>
-            </a:solidFill>
-          </a:ln>
-          <a:effectLst/>
-        </p:spPr>
-        <p:style>
-          <a:lnRef idx="1">
-            <a:schemeClr val="accent1"/>
-          </a:lnRef>
-          <a:fillRef idx="3">
-            <a:schemeClr val="accent1"/>
-          </a:fillRef>
-          <a:effectRef idx="2">
-            <a:schemeClr val="accent1"/>
-          </a:effectRef>
-          <a:fontRef idx="minor">
-            <a:schemeClr val="lt1"/>
-          </a:fontRef>
-        </p:style>
-        <p:txBody>
-          <a:bodyPr rtlCol="0" anchor="ctr"/>
-          <a:lstStyle/>
-          <a:p>
-            <a:pPr algn="ctr"/>
-          </a:p>
-        </p:txBody>
-      </p:sp>
-      <p:sp>
-        <p:nvSpPr>
-          <p:cNvPr id="7" name="TextBox 6"/>
-          <p:cNvSpPr txBox="1"/>
-          <p:nvPr/>
-        </p:nvSpPr>
-        <p:spPr>
-          <a:xfrm>
-            <a:off x="822960" y="5202936"/>
-            <a:ext cx="3291840" cy="548640"/>
-          </a:xfrm>
-          <a:prstGeom prst="rect">
-            <a:avLst/>
-          </a:prstGeom>
-          <a:noFill/>
-        </p:spPr>
-        <p:txBody>
-          <a:bodyPr wrap="square">
-            <a:spAutoFit/>
-          </a:bodyPr>
-          <a:lstStyle/>
-          <a:p>
             <a:pPr algn="ctr">
               <a:spcAft>
                 <a:spcPts val="600"/>
               </a:spcAft>
             </a:pPr>
             <a:r>
-              <a:rPr sz="3000" b="1">
-                <a:solidFill>
-                  <a:srgbClr val="FFC74D"/>
-                </a:solidFill>
-                <a:latin typeface="Segoe UI"/>
-              </a:rPr>
-              <a:t>6</a:t>
-            </a:r>
-          </a:p>
-        </p:txBody>
-      </p:sp>
-      <p:sp>
-        <p:nvSpPr>
-          <p:cNvPr id="8" name="TextBox 7"/>
-          <p:cNvSpPr txBox="1"/>
-          <p:nvPr/>
-        </p:nvSpPr>
-        <p:spPr>
-          <a:xfrm>
-            <a:off x="822960" y="5788152"/>
-            <a:ext cx="3291840" cy="457200"/>
-          </a:xfrm>
-          <a:prstGeom prst="rect">
-            <a:avLst/>
-          </a:prstGeom>
-          <a:noFill/>
-        </p:spPr>
-        <p:txBody>
-          <a:bodyPr wrap="square">
-            <a:spAutoFit/>
-          </a:bodyPr>
-          <a:lstStyle/>
-          <a:p>
-            <a:pPr algn="ctr">
-              <a:spcAft>
-                <a:spcPts val="600"/>
-              </a:spcAft>
-            </a:pPr>
-            <a:r>
-              <a:rPr sz="1150" b="0">
+              <a:rPr sz="1400" b="0">
                 <a:solidFill>
                   <a:srgbClr val="9FB3D1"/>
                 </a:solidFill>
                 <a:latin typeface="Segoe UI"/>
               </a:rPr>
-              <a:t>false-positive defects found and fixed</a:t>
-            </a:r>
-          </a:p>
-        </p:txBody>
-      </p:sp>
-      <p:sp>
-        <p:nvSpPr>
-          <p:cNvPr id="9" name="Rectangle 8"/>
-          <p:cNvSpPr/>
-          <p:nvPr/>
-        </p:nvSpPr>
-        <p:spPr>
-          <a:xfrm>
-            <a:off x="4389120" y="5074920"/>
-            <a:ext cx="3291840" cy="1234440"/>
-          </a:xfrm>
-          <a:prstGeom prst="rect">
-            <a:avLst/>
-          </a:prstGeom>
-          <a:solidFill>
-            <a:srgbClr val="111E3D"/>
-          </a:solidFill>
-          <a:ln>
-            <a:solidFill>
-              <a:srgbClr val="294A8F"/>
-            </a:solidFill>
-          </a:ln>
-          <a:effectLst/>
-        </p:spPr>
-        <p:style>
-          <a:lnRef idx="1">
-            <a:schemeClr val="accent1"/>
-          </a:lnRef>
-          <a:fillRef idx="3">
-            <a:schemeClr val="accent1"/>
-          </a:fillRef>
-          <a:effectRef idx="2">
-            <a:schemeClr val="accent1"/>
-          </a:effectRef>
-          <a:fontRef idx="minor">
-            <a:schemeClr val="lt1"/>
-          </a:fontRef>
-        </p:style>
-        <p:txBody>
-          <a:bodyPr rtlCol="0" anchor="ctr"/>
-          <a:lstStyle/>
-          <a:p>
-            <a:pPr algn="ctr"/>
-          </a:p>
-        </p:txBody>
-      </p:sp>
-      <p:sp>
-        <p:nvSpPr>
-          <p:cNvPr id="10" name="TextBox 9"/>
-          <p:cNvSpPr txBox="1"/>
-          <p:nvPr/>
-        </p:nvSpPr>
-        <p:spPr>
-          <a:xfrm>
-            <a:off x="4389120" y="5202936"/>
-            <a:ext cx="3291840" cy="548640"/>
-          </a:xfrm>
-          <a:prstGeom prst="rect">
-            <a:avLst/>
-          </a:prstGeom>
-          <a:noFill/>
-        </p:spPr>
-        <p:txBody>
-          <a:bodyPr wrap="square">
-            <a:spAutoFit/>
-          </a:bodyPr>
-          <a:lstStyle/>
-          <a:p>
-            <a:pPr algn="ctr">
-              <a:spcAft>
-                <a:spcPts val="600"/>
-              </a:spcAft>
-            </a:pPr>
-            <a:r>
-              <a:rPr sz="3000" b="1">
-                <a:solidFill>
-                  <a:srgbClr val="4ADE80"/>
-                </a:solidFill>
-                <a:latin typeface="Segoe UI"/>
-              </a:rPr>
-              <a:t>79</a:t>
-            </a:r>
-          </a:p>
-        </p:txBody>
-      </p:sp>
-      <p:sp>
-        <p:nvSpPr>
-          <p:cNvPr id="11" name="TextBox 10"/>
-          <p:cNvSpPr txBox="1"/>
-          <p:nvPr/>
-        </p:nvSpPr>
-        <p:spPr>
-          <a:xfrm>
-            <a:off x="4389120" y="5788152"/>
-            <a:ext cx="3291840" cy="457200"/>
-          </a:xfrm>
-          <a:prstGeom prst="rect">
-            <a:avLst/>
-          </a:prstGeom>
-          <a:noFill/>
-        </p:spPr>
-        <p:txBody>
-          <a:bodyPr wrap="square">
-            <a:spAutoFit/>
-          </a:bodyPr>
-          <a:lstStyle/>
-          <a:p>
-            <a:pPr algn="ctr">
-              <a:spcAft>
-                <a:spcPts val="600"/>
-              </a:spcAft>
-            </a:pPr>
-            <a:r>
-              <a:rPr sz="1150" b="0">
+              <a:t>Live Sri Lankan road: 18 vehicles tracked, plate </a:t>
+            </a:r>
+            <a:r>
+              <a:rPr sz="1400" b="1">
                 <a:solidFill>
                   <a:srgbClr val="9FB3D1"/>
                 </a:solidFill>
                 <a:latin typeface="Segoe UI"/>
               </a:rPr>
-              <a:t>automated tests passing</a:t>
-            </a:r>
-          </a:p>
-        </p:txBody>
-      </p:sp>
-      <p:sp>
-        <p:nvSpPr>
-          <p:cNvPr id="12" name="Rectangle 11"/>
-          <p:cNvSpPr/>
-          <p:nvPr/>
-        </p:nvSpPr>
-        <p:spPr>
-          <a:xfrm>
-            <a:off x="7955279" y="5074920"/>
-            <a:ext cx="3291840" cy="1234440"/>
-          </a:xfrm>
-          <a:prstGeom prst="rect">
-            <a:avLst/>
-          </a:prstGeom>
-          <a:solidFill>
-            <a:srgbClr val="111E3D"/>
-          </a:solidFill>
-          <a:ln>
-            <a:solidFill>
-              <a:srgbClr val="294A8F"/>
-            </a:solidFill>
-          </a:ln>
-          <a:effectLst/>
-        </p:spPr>
-        <p:style>
-          <a:lnRef idx="1">
-            <a:schemeClr val="accent1"/>
-          </a:lnRef>
-          <a:fillRef idx="3">
-            <a:schemeClr val="accent1"/>
-          </a:fillRef>
-          <a:effectRef idx="2">
-            <a:schemeClr val="accent1"/>
-          </a:effectRef>
-          <a:fontRef idx="minor">
-            <a:schemeClr val="lt1"/>
-          </a:fontRef>
-        </p:style>
-        <p:txBody>
-          <a:bodyPr rtlCol="0" anchor="ctr"/>
-          <a:lstStyle/>
-          <a:p>
-            <a:pPr algn="ctr"/>
-          </a:p>
-        </p:txBody>
-      </p:sp>
-      <p:sp>
-        <p:nvSpPr>
-          <p:cNvPr id="13" name="TextBox 12"/>
-          <p:cNvSpPr txBox="1"/>
-          <p:nvPr/>
-        </p:nvSpPr>
-        <p:spPr>
-          <a:xfrm>
-            <a:off x="7955279" y="5202936"/>
-            <a:ext cx="3291840" cy="548640"/>
-          </a:xfrm>
-          <a:prstGeom prst="rect">
-            <a:avLst/>
-          </a:prstGeom>
-          <a:noFill/>
-        </p:spPr>
-        <p:txBody>
-          <a:bodyPr wrap="square">
-            <a:spAutoFit/>
-          </a:bodyPr>
-          <a:lstStyle/>
-          <a:p>
-            <a:pPr algn="ctr">
-              <a:spcAft>
-                <a:spcPts val="600"/>
-              </a:spcAft>
-            </a:pPr>
-            <a:r>
-              <a:rPr sz="3000" b="1">
-                <a:solidFill>
-                  <a:srgbClr val="22D3EE"/>
-                </a:solidFill>
-                <a:latin typeface="Segoe UI"/>
-              </a:rPr>
-              <a:t>0</a:t>
-            </a:r>
-          </a:p>
-        </p:txBody>
-      </p:sp>
-      <p:sp>
-        <p:nvSpPr>
-          <p:cNvPr id="14" name="TextBox 13"/>
-          <p:cNvSpPr txBox="1"/>
-          <p:nvPr/>
-        </p:nvSpPr>
-        <p:spPr>
-          <a:xfrm>
-            <a:off x="7955279" y="5788152"/>
-            <a:ext cx="3291840" cy="457200"/>
-          </a:xfrm>
-          <a:prstGeom prst="rect">
-            <a:avLst/>
-          </a:prstGeom>
-          <a:noFill/>
-        </p:spPr>
-        <p:txBody>
-          <a:bodyPr wrap="square">
-            <a:spAutoFit/>
-          </a:bodyPr>
-          <a:lstStyle/>
-          <a:p>
-            <a:pPr algn="ctr">
-              <a:spcAft>
-                <a:spcPts val="600"/>
-              </a:spcAft>
-            </a:pPr>
-            <a:r>
-              <a:rPr sz="1150" b="0">
+              <a:t>AAG 4002</a:t>
+            </a:r>
+            <a:r>
+              <a:rPr sz="1400" b="0">
                 <a:solidFill>
                   <a:srgbClr val="9FB3D1"/>
                 </a:solidFill>
                 <a:latin typeface="Segoe UI"/>
               </a:rPr>
-              <a:t>violations on parked bikes</a:t>
+              <a:t> read and confirmed. A plate counts only when </a:t>
+            </a:r>
+            <a:r>
+              <a:rPr sz="1400" b="1">
+                <a:solidFill>
+                  <a:srgbClr val="9FB3D1"/>
+                </a:solidFill>
+                <a:latin typeface="Segoe UI"/>
+              </a:rPr>
+              <a:t>three separate reads agree</a:t>
+            </a:r>
+            <a:r>
+              <a:rPr sz="1400" b="0">
+                <a:solidFill>
+                  <a:srgbClr val="9FB3D1"/>
+                </a:solidFill>
+                <a:latin typeface="Segoe UI"/>
+              </a:rPr>
+              <a:t>.</a:t>
             </a:r>
           </a:p>
         </p:txBody>
@@ -7581,7 +10717,7 @@
                 </a:solidFill>
                 <a:latin typeface="Segoe UI"/>
               </a:rPr>
-              <a:t>ENGINEERING RIGOUR</a:t>
+              <a:t>INNOVATION AND UNIQUENESS</a:t>
             </a:r>
           </a:p>
         </p:txBody>
@@ -7620,21 +10756,67 @@
                 </a:solidFill>
                 <a:latin typeface="Segoe UI"/>
               </a:rPr>
-              <a:t>Found by testing on real footage</a:t>
-            </a:r>
-          </a:p>
-        </p:txBody>
-      </p:sp>
-      <p:sp>
-        <p:nvSpPr>
-          <p:cNvPr id="5" name="TextBox 4"/>
+              <a:t>What makes it different</a:t>
+            </a:r>
+          </a:p>
+        </p:txBody>
+      </p:sp>
+      <p:sp>
+        <p:nvSpPr>
+          <p:cNvPr id="5" name="Rectangle 4"/>
+          <p:cNvSpPr/>
+          <p:nvPr/>
+        </p:nvSpPr>
+        <p:spPr>
+          <a:xfrm>
+            <a:off x="731520" y="1828800"/>
+            <a:ext cx="5212080" cy="3931920"/>
+          </a:xfrm>
+          <a:prstGeom prst="rect">
+            <a:avLst/>
+          </a:prstGeom>
+          <a:solidFill>
+            <a:srgbClr val="111E3D"/>
+          </a:solidFill>
+          <a:ln>
+            <a:solidFill>
+              <a:srgbClr val="0B1428"/>
+            </a:solidFill>
+          </a:ln>
+          <a:effectLst/>
+        </p:spPr>
+        <p:style>
+          <a:lnRef idx="1">
+            <a:schemeClr val="accent1"/>
+          </a:lnRef>
+          <a:fillRef idx="3">
+            <a:schemeClr val="accent1"/>
+          </a:fillRef>
+          <a:effectRef idx="2">
+            <a:schemeClr val="accent1"/>
+          </a:effectRef>
+          <a:fontRef idx="minor">
+            <a:schemeClr val="lt1"/>
+          </a:fontRef>
+        </p:style>
+        <p:txBody>
+          <a:bodyPr rtlCol="0" anchor="ctr"/>
+          <a:lstStyle/>
+          <a:p>
+            <a:pPr algn="ctr"/>
+          </a:p>
+        </p:txBody>
+      </p:sp>
+      <p:sp>
+        <p:nvSpPr>
+          <p:cNvPr id="6" name="TextBox 5"/>
           <p:cNvSpPr txBox="1"/>
           <p:nvPr/>
         </p:nvSpPr>
         <p:spPr>
           <a:xfrm>
-            <a:off x="777240" y="1874519"/>
-            <a:ext cx="4846320" cy="731520"/>
+            <a:off x="1005840" y="2029968"/>
+            <a:ext cx="4663440" cy="457200"/>
           </a:xfrm>
           <a:prstGeom prst="rect">
             <a:avLst/>
@@ -7653,27 +10835,27 @@
               </a:spcAft>
             </a:pPr>
             <a:r>
-              <a:rPr sz="1500" b="1">
-                <a:solidFill>
-                  <a:srgbClr val="F2F6FF"/>
-                </a:solidFill>
-                <a:latin typeface="Segoe UI"/>
-              </a:rPr>
-              <a:t>Moving vehicles fined for parking</a:t>
-            </a:r>
-          </a:p>
-        </p:txBody>
-      </p:sp>
-      <p:sp>
-        <p:nvSpPr>
-          <p:cNvPr id="6" name="TextBox 5"/>
+              <a:rPr sz="1700" b="1">
+                <a:solidFill>
+                  <a:srgbClr val="22D3EE"/>
+                </a:solidFill>
+                <a:latin typeface="Segoe UI"/>
+              </a:rPr>
+              <a:t>Typical systems</a:t>
+            </a:r>
+          </a:p>
+        </p:txBody>
+      </p:sp>
+      <p:sp>
+        <p:nvSpPr>
+          <p:cNvPr id="7" name="TextBox 6"/>
           <p:cNvSpPr txBox="1"/>
           <p:nvPr/>
         </p:nvSpPr>
         <p:spPr>
           <a:xfrm>
-            <a:off x="5852160" y="1874519"/>
-            <a:ext cx="5669280" cy="731520"/>
+            <a:off x="1005840" y="2606040"/>
+            <a:ext cx="4663440" cy="2926080"/>
           </a:xfrm>
           <a:prstGeom prst="rect">
             <a:avLst/>
@@ -7688,31 +10870,125 @@
           <a:p>
             <a:pPr algn="l">
               <a:spcAft>
-                <a:spcPts val="600"/>
+                <a:spcPts val="1000"/>
               </a:spcAft>
             </a:pPr>
             <a:r>
               <a:rPr sz="1350" b="0">
                 <a:solidFill>
-                  <a:srgbClr val="9FB3D1"/>
-                </a:solidFill>
-                <a:latin typeface="Segoe UI"/>
-              </a:rPr>
-              <a:t>Motion gate misjudged 89% of moving vehicles as stationary</a:t>
-            </a:r>
-          </a:p>
-        </p:txBody>
-      </p:sp>
-      <p:sp>
-        <p:nvSpPr>
-          <p:cNvPr id="7" name="TextBox 6"/>
+                  <a:srgbClr val="F2F6FF"/>
+                </a:solidFill>
+                <a:latin typeface="Segoe UI"/>
+              </a:rPr>
+              <a:t>Single purpose - a speed camera, or a plate reader.</a:t>
+            </a:r>
+          </a:p>
+          <a:p>
+            <a:pPr algn="l">
+              <a:spcAft>
+                <a:spcPts val="1000"/>
+              </a:spcAft>
+            </a:pPr>
+            <a:r>
+              <a:rPr sz="1350" b="0">
+                <a:solidFill>
+                  <a:srgbClr val="F2F6FF"/>
+                </a:solidFill>
+                <a:latin typeface="Segoe UI"/>
+              </a:rPr>
+              <a:t>Report a number with no proof attached.</a:t>
+            </a:r>
+          </a:p>
+          <a:p>
+            <a:pPr algn="l">
+              <a:spcAft>
+                <a:spcPts val="1000"/>
+              </a:spcAft>
+            </a:pPr>
+            <a:r>
+              <a:rPr sz="1350" b="0">
+                <a:solidFill>
+                  <a:srgbClr val="F2F6FF"/>
+                </a:solidFill>
+                <a:latin typeface="Segoe UI"/>
+              </a:rPr>
+              <a:t>Demo well, then fail on real roads with false positives.</a:t>
+            </a:r>
+          </a:p>
+          <a:p>
+            <a:pPr algn="l">
+              <a:spcAft>
+                <a:spcPts val="1000"/>
+              </a:spcAft>
+            </a:pPr>
+            <a:r>
+              <a:rPr sz="1350" b="0">
+                <a:solidFill>
+                  <a:srgbClr val="F2F6FF"/>
+                </a:solidFill>
+                <a:latin typeface="Segoe UI"/>
+              </a:rPr>
+              <a:t>Need dedicated hardware at each site.</a:t>
+            </a:r>
+          </a:p>
+        </p:txBody>
+      </p:sp>
+      <p:sp>
+        <p:nvSpPr>
+          <p:cNvPr id="8" name="Rectangle 7"/>
+          <p:cNvSpPr/>
+          <p:nvPr/>
+        </p:nvSpPr>
+        <p:spPr>
+          <a:xfrm>
+            <a:off x="6309359" y="1828800"/>
+            <a:ext cx="5212080" cy="3931920"/>
+          </a:xfrm>
+          <a:prstGeom prst="rect">
+            <a:avLst/>
+          </a:prstGeom>
+          <a:solidFill>
+            <a:srgbClr val="111E3D"/>
+          </a:solidFill>
+          <a:ln>
+            <a:solidFill>
+              <a:srgbClr val="0B1428"/>
+            </a:solidFill>
+          </a:ln>
+          <a:effectLst/>
+        </p:spPr>
+        <p:style>
+          <a:lnRef idx="1">
+            <a:schemeClr val="accent1"/>
+          </a:lnRef>
+          <a:fillRef idx="3">
+            <a:schemeClr val="accent1"/>
+          </a:fillRef>
+          <a:effectRef idx="2">
+            <a:schemeClr val="accent1"/>
+          </a:effectRef>
+          <a:fontRef idx="minor">
+            <a:schemeClr val="lt1"/>
+          </a:fontRef>
+        </p:style>
+        <p:txBody>
+          <a:bodyPr rtlCol="0" anchor="ctr"/>
+          <a:lstStyle/>
+          <a:p>
+            <a:pPr algn="ctr"/>
+          </a:p>
+        </p:txBody>
+      </p:sp>
+      <p:sp>
+        <p:nvSpPr>
+          <p:cNvPr id="9" name="TextBox 8"/>
           <p:cNvSpPr txBox="1"/>
           <p:nvPr/>
         </p:nvSpPr>
         <p:spPr>
           <a:xfrm>
-            <a:off x="777240" y="2743200"/>
-            <a:ext cx="4846320" cy="731520"/>
+            <a:off x="6583679" y="2029968"/>
+            <a:ext cx="4663440" cy="457200"/>
           </a:xfrm>
           <a:prstGeom prst="rect">
             <a:avLst/>
@@ -7731,27 +11007,27 @@
               </a:spcAft>
             </a:pPr>
             <a:r>
-              <a:rPr sz="1500" b="1">
-                <a:solidFill>
-                  <a:srgbClr val="F2F6FF"/>
-                </a:solidFill>
-                <a:latin typeface="Segoe UI"/>
-              </a:rPr>
-              <a:t>Helmeted riders accused of no helmet</a:t>
-            </a:r>
-          </a:p>
-        </p:txBody>
-      </p:sp>
-      <p:sp>
-        <p:nvSpPr>
-          <p:cNvPr id="8" name="TextBox 7"/>
+              <a:rPr sz="1700" b="1">
+                <a:solidFill>
+                  <a:srgbClr val="22D3EE"/>
+                </a:solidFill>
+                <a:latin typeface="Segoe UI"/>
+              </a:rPr>
+              <a:t>Ours</a:t>
+            </a:r>
+          </a:p>
+        </p:txBody>
+      </p:sp>
+      <p:sp>
+        <p:nvSpPr>
+          <p:cNvPr id="10" name="TextBox 9"/>
           <p:cNvSpPr txBox="1"/>
           <p:nvPr/>
         </p:nvSpPr>
         <p:spPr>
           <a:xfrm>
-            <a:off x="5852160" y="2743200"/>
-            <a:ext cx="5669280" cy="731520"/>
+            <a:off x="6583679" y="2606040"/>
+            <a:ext cx="4663440" cy="2926080"/>
           </a:xfrm>
           <a:prstGeom prst="rect">
             <a:avLst/>
@@ -7766,290 +11042,101 @@
           <a:p>
             <a:pPr algn="l">
               <a:spcAft>
-                <a:spcPts val="600"/>
-              </a:spcAft>
-            </a:pPr>
+                <a:spcPts val="1000"/>
+              </a:spcAft>
+            </a:pPr>
+            <a:r>
+              <a:rPr sz="1350" b="1">
+                <a:solidFill>
+                  <a:srgbClr val="F2F6FF"/>
+                </a:solidFill>
+                <a:latin typeface="Segoe UI"/>
+              </a:rPr>
+              <a:t>Nine rules in one pipeline</a:t>
+            </a:r>
             <a:r>
               <a:rPr sz="1350" b="0">
                 <a:solidFill>
-                  <a:srgbClr val="9FB3D1"/>
-                </a:solidFill>
-                <a:latin typeface="Segoe UI"/>
-              </a:rPr>
-              <a:t>Helmet crop caught neighbouring riders</a:t>
-            </a:r>
-          </a:p>
-        </p:txBody>
-      </p:sp>
-      <p:sp>
-        <p:nvSpPr>
-          <p:cNvPr id="9" name="TextBox 8"/>
-          <p:cNvSpPr txBox="1"/>
-          <p:nvPr/>
-        </p:nvSpPr>
-        <p:spPr>
-          <a:xfrm>
-            <a:off x="777240" y="3611879"/>
-            <a:ext cx="4846320" cy="731520"/>
-          </a:xfrm>
-          <a:prstGeom prst="rect">
-            <a:avLst/>
-          </a:prstGeom>
-          <a:noFill/>
-        </p:spPr>
-        <p:txBody>
-          <a:bodyPr wrap="square">
-            <a:spAutoFit/>
-          </a:bodyPr>
-          <a:lstStyle/>
-          <a:p>
-            <a:pPr algn="l">
-              <a:spcAft>
-                <a:spcPts val="600"/>
-              </a:spcAft>
-            </a:pPr>
-            <a:r>
-              <a:rPr sz="1500" b="1">
-                <a:solidFill>
-                  <a:srgbClr val="F2F6FF"/>
-                </a:solidFill>
-                <a:latin typeface="Segoe UI"/>
-              </a:rPr>
-              <a:t>Bare heads marked compliant</a:t>
-            </a:r>
-          </a:p>
-        </p:txBody>
-      </p:sp>
-      <p:sp>
-        <p:nvSpPr>
-          <p:cNvPr id="10" name="TextBox 9"/>
-          <p:cNvSpPr txBox="1"/>
-          <p:nvPr/>
-        </p:nvSpPr>
-        <p:spPr>
-          <a:xfrm>
-            <a:off x="5852160" y="3611879"/>
-            <a:ext cx="5669280" cy="731520"/>
-          </a:xfrm>
-          <a:prstGeom prst="rect">
-            <a:avLst/>
-          </a:prstGeom>
-          <a:noFill/>
-        </p:spPr>
-        <p:txBody>
-          <a:bodyPr wrap="square">
-            <a:spAutoFit/>
-          </a:bodyPr>
-          <a:lstStyle/>
-          <a:p>
-            <a:pPr algn="l">
-              <a:spcAft>
-                <a:spcPts val="600"/>
-              </a:spcAft>
-            </a:pPr>
+                  <a:srgbClr val="F2F6FF"/>
+                </a:solidFill>
+                <a:latin typeface="Segoe UI"/>
+              </a:rPr>
+              <a:t>, on any camera.</a:t>
+            </a:r>
+          </a:p>
+          <a:p>
+            <a:pPr algn="l">
+              <a:spcAft>
+                <a:spcPts val="1000"/>
+              </a:spcAft>
+            </a:pPr>
+            <a:r>
+              <a:rPr sz="1350" b="1">
+                <a:solidFill>
+                  <a:srgbClr val="F2F6FF"/>
+                </a:solidFill>
+                <a:latin typeface="Segoe UI"/>
+              </a:rPr>
+              <a:t>Evidence-first</a:t>
+            </a:r>
             <a:r>
               <a:rPr sz="1350" b="0">
                 <a:solidFill>
-                  <a:srgbClr val="9FB3D1"/>
-                </a:solidFill>
-                <a:latin typeface="Segoe UI"/>
-              </a:rPr>
-              <a:t>Compliance threshold lower than the accusation threshold</a:t>
-            </a:r>
-          </a:p>
-        </p:txBody>
-      </p:sp>
-      <p:sp>
-        <p:nvSpPr>
-          <p:cNvPr id="11" name="TextBox 10"/>
-          <p:cNvSpPr txBox="1"/>
-          <p:nvPr/>
-        </p:nvSpPr>
-        <p:spPr>
-          <a:xfrm>
-            <a:off x="777240" y="4480559"/>
-            <a:ext cx="4846320" cy="731520"/>
-          </a:xfrm>
-          <a:prstGeom prst="rect">
-            <a:avLst/>
-          </a:prstGeom>
-          <a:noFill/>
-        </p:spPr>
-        <p:txBody>
-          <a:bodyPr wrap="square">
-            <a:spAutoFit/>
-          </a:bodyPr>
-          <a:lstStyle/>
-          <a:p>
-            <a:pPr algn="l">
-              <a:spcAft>
-                <a:spcPts val="600"/>
-              </a:spcAft>
-            </a:pPr>
-            <a:r>
-              <a:rPr sz="1500" b="1">
-                <a:solidFill>
-                  <a:srgbClr val="F2F6FF"/>
-                </a:solidFill>
-                <a:latin typeface="Segoe UI"/>
-              </a:rPr>
-              <a:t>Stopped car fined for a red light</a:t>
-            </a:r>
-          </a:p>
-        </p:txBody>
-      </p:sp>
-      <p:sp>
-        <p:nvSpPr>
-          <p:cNvPr id="12" name="TextBox 11"/>
-          <p:cNvSpPr txBox="1"/>
-          <p:nvPr/>
-        </p:nvSpPr>
-        <p:spPr>
-          <a:xfrm>
-            <a:off x="5852160" y="4480559"/>
-            <a:ext cx="5669280" cy="731520"/>
-          </a:xfrm>
-          <a:prstGeom prst="rect">
-            <a:avLst/>
-          </a:prstGeom>
-          <a:noFill/>
-        </p:spPr>
-        <p:txBody>
-          <a:bodyPr wrap="square">
-            <a:spAutoFit/>
-          </a:bodyPr>
-          <a:lstStyle/>
-          <a:p>
-            <a:pPr algn="l">
-              <a:spcAft>
-                <a:spcPts val="600"/>
-              </a:spcAft>
-            </a:pPr>
+                  <a:srgbClr val="F2F6FF"/>
+                </a:solidFill>
+                <a:latin typeface="Segoe UI"/>
+              </a:rPr>
+              <a:t>: every fine carries a stamped photo and plate crop.</a:t>
+            </a:r>
+          </a:p>
+          <a:p>
+            <a:pPr algn="l">
+              <a:spcAft>
+                <a:spcPts val="1000"/>
+              </a:spcAft>
+            </a:pPr>
+            <a:r>
+              <a:rPr sz="1350" b="1">
+                <a:solidFill>
+                  <a:srgbClr val="F2F6FF"/>
+                </a:solidFill>
+                <a:latin typeface="Segoe UI"/>
+              </a:rPr>
+              <a:t>Engineered to refuse</a:t>
+            </a:r>
             <a:r>
               <a:rPr sz="1350" b="0">
                 <a:solidFill>
-                  <a:srgbClr val="9FB3D1"/>
-                </a:solidFill>
-                <a:latin typeface="Segoe UI"/>
-              </a:rPr>
-              <a:t>Signal from a different approach was applied to it</a:t>
-            </a:r>
-          </a:p>
-        </p:txBody>
-      </p:sp>
-      <p:sp>
-        <p:nvSpPr>
-          <p:cNvPr id="13" name="TextBox 12"/>
-          <p:cNvSpPr txBox="1"/>
-          <p:nvPr/>
-        </p:nvSpPr>
-        <p:spPr>
-          <a:xfrm>
-            <a:off x="777240" y="5349240"/>
-            <a:ext cx="4846320" cy="731520"/>
-          </a:xfrm>
-          <a:prstGeom prst="rect">
-            <a:avLst/>
-          </a:prstGeom>
-          <a:noFill/>
-        </p:spPr>
-        <p:txBody>
-          <a:bodyPr wrap="square">
-            <a:spAutoFit/>
-          </a:bodyPr>
-          <a:lstStyle/>
-          <a:p>
-            <a:pPr algn="l">
-              <a:spcAft>
-                <a:spcPts val="600"/>
-              </a:spcAft>
-            </a:pPr>
-            <a:r>
-              <a:rPr sz="1500" b="1">
-                <a:solidFill>
-                  <a:srgbClr val="F2F6FF"/>
-                </a:solidFill>
-                <a:latin typeface="Segoe UI"/>
-              </a:rPr>
-              <a:t>Wrong plate numbers on challans</a:t>
-            </a:r>
-          </a:p>
-        </p:txBody>
-      </p:sp>
-      <p:sp>
-        <p:nvSpPr>
-          <p:cNvPr id="14" name="TextBox 13"/>
-          <p:cNvSpPr txBox="1"/>
-          <p:nvPr/>
-        </p:nvSpPr>
-        <p:spPr>
-          <a:xfrm>
-            <a:off x="5852160" y="5349240"/>
-            <a:ext cx="5669280" cy="731520"/>
-          </a:xfrm>
-          <a:prstGeom prst="rect">
-            <a:avLst/>
-          </a:prstGeom>
-          <a:noFill/>
-        </p:spPr>
-        <p:txBody>
-          <a:bodyPr wrap="square">
-            <a:spAutoFit/>
-          </a:bodyPr>
-          <a:lstStyle/>
-          <a:p>
-            <a:pPr algn="l">
-              <a:spcAft>
-                <a:spcPts val="600"/>
-              </a:spcAft>
-            </a:pPr>
+                  <a:srgbClr val="F2F6FF"/>
+                </a:solidFill>
+                <a:latin typeface="Segoe UI"/>
+              </a:rPr>
+              <a:t> - it reports only what it can prove.</a:t>
+            </a:r>
+          </a:p>
+          <a:p>
+            <a:pPr algn="l">
+              <a:spcAft>
+                <a:spcPts val="1000"/>
+              </a:spcAft>
+            </a:pPr>
+            <a:r>
+              <a:rPr sz="1350" b="1">
+                <a:solidFill>
+                  <a:srgbClr val="F2F6FF"/>
+                </a:solidFill>
+                <a:latin typeface="Segoe UI"/>
+              </a:rPr>
+              <a:t>Runs on cameras that already exist</a:t>
+            </a:r>
             <a:r>
               <a:rPr sz="1350" b="0">
                 <a:solidFill>
-                  <a:srgbClr val="9FB3D1"/>
-                </a:solidFill>
-                <a:latin typeface="Segoe UI"/>
-              </a:rPr>
-              <a:t>Two agreeing OCR reads could both be wrong</a:t>
-            </a:r>
-          </a:p>
-        </p:txBody>
-      </p:sp>
-      <p:sp>
-        <p:nvSpPr>
-          <p:cNvPr id="15" name="TextBox 14"/>
-          <p:cNvSpPr txBox="1"/>
-          <p:nvPr/>
-        </p:nvSpPr>
-        <p:spPr>
-          <a:xfrm>
-            <a:off x="777240" y="6263640"/>
-            <a:ext cx="10607040" cy="457200"/>
-          </a:xfrm>
-          <a:prstGeom prst="rect">
-            <a:avLst/>
-          </a:prstGeom>
-          <a:noFill/>
-        </p:spPr>
-        <p:txBody>
-          <a:bodyPr wrap="square">
-            <a:spAutoFit/>
-          </a:bodyPr>
-          <a:lstStyle/>
-          <a:p>
-            <a:pPr algn="l">
-              <a:spcAft>
-                <a:spcPts val="600"/>
-              </a:spcAft>
-            </a:pPr>
-            <a:r>
-              <a:rPr sz="1400" b="1">
-                <a:solidFill>
-                  <a:srgbClr val="22D3EE"/>
-                </a:solidFill>
-                <a:latin typeface="Segoe UI"/>
-              </a:rPr>
-              <a:t>Each is now covered by the automated test suite.</a:t>
+                  <a:srgbClr val="F2F6FF"/>
+                </a:solidFill>
+                <a:latin typeface="Segoe UI"/>
+              </a:rPr>
+              <a:t>, on a laptop CPU.</a:t>
             </a:r>
           </a:p>
         </p:txBody>
